--- a/Chapter_3/04_Manuscript/Figures/Heatmap.pptx
+++ b/Chapter_3/04_Manuscript/Figures/Heatmap.pptx
@@ -2,7 +2,7 @@
 <file path=ppt/presentation.xml><?xml version="1.0" encoding="utf-8"?>
 <p:presentation xmlns:a="http://schemas.openxmlformats.org/drawingml/2006/main" xmlns:r="http://schemas.openxmlformats.org/officeDocument/2006/relationships" xmlns:p="http://schemas.openxmlformats.org/presentationml/2006/main" saveSubsetFonts="1">
   <p:sldMasterIdLst>
-    <p:sldMasterId id="2147483648" r:id="rId1"/>
+    <p:sldMasterId id="2147483660" r:id="rId1"/>
   </p:sldMasterIdLst>
   <p:notesMasterIdLst>
     <p:notesMasterId r:id="rId3"/>
@@ -13,13 +13,13 @@
   <p:sldIdLst>
     <p:sldId id="257" r:id="rId2"/>
   </p:sldIdLst>
-  <p:sldSz cx="10080625" cy="5670550"/>
+  <p:sldSz cx="20159663" cy="11520488"/>
   <p:notesSz cx="7559675" cy="10691813"/>
   <p:defaultTextStyle>
     <a:defPPr>
       <a:defRPr lang="en-US"/>
     </a:defPPr>
-    <a:lvl1pPr marL="0" algn="l" defTabSz="914400" rtl="0" eaLnBrk="1" latinLnBrk="0" hangingPunct="1">
+    <a:lvl1pPr marL="0" algn="l" defTabSz="457200" rtl="0" eaLnBrk="1" latinLnBrk="0" hangingPunct="1">
       <a:defRPr sz="1800" kern="1200">
         <a:solidFill>
           <a:schemeClr val="tx1"/>
@@ -29,7 +29,7 @@
         <a:cs typeface="+mn-cs"/>
       </a:defRPr>
     </a:lvl1pPr>
-    <a:lvl2pPr marL="457200" algn="l" defTabSz="914400" rtl="0" eaLnBrk="1" latinLnBrk="0" hangingPunct="1">
+    <a:lvl2pPr marL="457200" algn="l" defTabSz="457200" rtl="0" eaLnBrk="1" latinLnBrk="0" hangingPunct="1">
       <a:defRPr sz="1800" kern="1200">
         <a:solidFill>
           <a:schemeClr val="tx1"/>
@@ -39,7 +39,7 @@
         <a:cs typeface="+mn-cs"/>
       </a:defRPr>
     </a:lvl2pPr>
-    <a:lvl3pPr marL="914400" algn="l" defTabSz="914400" rtl="0" eaLnBrk="1" latinLnBrk="0" hangingPunct="1">
+    <a:lvl3pPr marL="914400" algn="l" defTabSz="457200" rtl="0" eaLnBrk="1" latinLnBrk="0" hangingPunct="1">
       <a:defRPr sz="1800" kern="1200">
         <a:solidFill>
           <a:schemeClr val="tx1"/>
@@ -49,7 +49,7 @@
         <a:cs typeface="+mn-cs"/>
       </a:defRPr>
     </a:lvl3pPr>
-    <a:lvl4pPr marL="1371600" algn="l" defTabSz="914400" rtl="0" eaLnBrk="1" latinLnBrk="0" hangingPunct="1">
+    <a:lvl4pPr marL="1371600" algn="l" defTabSz="457200" rtl="0" eaLnBrk="1" latinLnBrk="0" hangingPunct="1">
       <a:defRPr sz="1800" kern="1200">
         <a:solidFill>
           <a:schemeClr val="tx1"/>
@@ -59,7 +59,7 @@
         <a:cs typeface="+mn-cs"/>
       </a:defRPr>
     </a:lvl4pPr>
-    <a:lvl5pPr marL="1828800" algn="l" defTabSz="914400" rtl="0" eaLnBrk="1" latinLnBrk="0" hangingPunct="1">
+    <a:lvl5pPr marL="1828800" algn="l" defTabSz="457200" rtl="0" eaLnBrk="1" latinLnBrk="0" hangingPunct="1">
       <a:defRPr sz="1800" kern="1200">
         <a:solidFill>
           <a:schemeClr val="tx1"/>
@@ -69,7 +69,7 @@
         <a:cs typeface="+mn-cs"/>
       </a:defRPr>
     </a:lvl5pPr>
-    <a:lvl6pPr marL="2286000" algn="l" defTabSz="914400" rtl="0" eaLnBrk="1" latinLnBrk="0" hangingPunct="1">
+    <a:lvl6pPr marL="2286000" algn="l" defTabSz="457200" rtl="0" eaLnBrk="1" latinLnBrk="0" hangingPunct="1">
       <a:defRPr sz="1800" kern="1200">
         <a:solidFill>
           <a:schemeClr val="tx1"/>
@@ -79,7 +79,7 @@
         <a:cs typeface="+mn-cs"/>
       </a:defRPr>
     </a:lvl6pPr>
-    <a:lvl7pPr marL="2743200" algn="l" defTabSz="914400" rtl="0" eaLnBrk="1" latinLnBrk="0" hangingPunct="1">
+    <a:lvl7pPr marL="2743200" algn="l" defTabSz="457200" rtl="0" eaLnBrk="1" latinLnBrk="0" hangingPunct="1">
       <a:defRPr sz="1800" kern="1200">
         <a:solidFill>
           <a:schemeClr val="tx1"/>
@@ -89,7 +89,7 @@
         <a:cs typeface="+mn-cs"/>
       </a:defRPr>
     </a:lvl7pPr>
-    <a:lvl8pPr marL="3200400" algn="l" defTabSz="914400" rtl="0" eaLnBrk="1" latinLnBrk="0" hangingPunct="1">
+    <a:lvl8pPr marL="3200400" algn="l" defTabSz="457200" rtl="0" eaLnBrk="1" latinLnBrk="0" hangingPunct="1">
       <a:defRPr sz="1800" kern="1200">
         <a:solidFill>
           <a:schemeClr val="tx1"/>
@@ -99,7 +99,7 @@
         <a:cs typeface="+mn-cs"/>
       </a:defRPr>
     </a:lvl8pPr>
-    <a:lvl9pPr marL="3657600" algn="l" defTabSz="914400" rtl="0" eaLnBrk="1" latinLnBrk="0" hangingPunct="1">
+    <a:lvl9pPr marL="3657600" algn="l" defTabSz="457200" rtl="0" eaLnBrk="1" latinLnBrk="0" hangingPunct="1">
       <a:defRPr sz="1800" kern="1200">
         <a:solidFill>
           <a:schemeClr val="tx1"/>
@@ -394,7 +394,7 @@
               </a:defRPr>
             </a:pPr>
             <a:fld id="{94C2A79A-257B-4AA8-B0FD-67497D6E0AF5}" type="slidenum">
-              <a:t>‹Nr.›</a:t>
+              <a:t>‹#›</a:t>
             </a:fld>
             <a:endParaRPr lang="de-CH" sz="1400" b="0" i="0" u="none" strike="noStrike" kern="1200" cap="none" spc="0" baseline="0">
               <a:solidFill>
@@ -462,8 +462,8 @@
         </p:nvSpPr>
         <p:spPr>
           <a:xfrm>
-            <a:off x="215999" y="812517"/>
-            <a:ext cx="7127281" cy="4008958"/>
+            <a:off x="273050" y="812800"/>
+            <a:ext cx="7013575" cy="4008438"/>
           </a:xfrm>
           <a:prstGeom prst="rect">
             <a:avLst/>
@@ -764,7 +764,7 @@
           <a:p>
             <a:pPr lvl="0"/>
             <a:fld id="{50ACA1F5-EDBB-41DB-B243-A79241BD69D8}" type="slidenum">
-              <a:t>‹Nr.›</a:t>
+              <a:t>‹#›</a:t>
             </a:fld>
             <a:endParaRPr lang="de-CH"/>
           </a:p>
@@ -779,7 +779,7 @@
   </p:cSld>
   <p:clrMap bg1="lt1" tx1="dk1" bg2="lt2" tx2="dk2" accent1="accent1" accent2="accent2" accent3="accent3" accent4="accent4" accent5="accent5" accent6="accent6" hlink="hlink" folHlink="folHlink"/>
   <p:notesStyle>
-    <a:lvl1pPr marL="0" marR="0" lvl="0" indent="-215999" defTabSz="914400" rtl="0" fontAlgn="auto" hangingPunct="0">
+    <a:lvl1pPr marL="0" marR="0" lvl="0" indent="-434417" defTabSz="1839041" rtl="0" fontAlgn="auto" hangingPunct="0">
       <a:lnSpc>
         <a:spcPct val="100000"/>
       </a:lnSpc>
@@ -791,7 +791,7 @@
       </a:spcAft>
       <a:buNone/>
       <a:tabLst/>
-      <a:defRPr lang="de-CH" sz="2000" b="0" i="0" u="none" strike="noStrike" kern="1200" cap="none" spc="0" baseline="0">
+      <a:defRPr lang="de-CH" sz="4022" b="0" i="0" u="none" strike="noStrike" kern="1200" cap="none" spc="0" baseline="0">
         <a:solidFill>
           <a:srgbClr val="000000"/>
         </a:solidFill>
@@ -804,8 +804,8 @@
         <a:latin typeface="Liberation Sans" pitchFamily="18"/>
       </a:defRPr>
     </a:lvl1pPr>
-    <a:lvl2pPr marL="457200" algn="l" defTabSz="914400" rtl="0" eaLnBrk="1" latinLnBrk="0" hangingPunct="1">
-      <a:defRPr sz="1200" kern="1200">
+    <a:lvl2pPr marL="919521" algn="l" defTabSz="1839041" rtl="0" eaLnBrk="1" latinLnBrk="0" hangingPunct="1">
+      <a:defRPr sz="2413" kern="1200">
         <a:solidFill>
           <a:schemeClr val="tx1"/>
         </a:solidFill>
@@ -814,8 +814,8 @@
         <a:cs typeface="+mn-cs"/>
       </a:defRPr>
     </a:lvl2pPr>
-    <a:lvl3pPr marL="914400" algn="l" defTabSz="914400" rtl="0" eaLnBrk="1" latinLnBrk="0" hangingPunct="1">
-      <a:defRPr sz="1200" kern="1200">
+    <a:lvl3pPr marL="1839041" algn="l" defTabSz="1839041" rtl="0" eaLnBrk="1" latinLnBrk="0" hangingPunct="1">
+      <a:defRPr sz="2413" kern="1200">
         <a:solidFill>
           <a:schemeClr val="tx1"/>
         </a:solidFill>
@@ -824,8 +824,8 @@
         <a:cs typeface="+mn-cs"/>
       </a:defRPr>
     </a:lvl3pPr>
-    <a:lvl4pPr marL="1371600" algn="l" defTabSz="914400" rtl="0" eaLnBrk="1" latinLnBrk="0" hangingPunct="1">
-      <a:defRPr sz="1200" kern="1200">
+    <a:lvl4pPr marL="2758562" algn="l" defTabSz="1839041" rtl="0" eaLnBrk="1" latinLnBrk="0" hangingPunct="1">
+      <a:defRPr sz="2413" kern="1200">
         <a:solidFill>
           <a:schemeClr val="tx1"/>
         </a:solidFill>
@@ -834,8 +834,8 @@
         <a:cs typeface="+mn-cs"/>
       </a:defRPr>
     </a:lvl4pPr>
-    <a:lvl5pPr marL="1828800" algn="l" defTabSz="914400" rtl="0" eaLnBrk="1" latinLnBrk="0" hangingPunct="1">
-      <a:defRPr sz="1200" kern="1200">
+    <a:lvl5pPr marL="3678083" algn="l" defTabSz="1839041" rtl="0" eaLnBrk="1" latinLnBrk="0" hangingPunct="1">
+      <a:defRPr sz="2413" kern="1200">
         <a:solidFill>
           <a:schemeClr val="tx1"/>
         </a:solidFill>
@@ -844,8 +844,8 @@
         <a:cs typeface="+mn-cs"/>
       </a:defRPr>
     </a:lvl5pPr>
-    <a:lvl6pPr marL="2286000" algn="l" defTabSz="914400" rtl="0" eaLnBrk="1" latinLnBrk="0" hangingPunct="1">
-      <a:defRPr sz="1200" kern="1200">
+    <a:lvl6pPr marL="4597603" algn="l" defTabSz="1839041" rtl="0" eaLnBrk="1" latinLnBrk="0" hangingPunct="1">
+      <a:defRPr sz="2413" kern="1200">
         <a:solidFill>
           <a:schemeClr val="tx1"/>
         </a:solidFill>
@@ -854,8 +854,8 @@
         <a:cs typeface="+mn-cs"/>
       </a:defRPr>
     </a:lvl6pPr>
-    <a:lvl7pPr marL="2743200" algn="l" defTabSz="914400" rtl="0" eaLnBrk="1" latinLnBrk="0" hangingPunct="1">
-      <a:defRPr sz="1200" kern="1200">
+    <a:lvl7pPr marL="5517124" algn="l" defTabSz="1839041" rtl="0" eaLnBrk="1" latinLnBrk="0" hangingPunct="1">
+      <a:defRPr sz="2413" kern="1200">
         <a:solidFill>
           <a:schemeClr val="tx1"/>
         </a:solidFill>
@@ -864,8 +864,8 @@
         <a:cs typeface="+mn-cs"/>
       </a:defRPr>
     </a:lvl7pPr>
-    <a:lvl8pPr marL="3200400" algn="l" defTabSz="914400" rtl="0" eaLnBrk="1" latinLnBrk="0" hangingPunct="1">
-      <a:defRPr sz="1200" kern="1200">
+    <a:lvl8pPr marL="6436644" algn="l" defTabSz="1839041" rtl="0" eaLnBrk="1" latinLnBrk="0" hangingPunct="1">
+      <a:defRPr sz="2413" kern="1200">
         <a:solidFill>
           <a:schemeClr val="tx1"/>
         </a:solidFill>
@@ -874,8 +874,8 @@
         <a:cs typeface="+mn-cs"/>
       </a:defRPr>
     </a:lvl8pPr>
-    <a:lvl9pPr marL="3657600" algn="l" defTabSz="914400" rtl="0" eaLnBrk="1" latinLnBrk="0" hangingPunct="1">
-      <a:defRPr sz="1200" kern="1200">
+    <a:lvl9pPr marL="7356165" algn="l" defTabSz="1839041" rtl="0" eaLnBrk="1" latinLnBrk="0" hangingPunct="1">
+      <a:defRPr sz="2413" kern="1200">
         <a:solidFill>
           <a:schemeClr val="tx1"/>
         </a:solidFill>
@@ -988,8 +988,8 @@
         </p:nvSpPr>
         <p:spPr>
           <a:xfrm>
-            <a:off x="217488" y="812800"/>
-            <a:ext cx="7124700" cy="4008438"/>
+            <a:off x="273050" y="812800"/>
+            <a:ext cx="7013575" cy="4008438"/>
           </a:xfrm>
           <a:solidFill>
             <a:srgbClr val="729FCF"/>
@@ -1037,7 +1037,7 @@
 
 <file path=ppt/slideLayouts/slideLayout1.xml><?xml version="1.0" encoding="utf-8"?>
 <p:sldLayout xmlns:a="http://schemas.openxmlformats.org/drawingml/2006/main" xmlns:r="http://schemas.openxmlformats.org/officeDocument/2006/relationships" xmlns:p="http://schemas.openxmlformats.org/presentationml/2006/main" type="title" preserve="1">
-  <p:cSld name="Titelfolie">
+  <p:cSld name="Title Slide">
     <p:spTree>
       <p:nvGrpSpPr>
         <p:cNvPr id="1" name=""/>
@@ -1054,14 +1054,8 @@
       </p:grpSpPr>
       <p:sp>
         <p:nvSpPr>
-          <p:cNvPr id="2" name="Titel 1">
-            <a:extLst>
-              <a:ext uri="{FF2B5EF4-FFF2-40B4-BE49-F238E27FC236}">
-                <a16:creationId xmlns:a16="http://schemas.microsoft.com/office/drawing/2014/main" id="{74ED386D-73EA-64D4-E725-F1F4DF289810}"/>
-              </a:ext>
-            </a:extLst>
-          </p:cNvPr>
-          <p:cNvSpPr txBox="1">
+          <p:cNvPr id="2" name="Title 1"/>
+          <p:cNvSpPr>
             <a:spLocks noGrp="1"/>
           </p:cNvSpPr>
           <p:nvPr>
@@ -1070,37 +1064,30 @@
         </p:nvSpPr>
         <p:spPr>
           <a:xfrm>
-            <a:off x="1260472" y="928692"/>
-            <a:ext cx="7559673" cy="1973266"/>
+            <a:off x="2519958" y="1885414"/>
+            <a:ext cx="15119747" cy="4010837"/>
           </a:xfrm>
         </p:spPr>
         <p:txBody>
           <a:bodyPr anchor="b"/>
           <a:lstStyle>
-            <a:lvl1pPr>
-              <a:defRPr lang="de-DE" sz="6000"/>
+            <a:lvl1pPr algn="ctr">
+              <a:defRPr sz="9921"/>
             </a:lvl1pPr>
           </a:lstStyle>
           <a:p>
-            <a:pPr lvl="0"/>
             <a:r>
-              <a:rPr lang="de-DE"/>
-              <a:t>Mastertitelformat bearbeiten</a:t>
+              <a:rPr lang="en-US"/>
+              <a:t>Click to edit Master title style</a:t>
             </a:r>
-            <a:endParaRPr lang="en-US"/>
-          </a:p>
-        </p:txBody>
-      </p:sp>
-      <p:sp>
-        <p:nvSpPr>
-          <p:cNvPr id="3" name="Untertitel 2">
-            <a:extLst>
-              <a:ext uri="{FF2B5EF4-FFF2-40B4-BE49-F238E27FC236}">
-                <a16:creationId xmlns:a16="http://schemas.microsoft.com/office/drawing/2014/main" id="{6A4C5126-6B71-02A7-64B1-4265D46893FD}"/>
-              </a:ext>
-            </a:extLst>
-          </p:cNvPr>
-          <p:cNvSpPr txBox="1">
+            <a:endParaRPr lang="en-US" dirty="0"/>
+          </a:p>
+        </p:txBody>
+      </p:sp>
+      <p:sp>
+        <p:nvSpPr>
+          <p:cNvPr id="3" name="Subtitle 2"/>
+          <p:cNvSpPr>
             <a:spLocks noGrp="1"/>
           </p:cNvSpPr>
           <p:nvPr>
@@ -1109,51 +1096,73 @@
         </p:nvSpPr>
         <p:spPr>
           <a:xfrm>
-            <a:off x="1260472" y="2978145"/>
-            <a:ext cx="7559673" cy="1370008"/>
+            <a:off x="2519958" y="6050924"/>
+            <a:ext cx="15119747" cy="2781450"/>
           </a:xfrm>
         </p:spPr>
         <p:txBody>
-          <a:bodyPr anchorCtr="1"/>
-          <a:lstStyle>
-            <a:lvl1pPr algn="ctr">
-              <a:defRPr sz="2400"/>
-            </a:lvl1pPr>
-          </a:lstStyle>
-          <a:p>
-            <a:pPr lvl="0"/>
-            <a:r>
-              <a:rPr lang="de-DE"/>
-              <a:t>Master-Untertitelformat bearbeiten</a:t>
-            </a:r>
-            <a:endParaRPr lang="en-US"/>
-          </a:p>
-        </p:txBody>
-      </p:sp>
-      <p:sp>
-        <p:nvSpPr>
-          <p:cNvPr id="4" name="Datumsplatzhalter 3">
-            <a:extLst>
-              <a:ext uri="{FF2B5EF4-FFF2-40B4-BE49-F238E27FC236}">
-                <a16:creationId xmlns:a16="http://schemas.microsoft.com/office/drawing/2014/main" id="{5144F13A-0137-505E-9B16-24AFC994BAD1}"/>
-              </a:ext>
-            </a:extLst>
-          </p:cNvPr>
-          <p:cNvSpPr txBox="1">
-            <a:spLocks noGrp="1"/>
-          </p:cNvSpPr>
-          <p:nvPr>
-            <p:ph type="dt" sz="half" idx="7"/>
-          </p:nvPr>
-        </p:nvSpPr>
-        <p:spPr/>
-        <p:txBody>
           <a:bodyPr/>
           <a:lstStyle>
-            <a:lvl1pPr>
-              <a:defRPr/>
+            <a:lvl1pPr marL="0" indent="0" algn="ctr">
+              <a:buNone/>
+              <a:defRPr sz="3968"/>
             </a:lvl1pPr>
+            <a:lvl2pPr marL="755980" indent="0" algn="ctr">
+              <a:buNone/>
+              <a:defRPr sz="3307"/>
+            </a:lvl2pPr>
+            <a:lvl3pPr marL="1511960" indent="0" algn="ctr">
+              <a:buNone/>
+              <a:defRPr sz="2976"/>
+            </a:lvl3pPr>
+            <a:lvl4pPr marL="2267941" indent="0" algn="ctr">
+              <a:buNone/>
+              <a:defRPr sz="2646"/>
+            </a:lvl4pPr>
+            <a:lvl5pPr marL="3023921" indent="0" algn="ctr">
+              <a:buNone/>
+              <a:defRPr sz="2646"/>
+            </a:lvl5pPr>
+            <a:lvl6pPr marL="3779901" indent="0" algn="ctr">
+              <a:buNone/>
+              <a:defRPr sz="2646"/>
+            </a:lvl6pPr>
+            <a:lvl7pPr marL="4535881" indent="0" algn="ctr">
+              <a:buNone/>
+              <a:defRPr sz="2646"/>
+            </a:lvl7pPr>
+            <a:lvl8pPr marL="5291861" indent="0" algn="ctr">
+              <a:buNone/>
+              <a:defRPr sz="2646"/>
+            </a:lvl8pPr>
+            <a:lvl9pPr marL="6047842" indent="0" algn="ctr">
+              <a:buNone/>
+              <a:defRPr sz="2646"/>
+            </a:lvl9pPr>
           </a:lstStyle>
+          <a:p>
+            <a:r>
+              <a:rPr lang="en-US"/>
+              <a:t>Click to edit Master subtitle style</a:t>
+            </a:r>
+            <a:endParaRPr lang="en-US" dirty="0"/>
+          </a:p>
+        </p:txBody>
+      </p:sp>
+      <p:sp>
+        <p:nvSpPr>
+          <p:cNvPr id="4" name="Date Placeholder 3"/>
+          <p:cNvSpPr>
+            <a:spLocks noGrp="1"/>
+          </p:cNvSpPr>
+          <p:nvPr>
+            <p:ph type="dt" sz="half" idx="10"/>
+          </p:nvPr>
+        </p:nvSpPr>
+        <p:spPr/>
+        <p:txBody>
+          <a:bodyPr/>
+          <a:lstStyle/>
           <a:p>
             <a:pPr lvl="0"/>
             <a:endParaRPr lang="de-CH"/>
@@ -1162,28 +1171,18 @@
       </p:sp>
       <p:sp>
         <p:nvSpPr>
-          <p:cNvPr id="5" name="Fußzeilenplatzhalter 4">
-            <a:extLst>
-              <a:ext uri="{FF2B5EF4-FFF2-40B4-BE49-F238E27FC236}">
-                <a16:creationId xmlns:a16="http://schemas.microsoft.com/office/drawing/2014/main" id="{A4C15CCD-6AD8-CEA2-C144-A2DCCC0D0733}"/>
-              </a:ext>
-            </a:extLst>
-          </p:cNvPr>
-          <p:cNvSpPr txBox="1">
-            <a:spLocks noGrp="1"/>
-          </p:cNvSpPr>
-          <p:nvPr>
-            <p:ph type="ftr" sz="quarter" idx="9"/>
+          <p:cNvPr id="5" name="Footer Placeholder 4"/>
+          <p:cNvSpPr>
+            <a:spLocks noGrp="1"/>
+          </p:cNvSpPr>
+          <p:nvPr>
+            <p:ph type="ftr" sz="quarter" idx="11"/>
           </p:nvPr>
         </p:nvSpPr>
         <p:spPr/>
         <p:txBody>
           <a:bodyPr/>
-          <a:lstStyle>
-            <a:lvl1pPr>
-              <a:defRPr/>
-            </a:lvl1pPr>
-          </a:lstStyle>
+          <a:lstStyle/>
           <a:p>
             <a:pPr lvl="0"/>
             <a:endParaRPr lang="de-CH"/>
@@ -1192,41 +1191,32 @@
       </p:sp>
       <p:sp>
         <p:nvSpPr>
-          <p:cNvPr id="6" name="Foliennummernplatzhalter 5">
-            <a:extLst>
-              <a:ext uri="{FF2B5EF4-FFF2-40B4-BE49-F238E27FC236}">
-                <a16:creationId xmlns:a16="http://schemas.microsoft.com/office/drawing/2014/main" id="{4F6F8B92-AF3A-3802-A8DB-7F46DBD6B2F9}"/>
-              </a:ext>
-            </a:extLst>
-          </p:cNvPr>
-          <p:cNvSpPr txBox="1">
-            <a:spLocks noGrp="1"/>
-          </p:cNvSpPr>
-          <p:nvPr>
-            <p:ph type="sldNum" sz="quarter" idx="8"/>
+          <p:cNvPr id="6" name="Slide Number Placeholder 5"/>
+          <p:cNvSpPr>
+            <a:spLocks noGrp="1"/>
+          </p:cNvSpPr>
+          <p:nvPr>
+            <p:ph type="sldNum" sz="quarter" idx="12"/>
           </p:nvPr>
         </p:nvSpPr>
         <p:spPr/>
         <p:txBody>
           <a:bodyPr/>
-          <a:lstStyle>
-            <a:lvl1pPr>
-              <a:defRPr/>
-            </a:lvl1pPr>
-          </a:lstStyle>
+          <a:lstStyle/>
           <a:p>
             <a:pPr lvl="0"/>
-            <a:fld id="{BD19A188-5FC9-4ACC-9094-6D2381293AFD}" type="slidenum">
-              <a:t>‹Nr.›</a:t>
+            <a:fld id="{C6B6AF47-4323-4F4D-9EF2-7E7793B825DE}" type="slidenum">
+              <a:rPr lang="en-US" smtClean="0"/>
+              <a:t>‹#›</a:t>
             </a:fld>
-            <a:endParaRPr lang="de-CH"/>
+            <a:endParaRPr lang="en-US"/>
           </a:p>
         </p:txBody>
       </p:sp>
     </p:spTree>
     <p:extLst>
       <p:ext uri="{BB962C8B-B14F-4D97-AF65-F5344CB8AC3E}">
-        <p14:creationId xmlns:p14="http://schemas.microsoft.com/office/powerpoint/2010/main" val="1543011104"/>
+        <p14:creationId xmlns:p14="http://schemas.microsoft.com/office/powerpoint/2010/main" val="2070493329"/>
       </p:ext>
     </p:extLst>
   </p:cSld>
@@ -1238,7 +1228,7 @@
 
 <file path=ppt/slideLayouts/slideLayout10.xml><?xml version="1.0" encoding="utf-8"?>
 <p:sldLayout xmlns:a="http://schemas.openxmlformats.org/drawingml/2006/main" xmlns:r="http://schemas.openxmlformats.org/officeDocument/2006/relationships" xmlns:p="http://schemas.openxmlformats.org/presentationml/2006/main" type="vertTx" preserve="1">
-  <p:cSld name="Titel und vertikaler Text">
+  <p:cSld name="Title and Vertical Text">
     <p:spTree>
       <p:nvGrpSpPr>
         <p:cNvPr id="1" name=""/>
@@ -1255,14 +1245,8 @@
       </p:grpSpPr>
       <p:sp>
         <p:nvSpPr>
-          <p:cNvPr id="2" name="Titel 1">
-            <a:extLst>
-              <a:ext uri="{FF2B5EF4-FFF2-40B4-BE49-F238E27FC236}">
-                <a16:creationId xmlns:a16="http://schemas.microsoft.com/office/drawing/2014/main" id="{11248D05-4827-05D9-BC69-193A4C8C63CA}"/>
-              </a:ext>
-            </a:extLst>
-          </p:cNvPr>
-          <p:cNvSpPr txBox="1">
+          <p:cNvPr id="2" name="Title 1"/>
+          <p:cNvSpPr>
             <a:spLocks noGrp="1"/>
           </p:cNvSpPr>
           <p:nvPr>
@@ -1272,119 +1256,82 @@
         <p:spPr/>
         <p:txBody>
           <a:bodyPr/>
-          <a:lstStyle>
-            <a:lvl1pPr>
-              <a:defRPr lang="de-DE"/>
-            </a:lvl1pPr>
-          </a:lstStyle>
+          <a:lstStyle/>
+          <a:p>
+            <a:r>
+              <a:rPr lang="en-US"/>
+              <a:t>Click to edit Master title style</a:t>
+            </a:r>
+            <a:endParaRPr lang="en-US" dirty="0"/>
+          </a:p>
+        </p:txBody>
+      </p:sp>
+      <p:sp>
+        <p:nvSpPr>
+          <p:cNvPr id="3" name="Vertical Text Placeholder 2"/>
+          <p:cNvSpPr>
+            <a:spLocks noGrp="1"/>
+          </p:cNvSpPr>
+          <p:nvPr>
+            <p:ph type="body" orient="vert" idx="1"/>
+          </p:nvPr>
+        </p:nvSpPr>
+        <p:spPr/>
+        <p:txBody>
+          <a:bodyPr vert="eaVert"/>
+          <a:lstStyle/>
           <a:p>
             <a:pPr lvl="0"/>
             <a:r>
-              <a:rPr lang="de-DE"/>
-              <a:t>Mastertitelformat bearbeiten</a:t>
-            </a:r>
-            <a:endParaRPr lang="en-US"/>
-          </a:p>
-        </p:txBody>
-      </p:sp>
-      <p:sp>
-        <p:nvSpPr>
-          <p:cNvPr id="3" name="Vertikaler Textplatzhalter 2">
-            <a:extLst>
-              <a:ext uri="{FF2B5EF4-FFF2-40B4-BE49-F238E27FC236}">
-                <a16:creationId xmlns:a16="http://schemas.microsoft.com/office/drawing/2014/main" id="{BCA89C53-D0D8-82F9-13A9-610724DF4540}"/>
-              </a:ext>
-            </a:extLst>
-          </p:cNvPr>
-          <p:cNvSpPr txBox="1">
-            <a:spLocks noGrp="1"/>
-          </p:cNvSpPr>
-          <p:nvPr>
-            <p:ph type="body" orient="vert" idx="1"/>
-          </p:nvPr>
-        </p:nvSpPr>
-        <p:spPr/>
-        <p:txBody>
-          <a:bodyPr vert="eaVert"/>
-          <a:lstStyle>
-            <a:lvl1pPr>
-              <a:defRPr/>
-            </a:lvl1pPr>
-            <a:lvl2pPr>
-              <a:defRPr/>
-            </a:lvl2pPr>
-            <a:lvl3pPr>
-              <a:defRPr/>
-            </a:lvl3pPr>
-            <a:lvl4pPr>
-              <a:defRPr/>
-            </a:lvl4pPr>
-            <a:lvl5pPr>
-              <a:defRPr/>
-            </a:lvl5pPr>
-          </a:lstStyle>
-          <a:p>
-            <a:pPr lvl="0"/>
-            <a:r>
-              <a:rPr lang="de-DE"/>
-              <a:t>Mastertextformat bearbeiten</a:t>
+              <a:rPr lang="en-US"/>
+              <a:t>Click to edit Master text styles</a:t>
             </a:r>
           </a:p>
           <a:p>
             <a:pPr lvl="1"/>
             <a:r>
-              <a:rPr lang="de-DE"/>
-              <a:t>Zweite Ebene</a:t>
+              <a:rPr lang="en-US"/>
+              <a:t>Second level</a:t>
             </a:r>
           </a:p>
           <a:p>
             <a:pPr lvl="2"/>
             <a:r>
-              <a:rPr lang="de-DE"/>
-              <a:t>Dritte Ebene</a:t>
+              <a:rPr lang="en-US"/>
+              <a:t>Third level</a:t>
             </a:r>
           </a:p>
           <a:p>
             <a:pPr lvl="3"/>
             <a:r>
-              <a:rPr lang="de-DE"/>
-              <a:t>Vierte Ebene</a:t>
+              <a:rPr lang="en-US"/>
+              <a:t>Fourth level</a:t>
             </a:r>
           </a:p>
           <a:p>
             <a:pPr lvl="4"/>
             <a:r>
-              <a:rPr lang="de-DE"/>
-              <a:t>Fünfte Ebene</a:t>
+              <a:rPr lang="en-US"/>
+              <a:t>Fifth level</a:t>
             </a:r>
-            <a:endParaRPr lang="en-US"/>
-          </a:p>
-        </p:txBody>
-      </p:sp>
-      <p:sp>
-        <p:nvSpPr>
-          <p:cNvPr id="4" name="Datumsplatzhalter 3">
-            <a:extLst>
-              <a:ext uri="{FF2B5EF4-FFF2-40B4-BE49-F238E27FC236}">
-                <a16:creationId xmlns:a16="http://schemas.microsoft.com/office/drawing/2014/main" id="{C58BEE0D-3C79-C3B0-FDB4-A67E7FFD4899}"/>
-              </a:ext>
-            </a:extLst>
-          </p:cNvPr>
-          <p:cNvSpPr txBox="1">
-            <a:spLocks noGrp="1"/>
-          </p:cNvSpPr>
-          <p:nvPr>
-            <p:ph type="dt" sz="half" idx="7"/>
+            <a:endParaRPr lang="en-US" dirty="0"/>
+          </a:p>
+        </p:txBody>
+      </p:sp>
+      <p:sp>
+        <p:nvSpPr>
+          <p:cNvPr id="4" name="Date Placeholder 3"/>
+          <p:cNvSpPr>
+            <a:spLocks noGrp="1"/>
+          </p:cNvSpPr>
+          <p:nvPr>
+            <p:ph type="dt" sz="half" idx="10"/>
           </p:nvPr>
         </p:nvSpPr>
         <p:spPr/>
         <p:txBody>
           <a:bodyPr/>
-          <a:lstStyle>
-            <a:lvl1pPr>
-              <a:defRPr/>
-            </a:lvl1pPr>
-          </a:lstStyle>
+          <a:lstStyle/>
           <a:p>
             <a:pPr lvl="0"/>
             <a:endParaRPr lang="de-CH"/>
@@ -1393,28 +1340,18 @@
       </p:sp>
       <p:sp>
         <p:nvSpPr>
-          <p:cNvPr id="5" name="Fußzeilenplatzhalter 4">
-            <a:extLst>
-              <a:ext uri="{FF2B5EF4-FFF2-40B4-BE49-F238E27FC236}">
-                <a16:creationId xmlns:a16="http://schemas.microsoft.com/office/drawing/2014/main" id="{6704BDEE-8A6D-B17A-B885-AC0AE479BC91}"/>
-              </a:ext>
-            </a:extLst>
-          </p:cNvPr>
-          <p:cNvSpPr txBox="1">
-            <a:spLocks noGrp="1"/>
-          </p:cNvSpPr>
-          <p:nvPr>
-            <p:ph type="ftr" sz="quarter" idx="9"/>
+          <p:cNvPr id="5" name="Footer Placeholder 4"/>
+          <p:cNvSpPr>
+            <a:spLocks noGrp="1"/>
+          </p:cNvSpPr>
+          <p:nvPr>
+            <p:ph type="ftr" sz="quarter" idx="11"/>
           </p:nvPr>
         </p:nvSpPr>
         <p:spPr/>
         <p:txBody>
           <a:bodyPr/>
-          <a:lstStyle>
-            <a:lvl1pPr>
-              <a:defRPr/>
-            </a:lvl1pPr>
-          </a:lstStyle>
+          <a:lstStyle/>
           <a:p>
             <a:pPr lvl="0"/>
             <a:endParaRPr lang="de-CH"/>
@@ -1423,41 +1360,32 @@
       </p:sp>
       <p:sp>
         <p:nvSpPr>
-          <p:cNvPr id="6" name="Foliennummernplatzhalter 5">
-            <a:extLst>
-              <a:ext uri="{FF2B5EF4-FFF2-40B4-BE49-F238E27FC236}">
-                <a16:creationId xmlns:a16="http://schemas.microsoft.com/office/drawing/2014/main" id="{FE3CBA23-EED6-2309-8B8E-4A3B5F26E159}"/>
-              </a:ext>
-            </a:extLst>
-          </p:cNvPr>
-          <p:cNvSpPr txBox="1">
-            <a:spLocks noGrp="1"/>
-          </p:cNvSpPr>
-          <p:nvPr>
-            <p:ph type="sldNum" sz="quarter" idx="8"/>
+          <p:cNvPr id="6" name="Slide Number Placeholder 5"/>
+          <p:cNvSpPr>
+            <a:spLocks noGrp="1"/>
+          </p:cNvSpPr>
+          <p:nvPr>
+            <p:ph type="sldNum" sz="quarter" idx="12"/>
           </p:nvPr>
         </p:nvSpPr>
         <p:spPr/>
         <p:txBody>
           <a:bodyPr/>
-          <a:lstStyle>
-            <a:lvl1pPr>
-              <a:defRPr/>
-            </a:lvl1pPr>
-          </a:lstStyle>
+          <a:lstStyle/>
           <a:p>
             <a:pPr lvl="0"/>
-            <a:fld id="{5EED6C35-7FCA-4775-887F-5416C015CE22}" type="slidenum">
-              <a:t>‹Nr.›</a:t>
+            <a:fld id="{C6B6AF47-4323-4F4D-9EF2-7E7793B825DE}" type="slidenum">
+              <a:rPr lang="en-US" smtClean="0"/>
+              <a:t>‹#›</a:t>
             </a:fld>
-            <a:endParaRPr lang="de-CH"/>
+            <a:endParaRPr lang="en-US"/>
           </a:p>
         </p:txBody>
       </p:sp>
     </p:spTree>
     <p:extLst>
       <p:ext uri="{BB962C8B-B14F-4D97-AF65-F5344CB8AC3E}">
-        <p14:creationId xmlns:p14="http://schemas.microsoft.com/office/powerpoint/2010/main" val="1343133057"/>
+        <p14:creationId xmlns:p14="http://schemas.microsoft.com/office/powerpoint/2010/main" val="3765166631"/>
       </p:ext>
     </p:extLst>
   </p:cSld>
@@ -1469,7 +1397,7 @@
 
 <file path=ppt/slideLayouts/slideLayout11.xml><?xml version="1.0" encoding="utf-8"?>
 <p:sldLayout xmlns:a="http://schemas.openxmlformats.org/drawingml/2006/main" xmlns:r="http://schemas.openxmlformats.org/officeDocument/2006/relationships" xmlns:p="http://schemas.openxmlformats.org/presentationml/2006/main" type="vertTitleAndTx" preserve="1">
-  <p:cSld name="Vertikaler Titel und Text">
+  <p:cSld name="Vertical Title and Text">
     <p:spTree>
       <p:nvGrpSpPr>
         <p:cNvPr id="1" name=""/>
@@ -1486,14 +1414,8 @@
       </p:grpSpPr>
       <p:sp>
         <p:nvSpPr>
-          <p:cNvPr id="2" name="Vertikaler Titel 1">
-            <a:extLst>
-              <a:ext uri="{FF2B5EF4-FFF2-40B4-BE49-F238E27FC236}">
-                <a16:creationId xmlns:a16="http://schemas.microsoft.com/office/drawing/2014/main" id="{B654F91D-3F08-4863-EE19-A1A2DA550CA9}"/>
-              </a:ext>
-            </a:extLst>
-          </p:cNvPr>
-          <p:cNvSpPr txBox="1">
+          <p:cNvPr id="2" name="Vertical Title 1"/>
+          <p:cNvSpPr>
             <a:spLocks noGrp="1"/>
           </p:cNvSpPr>
           <p:nvPr>
@@ -1502,130 +1424,93 @@
         </p:nvSpPr>
         <p:spPr>
           <a:xfrm>
-            <a:off x="7308854" y="225427"/>
-            <a:ext cx="2266953" cy="4389440"/>
+            <a:off x="14426759" y="613359"/>
+            <a:ext cx="4346927" cy="9763081"/>
           </a:xfrm>
         </p:spPr>
         <p:txBody>
           <a:bodyPr vert="eaVert"/>
-          <a:lstStyle>
-            <a:lvl1pPr>
-              <a:defRPr lang="de-DE"/>
-            </a:lvl1pPr>
-          </a:lstStyle>
+          <a:lstStyle/>
+          <a:p>
+            <a:r>
+              <a:rPr lang="en-US"/>
+              <a:t>Click to edit Master title style</a:t>
+            </a:r>
+            <a:endParaRPr lang="en-US" dirty="0"/>
+          </a:p>
+        </p:txBody>
+      </p:sp>
+      <p:sp>
+        <p:nvSpPr>
+          <p:cNvPr id="3" name="Vertical Text Placeholder 2"/>
+          <p:cNvSpPr>
+            <a:spLocks noGrp="1"/>
+          </p:cNvSpPr>
+          <p:nvPr>
+            <p:ph type="body" orient="vert" idx="1"/>
+          </p:nvPr>
+        </p:nvSpPr>
+        <p:spPr>
+          <a:xfrm>
+            <a:off x="1385977" y="613359"/>
+            <a:ext cx="12788786" cy="9763081"/>
+          </a:xfrm>
+        </p:spPr>
+        <p:txBody>
+          <a:bodyPr vert="eaVert"/>
+          <a:lstStyle/>
           <a:p>
             <a:pPr lvl="0"/>
             <a:r>
-              <a:rPr lang="de-DE"/>
-              <a:t>Mastertitelformat bearbeiten</a:t>
-            </a:r>
-            <a:endParaRPr lang="en-US"/>
-          </a:p>
-        </p:txBody>
-      </p:sp>
-      <p:sp>
-        <p:nvSpPr>
-          <p:cNvPr id="3" name="Vertikaler Textplatzhalter 2">
-            <a:extLst>
-              <a:ext uri="{FF2B5EF4-FFF2-40B4-BE49-F238E27FC236}">
-                <a16:creationId xmlns:a16="http://schemas.microsoft.com/office/drawing/2014/main" id="{933E58BF-1E1A-50AE-FDC2-4F1BEE925354}"/>
-              </a:ext>
-            </a:extLst>
-          </p:cNvPr>
-          <p:cNvSpPr txBox="1">
-            <a:spLocks noGrp="1"/>
-          </p:cNvSpPr>
-          <p:nvPr>
-            <p:ph type="body" orient="vert" idx="1"/>
-          </p:nvPr>
-        </p:nvSpPr>
-        <p:spPr>
-          <a:xfrm>
-            <a:off x="503240" y="225427"/>
-            <a:ext cx="6653210" cy="4389440"/>
-          </a:xfrm>
-        </p:spPr>
-        <p:txBody>
-          <a:bodyPr vert="eaVert"/>
-          <a:lstStyle>
-            <a:lvl1pPr>
-              <a:defRPr/>
-            </a:lvl1pPr>
-            <a:lvl2pPr>
-              <a:defRPr/>
-            </a:lvl2pPr>
-            <a:lvl3pPr>
-              <a:defRPr/>
-            </a:lvl3pPr>
-            <a:lvl4pPr>
-              <a:defRPr/>
-            </a:lvl4pPr>
-            <a:lvl5pPr>
-              <a:defRPr/>
-            </a:lvl5pPr>
-          </a:lstStyle>
-          <a:p>
-            <a:pPr lvl="0"/>
-            <a:r>
-              <a:rPr lang="de-DE"/>
-              <a:t>Mastertextformat bearbeiten</a:t>
+              <a:rPr lang="en-US"/>
+              <a:t>Click to edit Master text styles</a:t>
             </a:r>
           </a:p>
           <a:p>
             <a:pPr lvl="1"/>
             <a:r>
-              <a:rPr lang="de-DE"/>
-              <a:t>Zweite Ebene</a:t>
+              <a:rPr lang="en-US"/>
+              <a:t>Second level</a:t>
             </a:r>
           </a:p>
           <a:p>
             <a:pPr lvl="2"/>
             <a:r>
-              <a:rPr lang="de-DE"/>
-              <a:t>Dritte Ebene</a:t>
+              <a:rPr lang="en-US"/>
+              <a:t>Third level</a:t>
             </a:r>
           </a:p>
           <a:p>
             <a:pPr lvl="3"/>
             <a:r>
-              <a:rPr lang="de-DE"/>
-              <a:t>Vierte Ebene</a:t>
+              <a:rPr lang="en-US"/>
+              <a:t>Fourth level</a:t>
             </a:r>
           </a:p>
           <a:p>
             <a:pPr lvl="4"/>
             <a:r>
-              <a:rPr lang="de-DE"/>
-              <a:t>Fünfte Ebene</a:t>
+              <a:rPr lang="en-US"/>
+              <a:t>Fifth level</a:t>
             </a:r>
-            <a:endParaRPr lang="en-US"/>
-          </a:p>
-        </p:txBody>
-      </p:sp>
-      <p:sp>
-        <p:nvSpPr>
-          <p:cNvPr id="4" name="Datumsplatzhalter 3">
-            <a:extLst>
-              <a:ext uri="{FF2B5EF4-FFF2-40B4-BE49-F238E27FC236}">
-                <a16:creationId xmlns:a16="http://schemas.microsoft.com/office/drawing/2014/main" id="{5BC49AF7-A148-BC7E-7180-8BA753CB33D6}"/>
-              </a:ext>
-            </a:extLst>
-          </p:cNvPr>
-          <p:cNvSpPr txBox="1">
-            <a:spLocks noGrp="1"/>
-          </p:cNvSpPr>
-          <p:nvPr>
-            <p:ph type="dt" sz="half" idx="7"/>
+            <a:endParaRPr lang="en-US" dirty="0"/>
+          </a:p>
+        </p:txBody>
+      </p:sp>
+      <p:sp>
+        <p:nvSpPr>
+          <p:cNvPr id="4" name="Date Placeholder 3"/>
+          <p:cNvSpPr>
+            <a:spLocks noGrp="1"/>
+          </p:cNvSpPr>
+          <p:nvPr>
+            <p:ph type="dt" sz="half" idx="10"/>
           </p:nvPr>
         </p:nvSpPr>
         <p:spPr/>
         <p:txBody>
           <a:bodyPr/>
-          <a:lstStyle>
-            <a:lvl1pPr>
-              <a:defRPr/>
-            </a:lvl1pPr>
-          </a:lstStyle>
+          <a:lstStyle/>
           <a:p>
             <a:pPr lvl="0"/>
             <a:endParaRPr lang="de-CH"/>
@@ -1634,28 +1519,18 @@
       </p:sp>
       <p:sp>
         <p:nvSpPr>
-          <p:cNvPr id="5" name="Fußzeilenplatzhalter 4">
-            <a:extLst>
-              <a:ext uri="{FF2B5EF4-FFF2-40B4-BE49-F238E27FC236}">
-                <a16:creationId xmlns:a16="http://schemas.microsoft.com/office/drawing/2014/main" id="{B9C02905-5BED-23A3-DA3C-FCA0BDB51122}"/>
-              </a:ext>
-            </a:extLst>
-          </p:cNvPr>
-          <p:cNvSpPr txBox="1">
-            <a:spLocks noGrp="1"/>
-          </p:cNvSpPr>
-          <p:nvPr>
-            <p:ph type="ftr" sz="quarter" idx="9"/>
+          <p:cNvPr id="5" name="Footer Placeholder 4"/>
+          <p:cNvSpPr>
+            <a:spLocks noGrp="1"/>
+          </p:cNvSpPr>
+          <p:nvPr>
+            <p:ph type="ftr" sz="quarter" idx="11"/>
           </p:nvPr>
         </p:nvSpPr>
         <p:spPr/>
         <p:txBody>
           <a:bodyPr/>
-          <a:lstStyle>
-            <a:lvl1pPr>
-              <a:defRPr/>
-            </a:lvl1pPr>
-          </a:lstStyle>
+          <a:lstStyle/>
           <a:p>
             <a:pPr lvl="0"/>
             <a:endParaRPr lang="de-CH"/>
@@ -1664,41 +1539,32 @@
       </p:sp>
       <p:sp>
         <p:nvSpPr>
-          <p:cNvPr id="6" name="Foliennummernplatzhalter 5">
-            <a:extLst>
-              <a:ext uri="{FF2B5EF4-FFF2-40B4-BE49-F238E27FC236}">
-                <a16:creationId xmlns:a16="http://schemas.microsoft.com/office/drawing/2014/main" id="{493CC268-7BCE-DE09-09B4-98B97F29FF16}"/>
-              </a:ext>
-            </a:extLst>
-          </p:cNvPr>
-          <p:cNvSpPr txBox="1">
-            <a:spLocks noGrp="1"/>
-          </p:cNvSpPr>
-          <p:nvPr>
-            <p:ph type="sldNum" sz="quarter" idx="8"/>
+          <p:cNvPr id="6" name="Slide Number Placeholder 5"/>
+          <p:cNvSpPr>
+            <a:spLocks noGrp="1"/>
+          </p:cNvSpPr>
+          <p:nvPr>
+            <p:ph type="sldNum" sz="quarter" idx="12"/>
           </p:nvPr>
         </p:nvSpPr>
         <p:spPr/>
         <p:txBody>
           <a:bodyPr/>
-          <a:lstStyle>
-            <a:lvl1pPr>
-              <a:defRPr/>
-            </a:lvl1pPr>
-          </a:lstStyle>
+          <a:lstStyle/>
           <a:p>
             <a:pPr lvl="0"/>
-            <a:fld id="{2913F3A9-F90D-4058-9C7A-A7C0340C29BD}" type="slidenum">
-              <a:t>‹Nr.›</a:t>
+            <a:fld id="{C6B6AF47-4323-4F4D-9EF2-7E7793B825DE}" type="slidenum">
+              <a:rPr lang="en-US" smtClean="0"/>
+              <a:t>‹#›</a:t>
             </a:fld>
-            <a:endParaRPr lang="de-CH"/>
+            <a:endParaRPr lang="en-US"/>
           </a:p>
         </p:txBody>
       </p:sp>
     </p:spTree>
     <p:extLst>
       <p:ext uri="{BB962C8B-B14F-4D97-AF65-F5344CB8AC3E}">
-        <p14:creationId xmlns:p14="http://schemas.microsoft.com/office/powerpoint/2010/main" val="1446769386"/>
+        <p14:creationId xmlns:p14="http://schemas.microsoft.com/office/powerpoint/2010/main" val="493823182"/>
       </p:ext>
     </p:extLst>
   </p:cSld>
@@ -1710,7 +1576,7 @@
 
 <file path=ppt/slideLayouts/slideLayout2.xml><?xml version="1.0" encoding="utf-8"?>
 <p:sldLayout xmlns:a="http://schemas.openxmlformats.org/drawingml/2006/main" xmlns:r="http://schemas.openxmlformats.org/officeDocument/2006/relationships" xmlns:p="http://schemas.openxmlformats.org/presentationml/2006/main" type="obj" preserve="1">
-  <p:cSld name="Titel und Inhalt">
+  <p:cSld name="Title and Content">
     <p:spTree>
       <p:nvGrpSpPr>
         <p:cNvPr id="1" name=""/>
@@ -1727,14 +1593,8 @@
       </p:grpSpPr>
       <p:sp>
         <p:nvSpPr>
-          <p:cNvPr id="2" name="Titel 1">
-            <a:extLst>
-              <a:ext uri="{FF2B5EF4-FFF2-40B4-BE49-F238E27FC236}">
-                <a16:creationId xmlns:a16="http://schemas.microsoft.com/office/drawing/2014/main" id="{D7C25063-13E5-212D-7B9E-167925C75C82}"/>
-              </a:ext>
-            </a:extLst>
-          </p:cNvPr>
-          <p:cNvSpPr txBox="1">
+          <p:cNvPr id="2" name="Title 1"/>
+          <p:cNvSpPr>
             <a:spLocks noGrp="1"/>
           </p:cNvSpPr>
           <p:nvPr>
@@ -1744,119 +1604,82 @@
         <p:spPr/>
         <p:txBody>
           <a:bodyPr/>
-          <a:lstStyle>
-            <a:lvl1pPr>
-              <a:defRPr lang="de-DE"/>
-            </a:lvl1pPr>
-          </a:lstStyle>
+          <a:lstStyle/>
+          <a:p>
+            <a:r>
+              <a:rPr lang="en-US"/>
+              <a:t>Click to edit Master title style</a:t>
+            </a:r>
+            <a:endParaRPr lang="en-US" dirty="0"/>
+          </a:p>
+        </p:txBody>
+      </p:sp>
+      <p:sp>
+        <p:nvSpPr>
+          <p:cNvPr id="3" name="Content Placeholder 2"/>
+          <p:cNvSpPr>
+            <a:spLocks noGrp="1"/>
+          </p:cNvSpPr>
+          <p:nvPr>
+            <p:ph idx="1"/>
+          </p:nvPr>
+        </p:nvSpPr>
+        <p:spPr/>
+        <p:txBody>
+          <a:bodyPr/>
+          <a:lstStyle/>
           <a:p>
             <a:pPr lvl="0"/>
             <a:r>
-              <a:rPr lang="de-DE"/>
-              <a:t>Mastertitelformat bearbeiten</a:t>
-            </a:r>
-            <a:endParaRPr lang="en-US"/>
-          </a:p>
-        </p:txBody>
-      </p:sp>
-      <p:sp>
-        <p:nvSpPr>
-          <p:cNvPr id="3" name="Inhaltsplatzhalter 2">
-            <a:extLst>
-              <a:ext uri="{FF2B5EF4-FFF2-40B4-BE49-F238E27FC236}">
-                <a16:creationId xmlns:a16="http://schemas.microsoft.com/office/drawing/2014/main" id="{51D023EA-AC86-5CE4-BF6F-86694F314885}"/>
-              </a:ext>
-            </a:extLst>
-          </p:cNvPr>
-          <p:cNvSpPr txBox="1">
-            <a:spLocks noGrp="1"/>
-          </p:cNvSpPr>
-          <p:nvPr>
-            <p:ph idx="1"/>
-          </p:nvPr>
-        </p:nvSpPr>
-        <p:spPr/>
-        <p:txBody>
-          <a:bodyPr/>
-          <a:lstStyle>
-            <a:lvl1pPr>
-              <a:defRPr/>
-            </a:lvl1pPr>
-            <a:lvl2pPr>
-              <a:defRPr/>
-            </a:lvl2pPr>
-            <a:lvl3pPr>
-              <a:defRPr/>
-            </a:lvl3pPr>
-            <a:lvl4pPr>
-              <a:defRPr/>
-            </a:lvl4pPr>
-            <a:lvl5pPr>
-              <a:defRPr/>
-            </a:lvl5pPr>
-          </a:lstStyle>
-          <a:p>
-            <a:pPr lvl="0"/>
-            <a:r>
-              <a:rPr lang="de-DE"/>
-              <a:t>Mastertextformat bearbeiten</a:t>
+              <a:rPr lang="en-US"/>
+              <a:t>Click to edit Master text styles</a:t>
             </a:r>
           </a:p>
           <a:p>
             <a:pPr lvl="1"/>
             <a:r>
-              <a:rPr lang="de-DE"/>
-              <a:t>Zweite Ebene</a:t>
+              <a:rPr lang="en-US"/>
+              <a:t>Second level</a:t>
             </a:r>
           </a:p>
           <a:p>
             <a:pPr lvl="2"/>
             <a:r>
-              <a:rPr lang="de-DE"/>
-              <a:t>Dritte Ebene</a:t>
+              <a:rPr lang="en-US"/>
+              <a:t>Third level</a:t>
             </a:r>
           </a:p>
           <a:p>
             <a:pPr lvl="3"/>
             <a:r>
-              <a:rPr lang="de-DE"/>
-              <a:t>Vierte Ebene</a:t>
+              <a:rPr lang="en-US"/>
+              <a:t>Fourth level</a:t>
             </a:r>
           </a:p>
           <a:p>
             <a:pPr lvl="4"/>
             <a:r>
-              <a:rPr lang="de-DE"/>
-              <a:t>Fünfte Ebene</a:t>
+              <a:rPr lang="en-US"/>
+              <a:t>Fifth level</a:t>
             </a:r>
-            <a:endParaRPr lang="en-US"/>
-          </a:p>
-        </p:txBody>
-      </p:sp>
-      <p:sp>
-        <p:nvSpPr>
-          <p:cNvPr id="4" name="Datumsplatzhalter 3">
-            <a:extLst>
-              <a:ext uri="{FF2B5EF4-FFF2-40B4-BE49-F238E27FC236}">
-                <a16:creationId xmlns:a16="http://schemas.microsoft.com/office/drawing/2014/main" id="{ED308702-732F-7674-BD70-8B2FE6C0DD84}"/>
-              </a:ext>
-            </a:extLst>
-          </p:cNvPr>
-          <p:cNvSpPr txBox="1">
-            <a:spLocks noGrp="1"/>
-          </p:cNvSpPr>
-          <p:nvPr>
-            <p:ph type="dt" sz="half" idx="7"/>
+            <a:endParaRPr lang="en-US" dirty="0"/>
+          </a:p>
+        </p:txBody>
+      </p:sp>
+      <p:sp>
+        <p:nvSpPr>
+          <p:cNvPr id="4" name="Date Placeholder 3"/>
+          <p:cNvSpPr>
+            <a:spLocks noGrp="1"/>
+          </p:cNvSpPr>
+          <p:nvPr>
+            <p:ph type="dt" sz="half" idx="10"/>
           </p:nvPr>
         </p:nvSpPr>
         <p:spPr/>
         <p:txBody>
           <a:bodyPr/>
-          <a:lstStyle>
-            <a:lvl1pPr>
-              <a:defRPr/>
-            </a:lvl1pPr>
-          </a:lstStyle>
+          <a:lstStyle/>
           <a:p>
             <a:pPr lvl="0"/>
             <a:endParaRPr lang="de-CH"/>
@@ -1865,28 +1688,18 @@
       </p:sp>
       <p:sp>
         <p:nvSpPr>
-          <p:cNvPr id="5" name="Fußzeilenplatzhalter 4">
-            <a:extLst>
-              <a:ext uri="{FF2B5EF4-FFF2-40B4-BE49-F238E27FC236}">
-                <a16:creationId xmlns:a16="http://schemas.microsoft.com/office/drawing/2014/main" id="{70DFE89C-213D-9237-1087-CFAD98B26329}"/>
-              </a:ext>
-            </a:extLst>
-          </p:cNvPr>
-          <p:cNvSpPr txBox="1">
-            <a:spLocks noGrp="1"/>
-          </p:cNvSpPr>
-          <p:nvPr>
-            <p:ph type="ftr" sz="quarter" idx="9"/>
+          <p:cNvPr id="5" name="Footer Placeholder 4"/>
+          <p:cNvSpPr>
+            <a:spLocks noGrp="1"/>
+          </p:cNvSpPr>
+          <p:nvPr>
+            <p:ph type="ftr" sz="quarter" idx="11"/>
           </p:nvPr>
         </p:nvSpPr>
         <p:spPr/>
         <p:txBody>
           <a:bodyPr/>
-          <a:lstStyle>
-            <a:lvl1pPr>
-              <a:defRPr/>
-            </a:lvl1pPr>
-          </a:lstStyle>
+          <a:lstStyle/>
           <a:p>
             <a:pPr lvl="0"/>
             <a:endParaRPr lang="de-CH"/>
@@ -1895,41 +1708,32 @@
       </p:sp>
       <p:sp>
         <p:nvSpPr>
-          <p:cNvPr id="6" name="Foliennummernplatzhalter 5">
-            <a:extLst>
-              <a:ext uri="{FF2B5EF4-FFF2-40B4-BE49-F238E27FC236}">
-                <a16:creationId xmlns:a16="http://schemas.microsoft.com/office/drawing/2014/main" id="{BDD6C7C7-397E-0953-9ED7-853CDCFB7226}"/>
-              </a:ext>
-            </a:extLst>
-          </p:cNvPr>
-          <p:cNvSpPr txBox="1">
-            <a:spLocks noGrp="1"/>
-          </p:cNvSpPr>
-          <p:nvPr>
-            <p:ph type="sldNum" sz="quarter" idx="8"/>
+          <p:cNvPr id="6" name="Slide Number Placeholder 5"/>
+          <p:cNvSpPr>
+            <a:spLocks noGrp="1"/>
+          </p:cNvSpPr>
+          <p:nvPr>
+            <p:ph type="sldNum" sz="quarter" idx="12"/>
           </p:nvPr>
         </p:nvSpPr>
         <p:spPr/>
         <p:txBody>
           <a:bodyPr/>
-          <a:lstStyle>
-            <a:lvl1pPr>
-              <a:defRPr/>
-            </a:lvl1pPr>
-          </a:lstStyle>
+          <a:lstStyle/>
           <a:p>
             <a:pPr lvl="0"/>
-            <a:fld id="{F6925571-17BA-45B2-B386-1BC5FBE03AC9}" type="slidenum">
-              <a:t>‹Nr.›</a:t>
+            <a:fld id="{C6B6AF47-4323-4F4D-9EF2-7E7793B825DE}" type="slidenum">
+              <a:rPr lang="en-US" smtClean="0"/>
+              <a:t>‹#›</a:t>
             </a:fld>
-            <a:endParaRPr lang="de-CH"/>
+            <a:endParaRPr lang="en-US"/>
           </a:p>
         </p:txBody>
       </p:sp>
     </p:spTree>
     <p:extLst>
       <p:ext uri="{BB962C8B-B14F-4D97-AF65-F5344CB8AC3E}">
-        <p14:creationId xmlns:p14="http://schemas.microsoft.com/office/powerpoint/2010/main" val="126857016"/>
+        <p14:creationId xmlns:p14="http://schemas.microsoft.com/office/powerpoint/2010/main" val="3039320368"/>
       </p:ext>
     </p:extLst>
   </p:cSld>
@@ -1941,7 +1745,7 @@
 
 <file path=ppt/slideLayouts/slideLayout3.xml><?xml version="1.0" encoding="utf-8"?>
 <p:sldLayout xmlns:a="http://schemas.openxmlformats.org/drawingml/2006/main" xmlns:r="http://schemas.openxmlformats.org/officeDocument/2006/relationships" xmlns:p="http://schemas.openxmlformats.org/presentationml/2006/main" type="secHead" preserve="1">
-  <p:cSld name="Abschnitts">
+  <p:cSld name="Section Header">
     <p:spTree>
       <p:nvGrpSpPr>
         <p:cNvPr id="1" name=""/>
@@ -1958,14 +1762,8 @@
       </p:grpSpPr>
       <p:sp>
         <p:nvSpPr>
-          <p:cNvPr id="2" name="Titel 1">
-            <a:extLst>
-              <a:ext uri="{FF2B5EF4-FFF2-40B4-BE49-F238E27FC236}">
-                <a16:creationId xmlns:a16="http://schemas.microsoft.com/office/drawing/2014/main" id="{09B30937-7CCC-1441-9484-45F6BFD6B084}"/>
-              </a:ext>
-            </a:extLst>
-          </p:cNvPr>
-          <p:cNvSpPr txBox="1">
+          <p:cNvPr id="2" name="Title 1"/>
+          <p:cNvSpPr>
             <a:spLocks noGrp="1"/>
           </p:cNvSpPr>
           <p:nvPr>
@@ -1974,37 +1772,30 @@
         </p:nvSpPr>
         <p:spPr>
           <a:xfrm>
-            <a:off x="687391" y="1414467"/>
-            <a:ext cx="8694736" cy="2357432"/>
+            <a:off x="1375477" y="2872123"/>
+            <a:ext cx="17387709" cy="4792202"/>
           </a:xfrm>
         </p:spPr>
         <p:txBody>
           <a:bodyPr anchor="b"/>
           <a:lstStyle>
             <a:lvl1pPr>
-              <a:defRPr lang="de-DE" sz="6000"/>
+              <a:defRPr sz="9921"/>
             </a:lvl1pPr>
           </a:lstStyle>
           <a:p>
-            <a:pPr lvl="0"/>
             <a:r>
-              <a:rPr lang="de-DE"/>
-              <a:t>Mastertitelformat bearbeiten</a:t>
+              <a:rPr lang="en-US"/>
+              <a:t>Click to edit Master title style</a:t>
             </a:r>
-            <a:endParaRPr lang="en-US"/>
-          </a:p>
-        </p:txBody>
-      </p:sp>
-      <p:sp>
-        <p:nvSpPr>
-          <p:cNvPr id="3" name="Textplatzhalter 2">
-            <a:extLst>
-              <a:ext uri="{FF2B5EF4-FFF2-40B4-BE49-F238E27FC236}">
-                <a16:creationId xmlns:a16="http://schemas.microsoft.com/office/drawing/2014/main" id="{CC7DA52F-0A1E-A9D6-1F06-F84D947FDFFC}"/>
-              </a:ext>
-            </a:extLst>
-          </p:cNvPr>
-          <p:cNvSpPr txBox="1">
+            <a:endParaRPr lang="en-US" dirty="0"/>
+          </a:p>
+        </p:txBody>
+      </p:sp>
+      <p:sp>
+        <p:nvSpPr>
+          <p:cNvPr id="3" name="Text Placeholder 2"/>
+          <p:cNvSpPr>
             <a:spLocks noGrp="1"/>
           </p:cNvSpPr>
           <p:nvPr>
@@ -2013,54 +1804,127 @@
         </p:nvSpPr>
         <p:spPr>
           <a:xfrm>
-            <a:off x="687391" y="3794129"/>
-            <a:ext cx="8694736" cy="1241426"/>
+            <a:off x="1375477" y="7709662"/>
+            <a:ext cx="17387709" cy="2520106"/>
           </a:xfrm>
         </p:spPr>
         <p:txBody>
           <a:bodyPr/>
           <a:lstStyle>
-            <a:lvl1pPr>
-              <a:defRPr sz="2400">
+            <a:lvl1pPr marL="0" indent="0">
+              <a:buNone/>
+              <a:defRPr sz="3968">
                 <a:solidFill>
-                  <a:srgbClr val="767676"/>
+                  <a:schemeClr val="tx1">
+                    <a:tint val="82000"/>
+                  </a:schemeClr>
                 </a:solidFill>
               </a:defRPr>
             </a:lvl1pPr>
+            <a:lvl2pPr marL="755980" indent="0">
+              <a:buNone/>
+              <a:defRPr sz="3307">
+                <a:solidFill>
+                  <a:schemeClr val="tx1">
+                    <a:tint val="82000"/>
+                  </a:schemeClr>
+                </a:solidFill>
+              </a:defRPr>
+            </a:lvl2pPr>
+            <a:lvl3pPr marL="1511960" indent="0">
+              <a:buNone/>
+              <a:defRPr sz="2976">
+                <a:solidFill>
+                  <a:schemeClr val="tx1">
+                    <a:tint val="82000"/>
+                  </a:schemeClr>
+                </a:solidFill>
+              </a:defRPr>
+            </a:lvl3pPr>
+            <a:lvl4pPr marL="2267941" indent="0">
+              <a:buNone/>
+              <a:defRPr sz="2646">
+                <a:solidFill>
+                  <a:schemeClr val="tx1">
+                    <a:tint val="82000"/>
+                  </a:schemeClr>
+                </a:solidFill>
+              </a:defRPr>
+            </a:lvl4pPr>
+            <a:lvl5pPr marL="3023921" indent="0">
+              <a:buNone/>
+              <a:defRPr sz="2646">
+                <a:solidFill>
+                  <a:schemeClr val="tx1">
+                    <a:tint val="82000"/>
+                  </a:schemeClr>
+                </a:solidFill>
+              </a:defRPr>
+            </a:lvl5pPr>
+            <a:lvl6pPr marL="3779901" indent="0">
+              <a:buNone/>
+              <a:defRPr sz="2646">
+                <a:solidFill>
+                  <a:schemeClr val="tx1">
+                    <a:tint val="82000"/>
+                  </a:schemeClr>
+                </a:solidFill>
+              </a:defRPr>
+            </a:lvl6pPr>
+            <a:lvl7pPr marL="4535881" indent="0">
+              <a:buNone/>
+              <a:defRPr sz="2646">
+                <a:solidFill>
+                  <a:schemeClr val="tx1">
+                    <a:tint val="82000"/>
+                  </a:schemeClr>
+                </a:solidFill>
+              </a:defRPr>
+            </a:lvl7pPr>
+            <a:lvl8pPr marL="5291861" indent="0">
+              <a:buNone/>
+              <a:defRPr sz="2646">
+                <a:solidFill>
+                  <a:schemeClr val="tx1">
+                    <a:tint val="82000"/>
+                  </a:schemeClr>
+                </a:solidFill>
+              </a:defRPr>
+            </a:lvl8pPr>
+            <a:lvl9pPr marL="6047842" indent="0">
+              <a:buNone/>
+              <a:defRPr sz="2646">
+                <a:solidFill>
+                  <a:schemeClr val="tx1">
+                    <a:tint val="82000"/>
+                  </a:schemeClr>
+                </a:solidFill>
+              </a:defRPr>
+            </a:lvl9pPr>
           </a:lstStyle>
           <a:p>
             <a:pPr lvl="0"/>
             <a:r>
-              <a:rPr lang="de-DE"/>
-              <a:t>Mastertextformat bearbeiten</a:t>
+              <a:rPr lang="en-US"/>
+              <a:t>Click to edit Master text styles</a:t>
             </a:r>
           </a:p>
         </p:txBody>
       </p:sp>
       <p:sp>
         <p:nvSpPr>
-          <p:cNvPr id="4" name="Datumsplatzhalter 3">
-            <a:extLst>
-              <a:ext uri="{FF2B5EF4-FFF2-40B4-BE49-F238E27FC236}">
-                <a16:creationId xmlns:a16="http://schemas.microsoft.com/office/drawing/2014/main" id="{7EC2AD36-54E9-E42E-CDD0-1BB18ECEF41C}"/>
-              </a:ext>
-            </a:extLst>
-          </p:cNvPr>
-          <p:cNvSpPr txBox="1">
-            <a:spLocks noGrp="1"/>
-          </p:cNvSpPr>
-          <p:nvPr>
-            <p:ph type="dt" sz="half" idx="7"/>
+          <p:cNvPr id="4" name="Date Placeholder 3"/>
+          <p:cNvSpPr>
+            <a:spLocks noGrp="1"/>
+          </p:cNvSpPr>
+          <p:nvPr>
+            <p:ph type="dt" sz="half" idx="10"/>
           </p:nvPr>
         </p:nvSpPr>
         <p:spPr/>
         <p:txBody>
           <a:bodyPr/>
-          <a:lstStyle>
-            <a:lvl1pPr>
-              <a:defRPr/>
-            </a:lvl1pPr>
-          </a:lstStyle>
+          <a:lstStyle/>
           <a:p>
             <a:pPr lvl="0"/>
             <a:endParaRPr lang="de-CH"/>
@@ -2069,28 +1933,18 @@
       </p:sp>
       <p:sp>
         <p:nvSpPr>
-          <p:cNvPr id="5" name="Fußzeilenplatzhalter 4">
-            <a:extLst>
-              <a:ext uri="{FF2B5EF4-FFF2-40B4-BE49-F238E27FC236}">
-                <a16:creationId xmlns:a16="http://schemas.microsoft.com/office/drawing/2014/main" id="{5E3B9B5B-0B0E-03A5-84C9-B5758395D66C}"/>
-              </a:ext>
-            </a:extLst>
-          </p:cNvPr>
-          <p:cNvSpPr txBox="1">
-            <a:spLocks noGrp="1"/>
-          </p:cNvSpPr>
-          <p:nvPr>
-            <p:ph type="ftr" sz="quarter" idx="9"/>
+          <p:cNvPr id="5" name="Footer Placeholder 4"/>
+          <p:cNvSpPr>
+            <a:spLocks noGrp="1"/>
+          </p:cNvSpPr>
+          <p:nvPr>
+            <p:ph type="ftr" sz="quarter" idx="11"/>
           </p:nvPr>
         </p:nvSpPr>
         <p:spPr/>
         <p:txBody>
           <a:bodyPr/>
-          <a:lstStyle>
-            <a:lvl1pPr>
-              <a:defRPr/>
-            </a:lvl1pPr>
-          </a:lstStyle>
+          <a:lstStyle/>
           <a:p>
             <a:pPr lvl="0"/>
             <a:endParaRPr lang="de-CH"/>
@@ -2099,41 +1953,32 @@
       </p:sp>
       <p:sp>
         <p:nvSpPr>
-          <p:cNvPr id="6" name="Foliennummernplatzhalter 5">
-            <a:extLst>
-              <a:ext uri="{FF2B5EF4-FFF2-40B4-BE49-F238E27FC236}">
-                <a16:creationId xmlns:a16="http://schemas.microsoft.com/office/drawing/2014/main" id="{E365848A-B1BF-2C90-EF31-409F1F74E1B5}"/>
-              </a:ext>
-            </a:extLst>
-          </p:cNvPr>
-          <p:cNvSpPr txBox="1">
-            <a:spLocks noGrp="1"/>
-          </p:cNvSpPr>
-          <p:nvPr>
-            <p:ph type="sldNum" sz="quarter" idx="8"/>
+          <p:cNvPr id="6" name="Slide Number Placeholder 5"/>
+          <p:cNvSpPr>
+            <a:spLocks noGrp="1"/>
+          </p:cNvSpPr>
+          <p:nvPr>
+            <p:ph type="sldNum" sz="quarter" idx="12"/>
           </p:nvPr>
         </p:nvSpPr>
         <p:spPr/>
         <p:txBody>
           <a:bodyPr/>
-          <a:lstStyle>
-            <a:lvl1pPr>
-              <a:defRPr/>
-            </a:lvl1pPr>
-          </a:lstStyle>
+          <a:lstStyle/>
           <a:p>
             <a:pPr lvl="0"/>
-            <a:fld id="{ED5CEEF8-4A9F-4EED-B7DE-ABCD08ACB0BB}" type="slidenum">
-              <a:t>‹Nr.›</a:t>
+            <a:fld id="{C6B6AF47-4323-4F4D-9EF2-7E7793B825DE}" type="slidenum">
+              <a:rPr lang="en-US" smtClean="0"/>
+              <a:t>‹#›</a:t>
             </a:fld>
-            <a:endParaRPr lang="de-CH"/>
+            <a:endParaRPr lang="en-US"/>
           </a:p>
         </p:txBody>
       </p:sp>
     </p:spTree>
     <p:extLst>
       <p:ext uri="{BB962C8B-B14F-4D97-AF65-F5344CB8AC3E}">
-        <p14:creationId xmlns:p14="http://schemas.microsoft.com/office/powerpoint/2010/main" val="2403262556"/>
+        <p14:creationId xmlns:p14="http://schemas.microsoft.com/office/powerpoint/2010/main" val="1170771720"/>
       </p:ext>
     </p:extLst>
   </p:cSld>
@@ -2145,7 +1990,7 @@
 
 <file path=ppt/slideLayouts/slideLayout4.xml><?xml version="1.0" encoding="utf-8"?>
 <p:sldLayout xmlns:a="http://schemas.openxmlformats.org/drawingml/2006/main" xmlns:r="http://schemas.openxmlformats.org/officeDocument/2006/relationships" xmlns:p="http://schemas.openxmlformats.org/presentationml/2006/main" type="twoObj" preserve="1">
-  <p:cSld name="Zwei Inhalte">
+  <p:cSld name="Two Content">
     <p:spTree>
       <p:nvGrpSpPr>
         <p:cNvPr id="1" name=""/>
@@ -2162,14 +2007,8 @@
       </p:grpSpPr>
       <p:sp>
         <p:nvSpPr>
-          <p:cNvPr id="2" name="Titel 1">
-            <a:extLst>
-              <a:ext uri="{FF2B5EF4-FFF2-40B4-BE49-F238E27FC236}">
-                <a16:creationId xmlns:a16="http://schemas.microsoft.com/office/drawing/2014/main" id="{4E435FD7-93EC-CA76-10DF-814CA5A6ADBC}"/>
-              </a:ext>
-            </a:extLst>
-          </p:cNvPr>
-          <p:cNvSpPr txBox="1">
+          <p:cNvPr id="2" name="Title 1"/>
+          <p:cNvSpPr>
             <a:spLocks noGrp="1"/>
           </p:cNvSpPr>
           <p:nvPr>
@@ -2179,203 +2018,144 @@
         <p:spPr/>
         <p:txBody>
           <a:bodyPr/>
-          <a:lstStyle>
-            <a:lvl1pPr>
-              <a:defRPr lang="de-DE"/>
-            </a:lvl1pPr>
-          </a:lstStyle>
+          <a:lstStyle/>
+          <a:p>
+            <a:r>
+              <a:rPr lang="en-US"/>
+              <a:t>Click to edit Master title style</a:t>
+            </a:r>
+            <a:endParaRPr lang="en-US" dirty="0"/>
+          </a:p>
+        </p:txBody>
+      </p:sp>
+      <p:sp>
+        <p:nvSpPr>
+          <p:cNvPr id="3" name="Content Placeholder 2"/>
+          <p:cNvSpPr>
+            <a:spLocks noGrp="1"/>
+          </p:cNvSpPr>
+          <p:nvPr>
+            <p:ph sz="half" idx="1"/>
+          </p:nvPr>
+        </p:nvSpPr>
+        <p:spPr>
+          <a:xfrm>
+            <a:off x="1385977" y="3066796"/>
+            <a:ext cx="8567857" cy="7309644"/>
+          </a:xfrm>
+        </p:spPr>
+        <p:txBody>
+          <a:bodyPr/>
+          <a:lstStyle/>
           <a:p>
             <a:pPr lvl="0"/>
             <a:r>
-              <a:rPr lang="de-DE"/>
-              <a:t>Mastertitelformat bearbeiten</a:t>
+              <a:rPr lang="en-US"/>
+              <a:t>Click to edit Master text styles</a:t>
             </a:r>
-            <a:endParaRPr lang="en-US"/>
-          </a:p>
-        </p:txBody>
-      </p:sp>
-      <p:sp>
-        <p:nvSpPr>
-          <p:cNvPr id="3" name="Inhaltsplatzhalter 2">
-            <a:extLst>
-              <a:ext uri="{FF2B5EF4-FFF2-40B4-BE49-F238E27FC236}">
-                <a16:creationId xmlns:a16="http://schemas.microsoft.com/office/drawing/2014/main" id="{54FC626A-9FBF-FCED-8FD2-1CD956665AC7}"/>
-              </a:ext>
-            </a:extLst>
-          </p:cNvPr>
-          <p:cNvSpPr txBox="1">
-            <a:spLocks noGrp="1"/>
-          </p:cNvSpPr>
-          <p:nvPr>
-            <p:ph idx="1"/>
+          </a:p>
+          <a:p>
+            <a:pPr lvl="1"/>
+            <a:r>
+              <a:rPr lang="en-US"/>
+              <a:t>Second level</a:t>
+            </a:r>
+          </a:p>
+          <a:p>
+            <a:pPr lvl="2"/>
+            <a:r>
+              <a:rPr lang="en-US"/>
+              <a:t>Third level</a:t>
+            </a:r>
+          </a:p>
+          <a:p>
+            <a:pPr lvl="3"/>
+            <a:r>
+              <a:rPr lang="en-US"/>
+              <a:t>Fourth level</a:t>
+            </a:r>
+          </a:p>
+          <a:p>
+            <a:pPr lvl="4"/>
+            <a:r>
+              <a:rPr lang="en-US"/>
+              <a:t>Fifth level</a:t>
+            </a:r>
+            <a:endParaRPr lang="en-US" dirty="0"/>
+          </a:p>
+        </p:txBody>
+      </p:sp>
+      <p:sp>
+        <p:nvSpPr>
+          <p:cNvPr id="4" name="Content Placeholder 3"/>
+          <p:cNvSpPr>
+            <a:spLocks noGrp="1"/>
+          </p:cNvSpPr>
+          <p:nvPr>
+            <p:ph sz="half" idx="2"/>
           </p:nvPr>
         </p:nvSpPr>
         <p:spPr>
           <a:xfrm>
-            <a:off x="503240" y="1327151"/>
-            <a:ext cx="4459291" cy="3287716"/>
+            <a:off x="10205829" y="3066796"/>
+            <a:ext cx="8567857" cy="7309644"/>
           </a:xfrm>
         </p:spPr>
         <p:txBody>
           <a:bodyPr/>
-          <a:lstStyle>
-            <a:lvl1pPr>
-              <a:defRPr/>
-            </a:lvl1pPr>
-            <a:lvl2pPr>
-              <a:defRPr/>
-            </a:lvl2pPr>
-            <a:lvl3pPr>
-              <a:defRPr/>
-            </a:lvl3pPr>
-            <a:lvl4pPr>
-              <a:defRPr/>
-            </a:lvl4pPr>
-            <a:lvl5pPr>
-              <a:defRPr/>
-            </a:lvl5pPr>
-          </a:lstStyle>
+          <a:lstStyle/>
           <a:p>
             <a:pPr lvl="0"/>
             <a:r>
-              <a:rPr lang="de-DE"/>
-              <a:t>Mastertextformat bearbeiten</a:t>
+              <a:rPr lang="en-US"/>
+              <a:t>Click to edit Master text styles</a:t>
             </a:r>
           </a:p>
           <a:p>
             <a:pPr lvl="1"/>
             <a:r>
-              <a:rPr lang="de-DE"/>
-              <a:t>Zweite Ebene</a:t>
+              <a:rPr lang="en-US"/>
+              <a:t>Second level</a:t>
             </a:r>
           </a:p>
           <a:p>
             <a:pPr lvl="2"/>
             <a:r>
-              <a:rPr lang="de-DE"/>
-              <a:t>Dritte Ebene</a:t>
+              <a:rPr lang="en-US"/>
+              <a:t>Third level</a:t>
             </a:r>
           </a:p>
           <a:p>
             <a:pPr lvl="3"/>
             <a:r>
-              <a:rPr lang="de-DE"/>
-              <a:t>Vierte Ebene</a:t>
+              <a:rPr lang="en-US"/>
+              <a:t>Fourth level</a:t>
             </a:r>
           </a:p>
           <a:p>
             <a:pPr lvl="4"/>
             <a:r>
-              <a:rPr lang="de-DE"/>
-              <a:t>Fünfte Ebene</a:t>
+              <a:rPr lang="en-US"/>
+              <a:t>Fifth level</a:t>
             </a:r>
-            <a:endParaRPr lang="en-US"/>
-          </a:p>
-        </p:txBody>
-      </p:sp>
-      <p:sp>
-        <p:nvSpPr>
-          <p:cNvPr id="4" name="Inhaltsplatzhalter 3">
-            <a:extLst>
-              <a:ext uri="{FF2B5EF4-FFF2-40B4-BE49-F238E27FC236}">
-                <a16:creationId xmlns:a16="http://schemas.microsoft.com/office/drawing/2014/main" id="{ED3ABE72-3798-8766-2BE0-4E12B2A84ADB}"/>
-              </a:ext>
-            </a:extLst>
-          </p:cNvPr>
-          <p:cNvSpPr txBox="1">
-            <a:spLocks noGrp="1"/>
-          </p:cNvSpPr>
-          <p:nvPr>
-            <p:ph idx="2"/>
-          </p:nvPr>
-        </p:nvSpPr>
-        <p:spPr>
-          <a:xfrm>
-            <a:off x="5114925" y="1327151"/>
-            <a:ext cx="4460872" cy="3287716"/>
-          </a:xfrm>
-        </p:spPr>
+            <a:endParaRPr lang="en-US" dirty="0"/>
+          </a:p>
+        </p:txBody>
+      </p:sp>
+      <p:sp>
+        <p:nvSpPr>
+          <p:cNvPr id="5" name="Date Placeholder 4"/>
+          <p:cNvSpPr>
+            <a:spLocks noGrp="1"/>
+          </p:cNvSpPr>
+          <p:nvPr>
+            <p:ph type="dt" sz="half" idx="10"/>
+          </p:nvPr>
+        </p:nvSpPr>
+        <p:spPr/>
         <p:txBody>
           <a:bodyPr/>
-          <a:lstStyle>
-            <a:lvl1pPr>
-              <a:defRPr/>
-            </a:lvl1pPr>
-            <a:lvl2pPr>
-              <a:defRPr/>
-            </a:lvl2pPr>
-            <a:lvl3pPr>
-              <a:defRPr/>
-            </a:lvl3pPr>
-            <a:lvl4pPr>
-              <a:defRPr/>
-            </a:lvl4pPr>
-            <a:lvl5pPr>
-              <a:defRPr/>
-            </a:lvl5pPr>
-          </a:lstStyle>
-          <a:p>
-            <a:pPr lvl="0"/>
-            <a:r>
-              <a:rPr lang="de-DE"/>
-              <a:t>Mastertextformat bearbeiten</a:t>
-            </a:r>
-          </a:p>
-          <a:p>
-            <a:pPr lvl="1"/>
-            <a:r>
-              <a:rPr lang="de-DE"/>
-              <a:t>Zweite Ebene</a:t>
-            </a:r>
-          </a:p>
-          <a:p>
-            <a:pPr lvl="2"/>
-            <a:r>
-              <a:rPr lang="de-DE"/>
-              <a:t>Dritte Ebene</a:t>
-            </a:r>
-          </a:p>
-          <a:p>
-            <a:pPr lvl="3"/>
-            <a:r>
-              <a:rPr lang="de-DE"/>
-              <a:t>Vierte Ebene</a:t>
-            </a:r>
-          </a:p>
-          <a:p>
-            <a:pPr lvl="4"/>
-            <a:r>
-              <a:rPr lang="de-DE"/>
-              <a:t>Fünfte Ebene</a:t>
-            </a:r>
-            <a:endParaRPr lang="en-US"/>
-          </a:p>
-        </p:txBody>
-      </p:sp>
-      <p:sp>
-        <p:nvSpPr>
-          <p:cNvPr id="5" name="Datumsplatzhalter 4">
-            <a:extLst>
-              <a:ext uri="{FF2B5EF4-FFF2-40B4-BE49-F238E27FC236}">
-                <a16:creationId xmlns:a16="http://schemas.microsoft.com/office/drawing/2014/main" id="{7CBECA70-A5C6-8633-7CD3-971BE844722B}"/>
-              </a:ext>
-            </a:extLst>
-          </p:cNvPr>
-          <p:cNvSpPr txBox="1">
-            <a:spLocks noGrp="1"/>
-          </p:cNvSpPr>
-          <p:nvPr>
-            <p:ph type="dt" sz="half" idx="7"/>
-          </p:nvPr>
-        </p:nvSpPr>
-        <p:spPr/>
-        <p:txBody>
-          <a:bodyPr/>
-          <a:lstStyle>
-            <a:lvl1pPr>
-              <a:defRPr/>
-            </a:lvl1pPr>
-          </a:lstStyle>
+          <a:lstStyle/>
           <a:p>
             <a:pPr lvl="0"/>
             <a:endParaRPr lang="de-CH"/>
@@ -2384,28 +2164,18 @@
       </p:sp>
       <p:sp>
         <p:nvSpPr>
-          <p:cNvPr id="6" name="Fußzeilenplatzhalter 5">
-            <a:extLst>
-              <a:ext uri="{FF2B5EF4-FFF2-40B4-BE49-F238E27FC236}">
-                <a16:creationId xmlns:a16="http://schemas.microsoft.com/office/drawing/2014/main" id="{4CA93972-B6E5-EA1E-5A61-4900678470C1}"/>
-              </a:ext>
-            </a:extLst>
-          </p:cNvPr>
-          <p:cNvSpPr txBox="1">
-            <a:spLocks noGrp="1"/>
-          </p:cNvSpPr>
-          <p:nvPr>
-            <p:ph type="ftr" sz="quarter" idx="9"/>
+          <p:cNvPr id="6" name="Footer Placeholder 5"/>
+          <p:cNvSpPr>
+            <a:spLocks noGrp="1"/>
+          </p:cNvSpPr>
+          <p:nvPr>
+            <p:ph type="ftr" sz="quarter" idx="11"/>
           </p:nvPr>
         </p:nvSpPr>
         <p:spPr/>
         <p:txBody>
           <a:bodyPr/>
-          <a:lstStyle>
-            <a:lvl1pPr>
-              <a:defRPr/>
-            </a:lvl1pPr>
-          </a:lstStyle>
+          <a:lstStyle/>
           <a:p>
             <a:pPr lvl="0"/>
             <a:endParaRPr lang="de-CH"/>
@@ -2414,41 +2184,32 @@
       </p:sp>
       <p:sp>
         <p:nvSpPr>
-          <p:cNvPr id="7" name="Foliennummernplatzhalter 6">
-            <a:extLst>
-              <a:ext uri="{FF2B5EF4-FFF2-40B4-BE49-F238E27FC236}">
-                <a16:creationId xmlns:a16="http://schemas.microsoft.com/office/drawing/2014/main" id="{EBA878A2-4BE5-D99F-E9D8-71B334D4AD79}"/>
-              </a:ext>
-            </a:extLst>
-          </p:cNvPr>
-          <p:cNvSpPr txBox="1">
-            <a:spLocks noGrp="1"/>
-          </p:cNvSpPr>
-          <p:nvPr>
-            <p:ph type="sldNum" sz="quarter" idx="8"/>
+          <p:cNvPr id="7" name="Slide Number Placeholder 6"/>
+          <p:cNvSpPr>
+            <a:spLocks noGrp="1"/>
+          </p:cNvSpPr>
+          <p:nvPr>
+            <p:ph type="sldNum" sz="quarter" idx="12"/>
           </p:nvPr>
         </p:nvSpPr>
         <p:spPr/>
         <p:txBody>
           <a:bodyPr/>
-          <a:lstStyle>
-            <a:lvl1pPr>
-              <a:defRPr/>
-            </a:lvl1pPr>
-          </a:lstStyle>
+          <a:lstStyle/>
           <a:p>
             <a:pPr lvl="0"/>
-            <a:fld id="{02B2C955-9FEC-4484-ACD7-8AE31B85A180}" type="slidenum">
-              <a:t>‹Nr.›</a:t>
+            <a:fld id="{C6B6AF47-4323-4F4D-9EF2-7E7793B825DE}" type="slidenum">
+              <a:rPr lang="en-US" smtClean="0"/>
+              <a:t>‹#›</a:t>
             </a:fld>
-            <a:endParaRPr lang="de-CH"/>
+            <a:endParaRPr lang="en-US"/>
           </a:p>
         </p:txBody>
       </p:sp>
     </p:spTree>
     <p:extLst>
       <p:ext uri="{BB962C8B-B14F-4D97-AF65-F5344CB8AC3E}">
-        <p14:creationId xmlns:p14="http://schemas.microsoft.com/office/powerpoint/2010/main" val="2094483153"/>
+        <p14:creationId xmlns:p14="http://schemas.microsoft.com/office/powerpoint/2010/main" val="4053203852"/>
       </p:ext>
     </p:extLst>
   </p:cSld>
@@ -2460,7 +2221,7 @@
 
 <file path=ppt/slideLayouts/slideLayout5.xml><?xml version="1.0" encoding="utf-8"?>
 <p:sldLayout xmlns:a="http://schemas.openxmlformats.org/drawingml/2006/main" xmlns:r="http://schemas.openxmlformats.org/officeDocument/2006/relationships" xmlns:p="http://schemas.openxmlformats.org/presentationml/2006/main" type="twoTxTwoObj" preserve="1">
-  <p:cSld name="Vergleich">
+  <p:cSld name="Comparison">
     <p:spTree>
       <p:nvGrpSpPr>
         <p:cNvPr id="1" name=""/>
@@ -2477,14 +2238,8 @@
       </p:grpSpPr>
       <p:sp>
         <p:nvSpPr>
-          <p:cNvPr id="2" name="Titel 1">
-            <a:extLst>
-              <a:ext uri="{FF2B5EF4-FFF2-40B4-BE49-F238E27FC236}">
-                <a16:creationId xmlns:a16="http://schemas.microsoft.com/office/drawing/2014/main" id="{68585A2D-56DD-D639-0BBF-3FDE5877C2A3}"/>
-              </a:ext>
-            </a:extLst>
-          </p:cNvPr>
-          <p:cNvSpPr txBox="1">
+          <p:cNvPr id="2" name="Title 1"/>
+          <p:cNvSpPr>
             <a:spLocks noGrp="1"/>
           </p:cNvSpPr>
           <p:nvPr>
@@ -2493,285 +2248,280 @@
         </p:nvSpPr>
         <p:spPr>
           <a:xfrm>
-            <a:off x="693736" y="301623"/>
-            <a:ext cx="8694736" cy="1096959"/>
+            <a:off x="1388603" y="613360"/>
+            <a:ext cx="17387709" cy="2226762"/>
           </a:xfrm>
         </p:spPr>
         <p:txBody>
           <a:bodyPr/>
+          <a:lstStyle/>
+          <a:p>
+            <a:r>
+              <a:rPr lang="en-US"/>
+              <a:t>Click to edit Master title style</a:t>
+            </a:r>
+            <a:endParaRPr lang="en-US" dirty="0"/>
+          </a:p>
+        </p:txBody>
+      </p:sp>
+      <p:sp>
+        <p:nvSpPr>
+          <p:cNvPr id="3" name="Text Placeholder 2"/>
+          <p:cNvSpPr>
+            <a:spLocks noGrp="1"/>
+          </p:cNvSpPr>
+          <p:nvPr>
+            <p:ph type="body" idx="1"/>
+          </p:nvPr>
+        </p:nvSpPr>
+        <p:spPr>
+          <a:xfrm>
+            <a:off x="1388603" y="2824120"/>
+            <a:ext cx="8528482" cy="1384058"/>
+          </a:xfrm>
+        </p:spPr>
+        <p:txBody>
+          <a:bodyPr anchor="b"/>
           <a:lstStyle>
-            <a:lvl1pPr>
-              <a:defRPr lang="de-DE"/>
+            <a:lvl1pPr marL="0" indent="0">
+              <a:buNone/>
+              <a:defRPr sz="3968" b="1"/>
             </a:lvl1pPr>
+            <a:lvl2pPr marL="755980" indent="0">
+              <a:buNone/>
+              <a:defRPr sz="3307" b="1"/>
+            </a:lvl2pPr>
+            <a:lvl3pPr marL="1511960" indent="0">
+              <a:buNone/>
+              <a:defRPr sz="2976" b="1"/>
+            </a:lvl3pPr>
+            <a:lvl4pPr marL="2267941" indent="0">
+              <a:buNone/>
+              <a:defRPr sz="2646" b="1"/>
+            </a:lvl4pPr>
+            <a:lvl5pPr marL="3023921" indent="0">
+              <a:buNone/>
+              <a:defRPr sz="2646" b="1"/>
+            </a:lvl5pPr>
+            <a:lvl6pPr marL="3779901" indent="0">
+              <a:buNone/>
+              <a:defRPr sz="2646" b="1"/>
+            </a:lvl6pPr>
+            <a:lvl7pPr marL="4535881" indent="0">
+              <a:buNone/>
+              <a:defRPr sz="2646" b="1"/>
+            </a:lvl7pPr>
+            <a:lvl8pPr marL="5291861" indent="0">
+              <a:buNone/>
+              <a:defRPr sz="2646" b="1"/>
+            </a:lvl8pPr>
+            <a:lvl9pPr marL="6047842" indent="0">
+              <a:buNone/>
+              <a:defRPr sz="2646" b="1"/>
+            </a:lvl9pPr>
           </a:lstStyle>
           <a:p>
             <a:pPr lvl="0"/>
             <a:r>
-              <a:rPr lang="de-DE"/>
-              <a:t>Mastertitelformat bearbeiten</a:t>
+              <a:rPr lang="en-US"/>
+              <a:t>Click to edit Master text styles</a:t>
             </a:r>
-            <a:endParaRPr lang="en-US"/>
-          </a:p>
-        </p:txBody>
-      </p:sp>
-      <p:sp>
-        <p:nvSpPr>
-          <p:cNvPr id="3" name="Textplatzhalter 2">
-            <a:extLst>
-              <a:ext uri="{FF2B5EF4-FFF2-40B4-BE49-F238E27FC236}">
-                <a16:creationId xmlns:a16="http://schemas.microsoft.com/office/drawing/2014/main" id="{729A76FD-ED8A-7D8B-3D19-0F40874EDC0D}"/>
-              </a:ext>
-            </a:extLst>
-          </p:cNvPr>
-          <p:cNvSpPr txBox="1">
-            <a:spLocks noGrp="1"/>
-          </p:cNvSpPr>
-          <p:nvPr>
-            <p:ph type="body" idx="1"/>
+          </a:p>
+        </p:txBody>
+      </p:sp>
+      <p:sp>
+        <p:nvSpPr>
+          <p:cNvPr id="4" name="Content Placeholder 3"/>
+          <p:cNvSpPr>
+            <a:spLocks noGrp="1"/>
+          </p:cNvSpPr>
+          <p:nvPr>
+            <p:ph sz="half" idx="2"/>
           </p:nvPr>
         </p:nvSpPr>
         <p:spPr>
           <a:xfrm>
-            <a:off x="693736" y="1390646"/>
-            <a:ext cx="4265611" cy="681035"/>
+            <a:off x="1388603" y="4208178"/>
+            <a:ext cx="8528482" cy="6189596"/>
           </a:xfrm>
         </p:spPr>
         <p:txBody>
+          <a:bodyPr/>
+          <a:lstStyle/>
+          <a:p>
+            <a:pPr lvl="0"/>
+            <a:r>
+              <a:rPr lang="en-US"/>
+              <a:t>Click to edit Master text styles</a:t>
+            </a:r>
+          </a:p>
+          <a:p>
+            <a:pPr lvl="1"/>
+            <a:r>
+              <a:rPr lang="en-US"/>
+              <a:t>Second level</a:t>
+            </a:r>
+          </a:p>
+          <a:p>
+            <a:pPr lvl="2"/>
+            <a:r>
+              <a:rPr lang="en-US"/>
+              <a:t>Third level</a:t>
+            </a:r>
+          </a:p>
+          <a:p>
+            <a:pPr lvl="3"/>
+            <a:r>
+              <a:rPr lang="en-US"/>
+              <a:t>Fourth level</a:t>
+            </a:r>
+          </a:p>
+          <a:p>
+            <a:pPr lvl="4"/>
+            <a:r>
+              <a:rPr lang="en-US"/>
+              <a:t>Fifth level</a:t>
+            </a:r>
+            <a:endParaRPr lang="en-US" dirty="0"/>
+          </a:p>
+        </p:txBody>
+      </p:sp>
+      <p:sp>
+        <p:nvSpPr>
+          <p:cNvPr id="5" name="Text Placeholder 4"/>
+          <p:cNvSpPr>
+            <a:spLocks noGrp="1"/>
+          </p:cNvSpPr>
+          <p:nvPr>
+            <p:ph type="body" sz="quarter" idx="3"/>
+          </p:nvPr>
+        </p:nvSpPr>
+        <p:spPr>
+          <a:xfrm>
+            <a:off x="10205829" y="2824120"/>
+            <a:ext cx="8570483" cy="1384058"/>
+          </a:xfrm>
+        </p:spPr>
+        <p:txBody>
           <a:bodyPr anchor="b"/>
           <a:lstStyle>
-            <a:lvl1pPr>
-              <a:defRPr sz="2400" b="1"/>
+            <a:lvl1pPr marL="0" indent="0">
+              <a:buNone/>
+              <a:defRPr sz="3968" b="1"/>
             </a:lvl1pPr>
+            <a:lvl2pPr marL="755980" indent="0">
+              <a:buNone/>
+              <a:defRPr sz="3307" b="1"/>
+            </a:lvl2pPr>
+            <a:lvl3pPr marL="1511960" indent="0">
+              <a:buNone/>
+              <a:defRPr sz="2976" b="1"/>
+            </a:lvl3pPr>
+            <a:lvl4pPr marL="2267941" indent="0">
+              <a:buNone/>
+              <a:defRPr sz="2646" b="1"/>
+            </a:lvl4pPr>
+            <a:lvl5pPr marL="3023921" indent="0">
+              <a:buNone/>
+              <a:defRPr sz="2646" b="1"/>
+            </a:lvl5pPr>
+            <a:lvl6pPr marL="3779901" indent="0">
+              <a:buNone/>
+              <a:defRPr sz="2646" b="1"/>
+            </a:lvl6pPr>
+            <a:lvl7pPr marL="4535881" indent="0">
+              <a:buNone/>
+              <a:defRPr sz="2646" b="1"/>
+            </a:lvl7pPr>
+            <a:lvl8pPr marL="5291861" indent="0">
+              <a:buNone/>
+              <a:defRPr sz="2646" b="1"/>
+            </a:lvl8pPr>
+            <a:lvl9pPr marL="6047842" indent="0">
+              <a:buNone/>
+              <a:defRPr sz="2646" b="1"/>
+            </a:lvl9pPr>
           </a:lstStyle>
           <a:p>
             <a:pPr lvl="0"/>
             <a:r>
-              <a:rPr lang="de-DE"/>
-              <a:t>Mastertextformat bearbeiten</a:t>
+              <a:rPr lang="en-US"/>
+              <a:t>Click to edit Master text styles</a:t>
             </a:r>
           </a:p>
         </p:txBody>
       </p:sp>
       <p:sp>
         <p:nvSpPr>
-          <p:cNvPr id="4" name="Inhaltsplatzhalter 3">
-            <a:extLst>
-              <a:ext uri="{FF2B5EF4-FFF2-40B4-BE49-F238E27FC236}">
-                <a16:creationId xmlns:a16="http://schemas.microsoft.com/office/drawing/2014/main" id="{B5FF24ED-6E10-7173-946C-B5975C5D058F}"/>
-              </a:ext>
-            </a:extLst>
-          </p:cNvPr>
-          <p:cNvSpPr txBox="1">
-            <a:spLocks noGrp="1"/>
-          </p:cNvSpPr>
-          <p:nvPr>
-            <p:ph idx="2"/>
+          <p:cNvPr id="6" name="Content Placeholder 5"/>
+          <p:cNvSpPr>
+            <a:spLocks noGrp="1"/>
+          </p:cNvSpPr>
+          <p:nvPr>
+            <p:ph sz="quarter" idx="4"/>
           </p:nvPr>
         </p:nvSpPr>
         <p:spPr>
           <a:xfrm>
-            <a:off x="693736" y="2071692"/>
-            <a:ext cx="4265611" cy="3046415"/>
+            <a:off x="10205829" y="4208178"/>
+            <a:ext cx="8570483" cy="6189596"/>
           </a:xfrm>
         </p:spPr>
         <p:txBody>
           <a:bodyPr/>
-          <a:lstStyle>
-            <a:lvl1pPr>
-              <a:defRPr/>
-            </a:lvl1pPr>
-            <a:lvl2pPr>
-              <a:defRPr/>
-            </a:lvl2pPr>
-            <a:lvl3pPr>
-              <a:defRPr/>
-            </a:lvl3pPr>
-            <a:lvl4pPr>
-              <a:defRPr/>
-            </a:lvl4pPr>
-            <a:lvl5pPr>
-              <a:defRPr/>
-            </a:lvl5pPr>
-          </a:lstStyle>
+          <a:lstStyle/>
           <a:p>
             <a:pPr lvl="0"/>
             <a:r>
-              <a:rPr lang="de-DE"/>
-              <a:t>Mastertextformat bearbeiten</a:t>
+              <a:rPr lang="en-US"/>
+              <a:t>Click to edit Master text styles</a:t>
             </a:r>
           </a:p>
           <a:p>
             <a:pPr lvl="1"/>
             <a:r>
-              <a:rPr lang="de-DE"/>
-              <a:t>Zweite Ebene</a:t>
+              <a:rPr lang="en-US"/>
+              <a:t>Second level</a:t>
             </a:r>
           </a:p>
           <a:p>
             <a:pPr lvl="2"/>
             <a:r>
-              <a:rPr lang="de-DE"/>
-              <a:t>Dritte Ebene</a:t>
+              <a:rPr lang="en-US"/>
+              <a:t>Third level</a:t>
             </a:r>
           </a:p>
           <a:p>
             <a:pPr lvl="3"/>
             <a:r>
-              <a:rPr lang="de-DE"/>
-              <a:t>Vierte Ebene</a:t>
+              <a:rPr lang="en-US"/>
+              <a:t>Fourth level</a:t>
             </a:r>
           </a:p>
           <a:p>
             <a:pPr lvl="4"/>
             <a:r>
-              <a:rPr lang="de-DE"/>
-              <a:t>Fünfte Ebene</a:t>
+              <a:rPr lang="en-US"/>
+              <a:t>Fifth level</a:t>
             </a:r>
-            <a:endParaRPr lang="en-US"/>
-          </a:p>
-        </p:txBody>
-      </p:sp>
-      <p:sp>
-        <p:nvSpPr>
-          <p:cNvPr id="5" name="Textplatzhalter 4">
-            <a:extLst>
-              <a:ext uri="{FF2B5EF4-FFF2-40B4-BE49-F238E27FC236}">
-                <a16:creationId xmlns:a16="http://schemas.microsoft.com/office/drawing/2014/main" id="{4394432E-67D4-5952-063E-F73AAB4CF17F}"/>
-              </a:ext>
-            </a:extLst>
-          </p:cNvPr>
-          <p:cNvSpPr txBox="1">
-            <a:spLocks noGrp="1"/>
-          </p:cNvSpPr>
-          <p:nvPr>
-            <p:ph type="body" idx="3"/>
-          </p:nvPr>
-        </p:nvSpPr>
-        <p:spPr>
-          <a:xfrm>
-            <a:off x="5103815" y="1390646"/>
-            <a:ext cx="4284658" cy="681035"/>
-          </a:xfrm>
-        </p:spPr>
-        <p:txBody>
-          <a:bodyPr anchor="b"/>
-          <a:lstStyle>
-            <a:lvl1pPr>
-              <a:defRPr sz="2400" b="1"/>
-            </a:lvl1pPr>
-          </a:lstStyle>
-          <a:p>
-            <a:pPr lvl="0"/>
-            <a:r>
-              <a:rPr lang="de-DE"/>
-              <a:t>Mastertextformat bearbeiten</a:t>
-            </a:r>
-          </a:p>
-        </p:txBody>
-      </p:sp>
-      <p:sp>
-        <p:nvSpPr>
-          <p:cNvPr id="6" name="Inhaltsplatzhalter 5">
-            <a:extLst>
-              <a:ext uri="{FF2B5EF4-FFF2-40B4-BE49-F238E27FC236}">
-                <a16:creationId xmlns:a16="http://schemas.microsoft.com/office/drawing/2014/main" id="{35C6F218-E4C4-9C16-1647-18DFDC243AEA}"/>
-              </a:ext>
-            </a:extLst>
-          </p:cNvPr>
-          <p:cNvSpPr txBox="1">
-            <a:spLocks noGrp="1"/>
-          </p:cNvSpPr>
-          <p:nvPr>
-            <p:ph idx="4"/>
-          </p:nvPr>
-        </p:nvSpPr>
-        <p:spPr>
-          <a:xfrm>
-            <a:off x="5103815" y="2071692"/>
-            <a:ext cx="4284658" cy="3046415"/>
-          </a:xfrm>
-        </p:spPr>
+            <a:endParaRPr lang="en-US" dirty="0"/>
+          </a:p>
+        </p:txBody>
+      </p:sp>
+      <p:sp>
+        <p:nvSpPr>
+          <p:cNvPr id="7" name="Date Placeholder 6"/>
+          <p:cNvSpPr>
+            <a:spLocks noGrp="1"/>
+          </p:cNvSpPr>
+          <p:nvPr>
+            <p:ph type="dt" sz="half" idx="10"/>
+          </p:nvPr>
+        </p:nvSpPr>
+        <p:spPr/>
         <p:txBody>
           <a:bodyPr/>
-          <a:lstStyle>
-            <a:lvl1pPr>
-              <a:defRPr/>
-            </a:lvl1pPr>
-            <a:lvl2pPr>
-              <a:defRPr/>
-            </a:lvl2pPr>
-            <a:lvl3pPr>
-              <a:defRPr/>
-            </a:lvl3pPr>
-            <a:lvl4pPr>
-              <a:defRPr/>
-            </a:lvl4pPr>
-            <a:lvl5pPr>
-              <a:defRPr/>
-            </a:lvl5pPr>
-          </a:lstStyle>
-          <a:p>
-            <a:pPr lvl="0"/>
-            <a:r>
-              <a:rPr lang="de-DE"/>
-              <a:t>Mastertextformat bearbeiten</a:t>
-            </a:r>
-          </a:p>
-          <a:p>
-            <a:pPr lvl="1"/>
-            <a:r>
-              <a:rPr lang="de-DE"/>
-              <a:t>Zweite Ebene</a:t>
-            </a:r>
-          </a:p>
-          <a:p>
-            <a:pPr lvl="2"/>
-            <a:r>
-              <a:rPr lang="de-DE"/>
-              <a:t>Dritte Ebene</a:t>
-            </a:r>
-          </a:p>
-          <a:p>
-            <a:pPr lvl="3"/>
-            <a:r>
-              <a:rPr lang="de-DE"/>
-              <a:t>Vierte Ebene</a:t>
-            </a:r>
-          </a:p>
-          <a:p>
-            <a:pPr lvl="4"/>
-            <a:r>
-              <a:rPr lang="de-DE"/>
-              <a:t>Fünfte Ebene</a:t>
-            </a:r>
-            <a:endParaRPr lang="en-US"/>
-          </a:p>
-        </p:txBody>
-      </p:sp>
-      <p:sp>
-        <p:nvSpPr>
-          <p:cNvPr id="7" name="Datumsplatzhalter 6">
-            <a:extLst>
-              <a:ext uri="{FF2B5EF4-FFF2-40B4-BE49-F238E27FC236}">
-                <a16:creationId xmlns:a16="http://schemas.microsoft.com/office/drawing/2014/main" id="{7BD47BD6-7EEC-F548-583A-E1C6D3DBFC31}"/>
-              </a:ext>
-            </a:extLst>
-          </p:cNvPr>
-          <p:cNvSpPr txBox="1">
-            <a:spLocks noGrp="1"/>
-          </p:cNvSpPr>
-          <p:nvPr>
-            <p:ph type="dt" sz="half" idx="7"/>
-          </p:nvPr>
-        </p:nvSpPr>
-        <p:spPr/>
-        <p:txBody>
-          <a:bodyPr/>
-          <a:lstStyle>
-            <a:lvl1pPr>
-              <a:defRPr/>
-            </a:lvl1pPr>
-          </a:lstStyle>
+          <a:lstStyle/>
           <a:p>
             <a:pPr lvl="0"/>
             <a:endParaRPr lang="de-CH"/>
@@ -2780,28 +2530,18 @@
       </p:sp>
       <p:sp>
         <p:nvSpPr>
-          <p:cNvPr id="8" name="Fußzeilenplatzhalter 7">
-            <a:extLst>
-              <a:ext uri="{FF2B5EF4-FFF2-40B4-BE49-F238E27FC236}">
-                <a16:creationId xmlns:a16="http://schemas.microsoft.com/office/drawing/2014/main" id="{516DAC0E-1359-AA05-3CFA-24DCEEEB33A8}"/>
-              </a:ext>
-            </a:extLst>
-          </p:cNvPr>
-          <p:cNvSpPr txBox="1">
-            <a:spLocks noGrp="1"/>
-          </p:cNvSpPr>
-          <p:nvPr>
-            <p:ph type="ftr" sz="quarter" idx="9"/>
+          <p:cNvPr id="8" name="Footer Placeholder 7"/>
+          <p:cNvSpPr>
+            <a:spLocks noGrp="1"/>
+          </p:cNvSpPr>
+          <p:nvPr>
+            <p:ph type="ftr" sz="quarter" idx="11"/>
           </p:nvPr>
         </p:nvSpPr>
         <p:spPr/>
         <p:txBody>
           <a:bodyPr/>
-          <a:lstStyle>
-            <a:lvl1pPr>
-              <a:defRPr/>
-            </a:lvl1pPr>
-          </a:lstStyle>
+          <a:lstStyle/>
           <a:p>
             <a:pPr lvl="0"/>
             <a:endParaRPr lang="de-CH"/>
@@ -2810,41 +2550,32 @@
       </p:sp>
       <p:sp>
         <p:nvSpPr>
-          <p:cNvPr id="9" name="Foliennummernplatzhalter 8">
-            <a:extLst>
-              <a:ext uri="{FF2B5EF4-FFF2-40B4-BE49-F238E27FC236}">
-                <a16:creationId xmlns:a16="http://schemas.microsoft.com/office/drawing/2014/main" id="{2F3F97DE-A93D-ACEA-B112-D82D0BCCE25B}"/>
-              </a:ext>
-            </a:extLst>
-          </p:cNvPr>
-          <p:cNvSpPr txBox="1">
-            <a:spLocks noGrp="1"/>
-          </p:cNvSpPr>
-          <p:nvPr>
-            <p:ph type="sldNum" sz="quarter" idx="8"/>
+          <p:cNvPr id="9" name="Slide Number Placeholder 8"/>
+          <p:cNvSpPr>
+            <a:spLocks noGrp="1"/>
+          </p:cNvSpPr>
+          <p:nvPr>
+            <p:ph type="sldNum" sz="quarter" idx="12"/>
           </p:nvPr>
         </p:nvSpPr>
         <p:spPr/>
         <p:txBody>
           <a:bodyPr/>
-          <a:lstStyle>
-            <a:lvl1pPr>
-              <a:defRPr/>
-            </a:lvl1pPr>
-          </a:lstStyle>
+          <a:lstStyle/>
           <a:p>
             <a:pPr lvl="0"/>
-            <a:fld id="{0C53C5FF-BC66-4129-A2DB-FBCCC53336A7}" type="slidenum">
-              <a:t>‹Nr.›</a:t>
+            <a:fld id="{C6B6AF47-4323-4F4D-9EF2-7E7793B825DE}" type="slidenum">
+              <a:rPr lang="en-US" smtClean="0"/>
+              <a:t>‹#›</a:t>
             </a:fld>
-            <a:endParaRPr lang="de-CH"/>
+            <a:endParaRPr lang="en-US"/>
           </a:p>
         </p:txBody>
       </p:sp>
     </p:spTree>
     <p:extLst>
       <p:ext uri="{BB962C8B-B14F-4D97-AF65-F5344CB8AC3E}">
-        <p14:creationId xmlns:p14="http://schemas.microsoft.com/office/powerpoint/2010/main" val="659453493"/>
+        <p14:creationId xmlns:p14="http://schemas.microsoft.com/office/powerpoint/2010/main" val="1512307333"/>
       </p:ext>
     </p:extLst>
   </p:cSld>
@@ -2856,7 +2587,7 @@
 
 <file path=ppt/slideLayouts/slideLayout6.xml><?xml version="1.0" encoding="utf-8"?>
 <p:sldLayout xmlns:a="http://schemas.openxmlformats.org/drawingml/2006/main" xmlns:r="http://schemas.openxmlformats.org/officeDocument/2006/relationships" xmlns:p="http://schemas.openxmlformats.org/presentationml/2006/main" type="titleOnly" preserve="1">
-  <p:cSld name="Nur Titel">
+  <p:cSld name="Title Only">
     <p:spTree>
       <p:nvGrpSpPr>
         <p:cNvPr id="1" name=""/>
@@ -2873,14 +2604,8 @@
       </p:grpSpPr>
       <p:sp>
         <p:nvSpPr>
-          <p:cNvPr id="2" name="Titel 1">
-            <a:extLst>
-              <a:ext uri="{FF2B5EF4-FFF2-40B4-BE49-F238E27FC236}">
-                <a16:creationId xmlns:a16="http://schemas.microsoft.com/office/drawing/2014/main" id="{7354DC81-3119-99A7-BA9B-9169653B76C1}"/>
-              </a:ext>
-            </a:extLst>
-          </p:cNvPr>
-          <p:cNvSpPr txBox="1">
+          <p:cNvPr id="2" name="Title 1"/>
+          <p:cNvSpPr>
             <a:spLocks noGrp="1"/>
           </p:cNvSpPr>
           <p:nvPr>
@@ -2890,45 +2615,30 @@
         <p:spPr/>
         <p:txBody>
           <a:bodyPr/>
-          <a:lstStyle>
-            <a:lvl1pPr>
-              <a:defRPr lang="de-DE"/>
-            </a:lvl1pPr>
-          </a:lstStyle>
-          <a:p>
-            <a:pPr lvl="0"/>
+          <a:lstStyle/>
+          <a:p>
             <a:r>
-              <a:rPr lang="de-DE"/>
-              <a:t>Mastertitelformat bearbeiten</a:t>
+              <a:rPr lang="en-US"/>
+              <a:t>Click to edit Master title style</a:t>
             </a:r>
-            <a:endParaRPr lang="en-US"/>
-          </a:p>
-        </p:txBody>
-      </p:sp>
-      <p:sp>
-        <p:nvSpPr>
-          <p:cNvPr id="3" name="Datumsplatzhalter 2">
-            <a:extLst>
-              <a:ext uri="{FF2B5EF4-FFF2-40B4-BE49-F238E27FC236}">
-                <a16:creationId xmlns:a16="http://schemas.microsoft.com/office/drawing/2014/main" id="{1A38A958-F40D-A329-BA80-F8FB47EC21DE}"/>
-              </a:ext>
-            </a:extLst>
-          </p:cNvPr>
-          <p:cNvSpPr txBox="1">
-            <a:spLocks noGrp="1"/>
-          </p:cNvSpPr>
-          <p:nvPr>
-            <p:ph type="dt" sz="half" idx="7"/>
+            <a:endParaRPr lang="en-US" dirty="0"/>
+          </a:p>
+        </p:txBody>
+      </p:sp>
+      <p:sp>
+        <p:nvSpPr>
+          <p:cNvPr id="3" name="Date Placeholder 2"/>
+          <p:cNvSpPr>
+            <a:spLocks noGrp="1"/>
+          </p:cNvSpPr>
+          <p:nvPr>
+            <p:ph type="dt" sz="half" idx="10"/>
           </p:nvPr>
         </p:nvSpPr>
         <p:spPr/>
         <p:txBody>
           <a:bodyPr/>
-          <a:lstStyle>
-            <a:lvl1pPr>
-              <a:defRPr/>
-            </a:lvl1pPr>
-          </a:lstStyle>
+          <a:lstStyle/>
           <a:p>
             <a:pPr lvl="0"/>
             <a:endParaRPr lang="de-CH"/>
@@ -2937,28 +2647,18 @@
       </p:sp>
       <p:sp>
         <p:nvSpPr>
-          <p:cNvPr id="4" name="Fußzeilenplatzhalter 3">
-            <a:extLst>
-              <a:ext uri="{FF2B5EF4-FFF2-40B4-BE49-F238E27FC236}">
-                <a16:creationId xmlns:a16="http://schemas.microsoft.com/office/drawing/2014/main" id="{F1E6FC89-EFE3-5DF3-7645-DA4D336DF764}"/>
-              </a:ext>
-            </a:extLst>
-          </p:cNvPr>
-          <p:cNvSpPr txBox="1">
-            <a:spLocks noGrp="1"/>
-          </p:cNvSpPr>
-          <p:nvPr>
-            <p:ph type="ftr" sz="quarter" idx="9"/>
+          <p:cNvPr id="4" name="Footer Placeholder 3"/>
+          <p:cNvSpPr>
+            <a:spLocks noGrp="1"/>
+          </p:cNvSpPr>
+          <p:nvPr>
+            <p:ph type="ftr" sz="quarter" idx="11"/>
           </p:nvPr>
         </p:nvSpPr>
         <p:spPr/>
         <p:txBody>
           <a:bodyPr/>
-          <a:lstStyle>
-            <a:lvl1pPr>
-              <a:defRPr/>
-            </a:lvl1pPr>
-          </a:lstStyle>
+          <a:lstStyle/>
           <a:p>
             <a:pPr lvl="0"/>
             <a:endParaRPr lang="de-CH"/>
@@ -2967,41 +2667,32 @@
       </p:sp>
       <p:sp>
         <p:nvSpPr>
-          <p:cNvPr id="5" name="Foliennummernplatzhalter 4">
-            <a:extLst>
-              <a:ext uri="{FF2B5EF4-FFF2-40B4-BE49-F238E27FC236}">
-                <a16:creationId xmlns:a16="http://schemas.microsoft.com/office/drawing/2014/main" id="{70667291-DE2A-B89F-2708-2B8893BB0310}"/>
-              </a:ext>
-            </a:extLst>
-          </p:cNvPr>
-          <p:cNvSpPr txBox="1">
-            <a:spLocks noGrp="1"/>
-          </p:cNvSpPr>
-          <p:nvPr>
-            <p:ph type="sldNum" sz="quarter" idx="8"/>
+          <p:cNvPr id="5" name="Slide Number Placeholder 4"/>
+          <p:cNvSpPr>
+            <a:spLocks noGrp="1"/>
+          </p:cNvSpPr>
+          <p:nvPr>
+            <p:ph type="sldNum" sz="quarter" idx="12"/>
           </p:nvPr>
         </p:nvSpPr>
         <p:spPr/>
         <p:txBody>
           <a:bodyPr/>
-          <a:lstStyle>
-            <a:lvl1pPr>
-              <a:defRPr/>
-            </a:lvl1pPr>
-          </a:lstStyle>
+          <a:lstStyle/>
           <a:p>
             <a:pPr lvl="0"/>
-            <a:fld id="{358753E4-BD1A-4C92-A259-90694A4F2AF6}" type="slidenum">
-              <a:t>‹Nr.›</a:t>
+            <a:fld id="{C6B6AF47-4323-4F4D-9EF2-7E7793B825DE}" type="slidenum">
+              <a:rPr lang="en-US" smtClean="0"/>
+              <a:t>‹#›</a:t>
             </a:fld>
-            <a:endParaRPr lang="de-CH"/>
+            <a:endParaRPr lang="en-US"/>
           </a:p>
         </p:txBody>
       </p:sp>
     </p:spTree>
     <p:extLst>
       <p:ext uri="{BB962C8B-B14F-4D97-AF65-F5344CB8AC3E}">
-        <p14:creationId xmlns:p14="http://schemas.microsoft.com/office/powerpoint/2010/main" val="787205488"/>
+        <p14:creationId xmlns:p14="http://schemas.microsoft.com/office/powerpoint/2010/main" val="2542129382"/>
       </p:ext>
     </p:extLst>
   </p:cSld>
@@ -3013,7 +2704,7 @@
 
 <file path=ppt/slideLayouts/slideLayout7.xml><?xml version="1.0" encoding="utf-8"?>
 <p:sldLayout xmlns:a="http://schemas.openxmlformats.org/drawingml/2006/main" xmlns:r="http://schemas.openxmlformats.org/officeDocument/2006/relationships" xmlns:p="http://schemas.openxmlformats.org/presentationml/2006/main" type="blank" preserve="1">
-  <p:cSld name="Leer">
+  <p:cSld name="Blank">
     <p:spTree>
       <p:nvGrpSpPr>
         <p:cNvPr id="1" name=""/>
@@ -3030,28 +2721,18 @@
       </p:grpSpPr>
       <p:sp>
         <p:nvSpPr>
-          <p:cNvPr id="2" name="Datumsplatzhalter 1">
-            <a:extLst>
-              <a:ext uri="{FF2B5EF4-FFF2-40B4-BE49-F238E27FC236}">
-                <a16:creationId xmlns:a16="http://schemas.microsoft.com/office/drawing/2014/main" id="{14648FF1-5B1C-BF64-C9DD-A13EB7A8C2F9}"/>
-              </a:ext>
-            </a:extLst>
-          </p:cNvPr>
-          <p:cNvSpPr txBox="1">
-            <a:spLocks noGrp="1"/>
-          </p:cNvSpPr>
-          <p:nvPr>
-            <p:ph type="dt" sz="half" idx="7"/>
+          <p:cNvPr id="2" name="Date Placeholder 1"/>
+          <p:cNvSpPr>
+            <a:spLocks noGrp="1"/>
+          </p:cNvSpPr>
+          <p:nvPr>
+            <p:ph type="dt" sz="half" idx="10"/>
           </p:nvPr>
         </p:nvSpPr>
         <p:spPr/>
         <p:txBody>
           <a:bodyPr/>
-          <a:lstStyle>
-            <a:lvl1pPr>
-              <a:defRPr/>
-            </a:lvl1pPr>
-          </a:lstStyle>
+          <a:lstStyle/>
           <a:p>
             <a:pPr lvl="0"/>
             <a:endParaRPr lang="de-CH"/>
@@ -3060,28 +2741,18 @@
       </p:sp>
       <p:sp>
         <p:nvSpPr>
-          <p:cNvPr id="3" name="Fußzeilenplatzhalter 2">
-            <a:extLst>
-              <a:ext uri="{FF2B5EF4-FFF2-40B4-BE49-F238E27FC236}">
-                <a16:creationId xmlns:a16="http://schemas.microsoft.com/office/drawing/2014/main" id="{4245CC34-4AD9-1C44-DD7E-BB8B234D82BF}"/>
-              </a:ext>
-            </a:extLst>
-          </p:cNvPr>
-          <p:cNvSpPr txBox="1">
-            <a:spLocks noGrp="1"/>
-          </p:cNvSpPr>
-          <p:nvPr>
-            <p:ph type="ftr" sz="quarter" idx="9"/>
+          <p:cNvPr id="3" name="Footer Placeholder 2"/>
+          <p:cNvSpPr>
+            <a:spLocks noGrp="1"/>
+          </p:cNvSpPr>
+          <p:nvPr>
+            <p:ph type="ftr" sz="quarter" idx="11"/>
           </p:nvPr>
         </p:nvSpPr>
         <p:spPr/>
         <p:txBody>
           <a:bodyPr/>
-          <a:lstStyle>
-            <a:lvl1pPr>
-              <a:defRPr/>
-            </a:lvl1pPr>
-          </a:lstStyle>
+          <a:lstStyle/>
           <a:p>
             <a:pPr lvl="0"/>
             <a:endParaRPr lang="de-CH"/>
@@ -3090,54 +2761,44 @@
       </p:sp>
       <p:sp>
         <p:nvSpPr>
-          <p:cNvPr id="4" name="Foliennummernplatzhalter 3">
-            <a:extLst>
-              <a:ext uri="{FF2B5EF4-FFF2-40B4-BE49-F238E27FC236}">
-                <a16:creationId xmlns:a16="http://schemas.microsoft.com/office/drawing/2014/main" id="{BF8308E2-8632-2152-7121-994B8304070D}"/>
-              </a:ext>
-            </a:extLst>
-          </p:cNvPr>
-          <p:cNvSpPr txBox="1">
-            <a:spLocks noGrp="1"/>
-          </p:cNvSpPr>
-          <p:nvPr>
-            <p:ph type="sldNum" sz="quarter" idx="8"/>
+          <p:cNvPr id="4" name="Slide Number Placeholder 3"/>
+          <p:cNvSpPr>
+            <a:spLocks noGrp="1"/>
+          </p:cNvSpPr>
+          <p:nvPr>
+            <p:ph type="sldNum" sz="quarter" idx="12"/>
           </p:nvPr>
         </p:nvSpPr>
         <p:spPr/>
         <p:txBody>
           <a:bodyPr/>
-          <a:lstStyle>
-            <a:lvl1pPr>
-              <a:defRPr/>
-            </a:lvl1pPr>
-          </a:lstStyle>
+          <a:lstStyle/>
           <a:p>
             <a:pPr lvl="0"/>
-            <a:fld id="{C0A04074-3F0C-417E-BCA1-0368584A31D0}" type="slidenum">
-              <a:t>‹Nr.›</a:t>
+            <a:fld id="{C6B6AF47-4323-4F4D-9EF2-7E7793B825DE}" type="slidenum">
+              <a:rPr lang="en-US" smtClean="0"/>
+              <a:t>‹#›</a:t>
             </a:fld>
-            <a:endParaRPr lang="de-CH"/>
+            <a:endParaRPr lang="en-US"/>
           </a:p>
         </p:txBody>
       </p:sp>
     </p:spTree>
     <p:extLst>
       <p:ext uri="{BB962C8B-B14F-4D97-AF65-F5344CB8AC3E}">
-        <p14:creationId xmlns:p14="http://schemas.microsoft.com/office/powerpoint/2010/main" val="4175915090"/>
+        <p14:creationId xmlns:p14="http://schemas.microsoft.com/office/powerpoint/2010/main" val="2937096233"/>
       </p:ext>
     </p:extLst>
   </p:cSld>
   <p:clrMapOvr>
     <a:masterClrMapping/>
   </p:clrMapOvr>
-  <p:hf sldNum="0" hdr="0" ftr="0" dt="0"/>
 </p:sldLayout>
 </file>
 
 <file path=ppt/slideLayouts/slideLayout8.xml><?xml version="1.0" encoding="utf-8"?>
 <p:sldLayout xmlns:a="http://schemas.openxmlformats.org/drawingml/2006/main" xmlns:r="http://schemas.openxmlformats.org/officeDocument/2006/relationships" xmlns:p="http://schemas.openxmlformats.org/presentationml/2006/main" type="objTx" preserve="1">
-  <p:cSld name="Inhalt mit Überschrift">
+  <p:cSld name="Content with Caption">
     <p:spTree>
       <p:nvGrpSpPr>
         <p:cNvPr id="1" name=""/>
@@ -3154,14 +2815,8 @@
       </p:grpSpPr>
       <p:sp>
         <p:nvSpPr>
-          <p:cNvPr id="2" name="Titel 1">
-            <a:extLst>
-              <a:ext uri="{FF2B5EF4-FFF2-40B4-BE49-F238E27FC236}">
-                <a16:creationId xmlns:a16="http://schemas.microsoft.com/office/drawing/2014/main" id="{93A4E119-42EC-49E8-D8C0-AE1C9FA9B56C}"/>
-              </a:ext>
-            </a:extLst>
-          </p:cNvPr>
-          <p:cNvSpPr txBox="1">
+          <p:cNvPr id="2" name="Title 1"/>
+          <p:cNvSpPr>
             <a:spLocks noGrp="1"/>
           </p:cNvSpPr>
           <p:nvPr>
@@ -3170,37 +2825,30 @@
         </p:nvSpPr>
         <p:spPr>
           <a:xfrm>
-            <a:off x="693736" y="377820"/>
-            <a:ext cx="3251204" cy="1323978"/>
+            <a:off x="1388604" y="768032"/>
+            <a:ext cx="6502015" cy="2688114"/>
           </a:xfrm>
         </p:spPr>
         <p:txBody>
           <a:bodyPr anchor="b"/>
           <a:lstStyle>
             <a:lvl1pPr>
-              <a:defRPr lang="de-DE" sz="3200"/>
+              <a:defRPr sz="5291"/>
             </a:lvl1pPr>
           </a:lstStyle>
           <a:p>
-            <a:pPr lvl="0"/>
             <a:r>
-              <a:rPr lang="de-DE"/>
-              <a:t>Mastertitelformat bearbeiten</a:t>
+              <a:rPr lang="en-US"/>
+              <a:t>Click to edit Master title style</a:t>
             </a:r>
-            <a:endParaRPr lang="en-US"/>
-          </a:p>
-        </p:txBody>
-      </p:sp>
-      <p:sp>
-        <p:nvSpPr>
-          <p:cNvPr id="3" name="Inhaltsplatzhalter 2">
-            <a:extLst>
-              <a:ext uri="{FF2B5EF4-FFF2-40B4-BE49-F238E27FC236}">
-                <a16:creationId xmlns:a16="http://schemas.microsoft.com/office/drawing/2014/main" id="{687E2234-BCB7-014D-BE28-10FFB00898EC}"/>
-              </a:ext>
-            </a:extLst>
-          </p:cNvPr>
-          <p:cNvSpPr txBox="1">
+            <a:endParaRPr lang="en-US" dirty="0"/>
+          </a:p>
+        </p:txBody>
+      </p:sp>
+      <p:sp>
+        <p:nvSpPr>
+          <p:cNvPr id="3" name="Content Placeholder 2"/>
+          <p:cNvSpPr>
             <a:spLocks noGrp="1"/>
           </p:cNvSpPr>
           <p:nvPr>
@@ -3209,129 +2857,158 @@
         </p:nvSpPr>
         <p:spPr>
           <a:xfrm>
-            <a:off x="4286249" y="815973"/>
-            <a:ext cx="5102223" cy="4030666"/>
+            <a:off x="8570483" y="1658738"/>
+            <a:ext cx="10205829" cy="8187013"/>
           </a:xfrm>
         </p:spPr>
         <p:txBody>
           <a:bodyPr/>
           <a:lstStyle>
             <a:lvl1pPr>
-              <a:defRPr/>
+              <a:defRPr sz="5291"/>
             </a:lvl1pPr>
             <a:lvl2pPr>
-              <a:defRPr sz="2800"/>
+              <a:defRPr sz="4630"/>
             </a:lvl2pPr>
             <a:lvl3pPr>
-              <a:defRPr sz="2400"/>
+              <a:defRPr sz="3968"/>
             </a:lvl3pPr>
             <a:lvl4pPr>
-              <a:defRPr sz="2000"/>
+              <a:defRPr sz="3307"/>
             </a:lvl4pPr>
             <a:lvl5pPr>
-              <a:defRPr sz="2000"/>
+              <a:defRPr sz="3307"/>
             </a:lvl5pPr>
+            <a:lvl6pPr>
+              <a:defRPr sz="3307"/>
+            </a:lvl6pPr>
+            <a:lvl7pPr>
+              <a:defRPr sz="3307"/>
+            </a:lvl7pPr>
+            <a:lvl8pPr>
+              <a:defRPr sz="3307"/>
+            </a:lvl8pPr>
+            <a:lvl9pPr>
+              <a:defRPr sz="3307"/>
+            </a:lvl9pPr>
           </a:lstStyle>
           <a:p>
             <a:pPr lvl="0"/>
             <a:r>
-              <a:rPr lang="de-DE"/>
-              <a:t>Mastertextformat bearbeiten</a:t>
+              <a:rPr lang="en-US"/>
+              <a:t>Click to edit Master text styles</a:t>
             </a:r>
           </a:p>
           <a:p>
             <a:pPr lvl="1"/>
             <a:r>
-              <a:rPr lang="de-DE"/>
-              <a:t>Zweite Ebene</a:t>
+              <a:rPr lang="en-US"/>
+              <a:t>Second level</a:t>
             </a:r>
           </a:p>
           <a:p>
             <a:pPr lvl="2"/>
             <a:r>
-              <a:rPr lang="de-DE"/>
-              <a:t>Dritte Ebene</a:t>
+              <a:rPr lang="en-US"/>
+              <a:t>Third level</a:t>
             </a:r>
           </a:p>
           <a:p>
             <a:pPr lvl="3"/>
             <a:r>
-              <a:rPr lang="de-DE"/>
-              <a:t>Vierte Ebene</a:t>
+              <a:rPr lang="en-US"/>
+              <a:t>Fourth level</a:t>
             </a:r>
           </a:p>
           <a:p>
             <a:pPr lvl="4"/>
             <a:r>
-              <a:rPr lang="de-DE"/>
-              <a:t>Fünfte Ebene</a:t>
+              <a:rPr lang="en-US"/>
+              <a:t>Fifth level</a:t>
             </a:r>
-            <a:endParaRPr lang="en-US"/>
-          </a:p>
-        </p:txBody>
-      </p:sp>
-      <p:sp>
-        <p:nvSpPr>
-          <p:cNvPr id="4" name="Textplatzhalter 3">
-            <a:extLst>
-              <a:ext uri="{FF2B5EF4-FFF2-40B4-BE49-F238E27FC236}">
-                <a16:creationId xmlns:a16="http://schemas.microsoft.com/office/drawing/2014/main" id="{7FF17145-B7A5-2D73-FA4C-B09CD997FA83}"/>
-              </a:ext>
-            </a:extLst>
-          </p:cNvPr>
-          <p:cNvSpPr txBox="1">
-            <a:spLocks noGrp="1"/>
-          </p:cNvSpPr>
-          <p:nvPr>
-            <p:ph type="body" idx="2"/>
+            <a:endParaRPr lang="en-US" dirty="0"/>
+          </a:p>
+        </p:txBody>
+      </p:sp>
+      <p:sp>
+        <p:nvSpPr>
+          <p:cNvPr id="4" name="Text Placeholder 3"/>
+          <p:cNvSpPr>
+            <a:spLocks noGrp="1"/>
+          </p:cNvSpPr>
+          <p:nvPr>
+            <p:ph type="body" sz="half" idx="2"/>
           </p:nvPr>
         </p:nvSpPr>
         <p:spPr>
           <a:xfrm>
-            <a:off x="693736" y="1701798"/>
-            <a:ext cx="3251204" cy="3151186"/>
+            <a:off x="1388604" y="3456146"/>
+            <a:ext cx="6502015" cy="6402939"/>
           </a:xfrm>
         </p:spPr>
         <p:txBody>
           <a:bodyPr/>
           <a:lstStyle>
-            <a:lvl1pPr>
-              <a:defRPr sz="1600"/>
+            <a:lvl1pPr marL="0" indent="0">
+              <a:buNone/>
+              <a:defRPr sz="2646"/>
             </a:lvl1pPr>
+            <a:lvl2pPr marL="755980" indent="0">
+              <a:buNone/>
+              <a:defRPr sz="2315"/>
+            </a:lvl2pPr>
+            <a:lvl3pPr marL="1511960" indent="0">
+              <a:buNone/>
+              <a:defRPr sz="1984"/>
+            </a:lvl3pPr>
+            <a:lvl4pPr marL="2267941" indent="0">
+              <a:buNone/>
+              <a:defRPr sz="1654"/>
+            </a:lvl4pPr>
+            <a:lvl5pPr marL="3023921" indent="0">
+              <a:buNone/>
+              <a:defRPr sz="1654"/>
+            </a:lvl5pPr>
+            <a:lvl6pPr marL="3779901" indent="0">
+              <a:buNone/>
+              <a:defRPr sz="1654"/>
+            </a:lvl6pPr>
+            <a:lvl7pPr marL="4535881" indent="0">
+              <a:buNone/>
+              <a:defRPr sz="1654"/>
+            </a:lvl7pPr>
+            <a:lvl8pPr marL="5291861" indent="0">
+              <a:buNone/>
+              <a:defRPr sz="1654"/>
+            </a:lvl8pPr>
+            <a:lvl9pPr marL="6047842" indent="0">
+              <a:buNone/>
+              <a:defRPr sz="1654"/>
+            </a:lvl9pPr>
           </a:lstStyle>
           <a:p>
             <a:pPr lvl="0"/>
             <a:r>
-              <a:rPr lang="de-DE"/>
-              <a:t>Mastertextformat bearbeiten</a:t>
+              <a:rPr lang="en-US"/>
+              <a:t>Click to edit Master text styles</a:t>
             </a:r>
           </a:p>
         </p:txBody>
       </p:sp>
       <p:sp>
         <p:nvSpPr>
-          <p:cNvPr id="5" name="Datumsplatzhalter 4">
-            <a:extLst>
-              <a:ext uri="{FF2B5EF4-FFF2-40B4-BE49-F238E27FC236}">
-                <a16:creationId xmlns:a16="http://schemas.microsoft.com/office/drawing/2014/main" id="{C4C9EDB4-707D-484F-8F66-183875EB00E9}"/>
-              </a:ext>
-            </a:extLst>
-          </p:cNvPr>
-          <p:cNvSpPr txBox="1">
-            <a:spLocks noGrp="1"/>
-          </p:cNvSpPr>
-          <p:nvPr>
-            <p:ph type="dt" sz="half" idx="7"/>
+          <p:cNvPr id="5" name="Date Placeholder 4"/>
+          <p:cNvSpPr>
+            <a:spLocks noGrp="1"/>
+          </p:cNvSpPr>
+          <p:nvPr>
+            <p:ph type="dt" sz="half" idx="10"/>
           </p:nvPr>
         </p:nvSpPr>
         <p:spPr/>
         <p:txBody>
           <a:bodyPr/>
-          <a:lstStyle>
-            <a:lvl1pPr>
-              <a:defRPr/>
-            </a:lvl1pPr>
-          </a:lstStyle>
+          <a:lstStyle/>
           <a:p>
             <a:pPr lvl="0"/>
             <a:endParaRPr lang="de-CH"/>
@@ -3340,28 +3017,18 @@
       </p:sp>
       <p:sp>
         <p:nvSpPr>
-          <p:cNvPr id="6" name="Fußzeilenplatzhalter 5">
-            <a:extLst>
-              <a:ext uri="{FF2B5EF4-FFF2-40B4-BE49-F238E27FC236}">
-                <a16:creationId xmlns:a16="http://schemas.microsoft.com/office/drawing/2014/main" id="{C37F9A78-32B6-EA11-E27A-15FE68EE7AC6}"/>
-              </a:ext>
-            </a:extLst>
-          </p:cNvPr>
-          <p:cNvSpPr txBox="1">
-            <a:spLocks noGrp="1"/>
-          </p:cNvSpPr>
-          <p:nvPr>
-            <p:ph type="ftr" sz="quarter" idx="9"/>
+          <p:cNvPr id="6" name="Footer Placeholder 5"/>
+          <p:cNvSpPr>
+            <a:spLocks noGrp="1"/>
+          </p:cNvSpPr>
+          <p:nvPr>
+            <p:ph type="ftr" sz="quarter" idx="11"/>
           </p:nvPr>
         </p:nvSpPr>
         <p:spPr/>
         <p:txBody>
           <a:bodyPr/>
-          <a:lstStyle>
-            <a:lvl1pPr>
-              <a:defRPr/>
-            </a:lvl1pPr>
-          </a:lstStyle>
+          <a:lstStyle/>
           <a:p>
             <a:pPr lvl="0"/>
             <a:endParaRPr lang="de-CH"/>
@@ -3370,41 +3037,32 @@
       </p:sp>
       <p:sp>
         <p:nvSpPr>
-          <p:cNvPr id="7" name="Foliennummernplatzhalter 6">
-            <a:extLst>
-              <a:ext uri="{FF2B5EF4-FFF2-40B4-BE49-F238E27FC236}">
-                <a16:creationId xmlns:a16="http://schemas.microsoft.com/office/drawing/2014/main" id="{1D40270D-D0C5-7FD4-B7AC-1091D9A54C18}"/>
-              </a:ext>
-            </a:extLst>
-          </p:cNvPr>
-          <p:cNvSpPr txBox="1">
-            <a:spLocks noGrp="1"/>
-          </p:cNvSpPr>
-          <p:nvPr>
-            <p:ph type="sldNum" sz="quarter" idx="8"/>
+          <p:cNvPr id="7" name="Slide Number Placeholder 6"/>
+          <p:cNvSpPr>
+            <a:spLocks noGrp="1"/>
+          </p:cNvSpPr>
+          <p:nvPr>
+            <p:ph type="sldNum" sz="quarter" idx="12"/>
           </p:nvPr>
         </p:nvSpPr>
         <p:spPr/>
         <p:txBody>
           <a:bodyPr/>
-          <a:lstStyle>
-            <a:lvl1pPr>
-              <a:defRPr/>
-            </a:lvl1pPr>
-          </a:lstStyle>
+          <a:lstStyle/>
           <a:p>
             <a:pPr lvl="0"/>
-            <a:fld id="{48427F15-212E-4BF2-8CDB-A3070B9DD0CF}" type="slidenum">
-              <a:t>‹Nr.›</a:t>
+            <a:fld id="{C6B6AF47-4323-4F4D-9EF2-7E7793B825DE}" type="slidenum">
+              <a:rPr lang="en-US" smtClean="0"/>
+              <a:t>‹#›</a:t>
             </a:fld>
-            <a:endParaRPr lang="de-CH"/>
+            <a:endParaRPr lang="en-US"/>
           </a:p>
         </p:txBody>
       </p:sp>
     </p:spTree>
     <p:extLst>
       <p:ext uri="{BB962C8B-B14F-4D97-AF65-F5344CB8AC3E}">
-        <p14:creationId xmlns:p14="http://schemas.microsoft.com/office/powerpoint/2010/main" val="3358793516"/>
+        <p14:creationId xmlns:p14="http://schemas.microsoft.com/office/powerpoint/2010/main" val="2478780624"/>
       </p:ext>
     </p:extLst>
   </p:cSld>
@@ -3416,7 +3074,7 @@
 
 <file path=ppt/slideLayouts/slideLayout9.xml><?xml version="1.0" encoding="utf-8"?>
 <p:sldLayout xmlns:a="http://schemas.openxmlformats.org/drawingml/2006/main" xmlns:r="http://schemas.openxmlformats.org/officeDocument/2006/relationships" xmlns:p="http://schemas.openxmlformats.org/presentationml/2006/main" type="picTx" preserve="1">
-  <p:cSld name="Bild mit Überschrift">
+  <p:cSld name="Picture with Caption">
     <p:spTree>
       <p:nvGrpSpPr>
         <p:cNvPr id="1" name=""/>
@@ -3433,14 +3091,8 @@
       </p:grpSpPr>
       <p:sp>
         <p:nvSpPr>
-          <p:cNvPr id="2" name="Titel 1">
-            <a:extLst>
-              <a:ext uri="{FF2B5EF4-FFF2-40B4-BE49-F238E27FC236}">
-                <a16:creationId xmlns:a16="http://schemas.microsoft.com/office/drawing/2014/main" id="{21E7C4F6-379D-3E27-3020-CD61F6DE7E4B}"/>
-              </a:ext>
-            </a:extLst>
-          </p:cNvPr>
-          <p:cNvSpPr txBox="1">
+          <p:cNvPr id="2" name="Title 1"/>
+          <p:cNvSpPr>
             <a:spLocks noGrp="1"/>
           </p:cNvSpPr>
           <p:nvPr>
@@ -3449,124 +3101,170 @@
         </p:nvSpPr>
         <p:spPr>
           <a:xfrm>
-            <a:off x="693736" y="377820"/>
-            <a:ext cx="3251204" cy="1323978"/>
+            <a:off x="1388604" y="768032"/>
+            <a:ext cx="6502015" cy="2688114"/>
           </a:xfrm>
         </p:spPr>
         <p:txBody>
           <a:bodyPr anchor="b"/>
           <a:lstStyle>
             <a:lvl1pPr>
-              <a:defRPr lang="de-DE" sz="3200"/>
+              <a:defRPr sz="5291"/>
             </a:lvl1pPr>
           </a:lstStyle>
           <a:p>
+            <a:r>
+              <a:rPr lang="en-US"/>
+              <a:t>Click to edit Master title style</a:t>
+            </a:r>
+            <a:endParaRPr lang="en-US" dirty="0"/>
+          </a:p>
+        </p:txBody>
+      </p:sp>
+      <p:sp>
+        <p:nvSpPr>
+          <p:cNvPr id="3" name="Picture Placeholder 2"/>
+          <p:cNvSpPr>
+            <a:spLocks noGrp="1" noChangeAspect="1"/>
+          </p:cNvSpPr>
+          <p:nvPr>
+            <p:ph type="pic" idx="1"/>
+          </p:nvPr>
+        </p:nvSpPr>
+        <p:spPr>
+          <a:xfrm>
+            <a:off x="8570483" y="1658738"/>
+            <a:ext cx="10205829" cy="8187013"/>
+          </a:xfrm>
+        </p:spPr>
+        <p:txBody>
+          <a:bodyPr anchor="t"/>
+          <a:lstStyle>
+            <a:lvl1pPr marL="0" indent="0">
+              <a:buNone/>
+              <a:defRPr sz="5291"/>
+            </a:lvl1pPr>
+            <a:lvl2pPr marL="755980" indent="0">
+              <a:buNone/>
+              <a:defRPr sz="4630"/>
+            </a:lvl2pPr>
+            <a:lvl3pPr marL="1511960" indent="0">
+              <a:buNone/>
+              <a:defRPr sz="3968"/>
+            </a:lvl3pPr>
+            <a:lvl4pPr marL="2267941" indent="0">
+              <a:buNone/>
+              <a:defRPr sz="3307"/>
+            </a:lvl4pPr>
+            <a:lvl5pPr marL="3023921" indent="0">
+              <a:buNone/>
+              <a:defRPr sz="3307"/>
+            </a:lvl5pPr>
+            <a:lvl6pPr marL="3779901" indent="0">
+              <a:buNone/>
+              <a:defRPr sz="3307"/>
+            </a:lvl6pPr>
+            <a:lvl7pPr marL="4535881" indent="0">
+              <a:buNone/>
+              <a:defRPr sz="3307"/>
+            </a:lvl7pPr>
+            <a:lvl8pPr marL="5291861" indent="0">
+              <a:buNone/>
+              <a:defRPr sz="3307"/>
+            </a:lvl8pPr>
+            <a:lvl9pPr marL="6047842" indent="0">
+              <a:buNone/>
+              <a:defRPr sz="3307"/>
+            </a:lvl9pPr>
+          </a:lstStyle>
+          <a:p>
+            <a:r>
+              <a:rPr lang="en-US"/>
+              <a:t>Click icon to add picture</a:t>
+            </a:r>
+            <a:endParaRPr lang="en-US" dirty="0"/>
+          </a:p>
+        </p:txBody>
+      </p:sp>
+      <p:sp>
+        <p:nvSpPr>
+          <p:cNvPr id="4" name="Text Placeholder 3"/>
+          <p:cNvSpPr>
+            <a:spLocks noGrp="1"/>
+          </p:cNvSpPr>
+          <p:nvPr>
+            <p:ph type="body" sz="half" idx="2"/>
+          </p:nvPr>
+        </p:nvSpPr>
+        <p:spPr>
+          <a:xfrm>
+            <a:off x="1388604" y="3456146"/>
+            <a:ext cx="6502015" cy="6402939"/>
+          </a:xfrm>
+        </p:spPr>
+        <p:txBody>
+          <a:bodyPr/>
+          <a:lstStyle>
+            <a:lvl1pPr marL="0" indent="0">
+              <a:buNone/>
+              <a:defRPr sz="2646"/>
+            </a:lvl1pPr>
+            <a:lvl2pPr marL="755980" indent="0">
+              <a:buNone/>
+              <a:defRPr sz="2315"/>
+            </a:lvl2pPr>
+            <a:lvl3pPr marL="1511960" indent="0">
+              <a:buNone/>
+              <a:defRPr sz="1984"/>
+            </a:lvl3pPr>
+            <a:lvl4pPr marL="2267941" indent="0">
+              <a:buNone/>
+              <a:defRPr sz="1654"/>
+            </a:lvl4pPr>
+            <a:lvl5pPr marL="3023921" indent="0">
+              <a:buNone/>
+              <a:defRPr sz="1654"/>
+            </a:lvl5pPr>
+            <a:lvl6pPr marL="3779901" indent="0">
+              <a:buNone/>
+              <a:defRPr sz="1654"/>
+            </a:lvl6pPr>
+            <a:lvl7pPr marL="4535881" indent="0">
+              <a:buNone/>
+              <a:defRPr sz="1654"/>
+            </a:lvl7pPr>
+            <a:lvl8pPr marL="5291861" indent="0">
+              <a:buNone/>
+              <a:defRPr sz="1654"/>
+            </a:lvl8pPr>
+            <a:lvl9pPr marL="6047842" indent="0">
+              <a:buNone/>
+              <a:defRPr sz="1654"/>
+            </a:lvl9pPr>
+          </a:lstStyle>
+          <a:p>
             <a:pPr lvl="0"/>
             <a:r>
-              <a:rPr lang="de-DE"/>
-              <a:t>Mastertitelformat bearbeiten</a:t>
+              <a:rPr lang="en-US"/>
+              <a:t>Click to edit Master text styles</a:t>
             </a:r>
-            <a:endParaRPr lang="en-US"/>
-          </a:p>
-        </p:txBody>
-      </p:sp>
-      <p:sp>
-        <p:nvSpPr>
-          <p:cNvPr id="3" name="Bildplatzhalter 2">
-            <a:extLst>
-              <a:ext uri="{FF2B5EF4-FFF2-40B4-BE49-F238E27FC236}">
-                <a16:creationId xmlns:a16="http://schemas.microsoft.com/office/drawing/2014/main" id="{9BCBCE9E-5884-3E57-5FDB-2038205CE761}"/>
-              </a:ext>
-            </a:extLst>
-          </p:cNvPr>
-          <p:cNvSpPr txBox="1">
-            <a:spLocks noGrp="1"/>
-          </p:cNvSpPr>
-          <p:nvPr>
-            <p:ph type="pic" idx="1"/>
-          </p:nvPr>
-        </p:nvSpPr>
-        <p:spPr>
-          <a:xfrm>
-            <a:off x="4286249" y="815973"/>
-            <a:ext cx="5102223" cy="4030666"/>
-          </a:xfrm>
-        </p:spPr>
+          </a:p>
+        </p:txBody>
+      </p:sp>
+      <p:sp>
+        <p:nvSpPr>
+          <p:cNvPr id="5" name="Date Placeholder 4"/>
+          <p:cNvSpPr>
+            <a:spLocks noGrp="1"/>
+          </p:cNvSpPr>
+          <p:nvPr>
+            <p:ph type="dt" sz="half" idx="10"/>
+          </p:nvPr>
+        </p:nvSpPr>
+        <p:spPr/>
         <p:txBody>
           <a:bodyPr/>
-          <a:lstStyle>
-            <a:lvl1pPr>
-              <a:defRPr lang="en-US"/>
-            </a:lvl1pPr>
-          </a:lstStyle>
-          <a:p>
-            <a:pPr lvl="0"/>
-            <a:endParaRPr lang="en-US"/>
-          </a:p>
-        </p:txBody>
-      </p:sp>
-      <p:sp>
-        <p:nvSpPr>
-          <p:cNvPr id="4" name="Textplatzhalter 3">
-            <a:extLst>
-              <a:ext uri="{FF2B5EF4-FFF2-40B4-BE49-F238E27FC236}">
-                <a16:creationId xmlns:a16="http://schemas.microsoft.com/office/drawing/2014/main" id="{3154D5AC-BD05-B670-7861-CA45BACBC119}"/>
-              </a:ext>
-            </a:extLst>
-          </p:cNvPr>
-          <p:cNvSpPr txBox="1">
-            <a:spLocks noGrp="1"/>
-          </p:cNvSpPr>
-          <p:nvPr>
-            <p:ph type="body" idx="2"/>
-          </p:nvPr>
-        </p:nvSpPr>
-        <p:spPr>
-          <a:xfrm>
-            <a:off x="693736" y="1701798"/>
-            <a:ext cx="3251204" cy="3151186"/>
-          </a:xfrm>
-        </p:spPr>
-        <p:txBody>
-          <a:bodyPr/>
-          <a:lstStyle>
-            <a:lvl1pPr>
-              <a:defRPr sz="1600"/>
-            </a:lvl1pPr>
-          </a:lstStyle>
-          <a:p>
-            <a:pPr lvl="0"/>
-            <a:r>
-              <a:rPr lang="de-DE"/>
-              <a:t>Mastertextformat bearbeiten</a:t>
-            </a:r>
-          </a:p>
-        </p:txBody>
-      </p:sp>
-      <p:sp>
-        <p:nvSpPr>
-          <p:cNvPr id="5" name="Datumsplatzhalter 4">
-            <a:extLst>
-              <a:ext uri="{FF2B5EF4-FFF2-40B4-BE49-F238E27FC236}">
-                <a16:creationId xmlns:a16="http://schemas.microsoft.com/office/drawing/2014/main" id="{2A7693E8-53E4-4B0F-77C4-9315C162BA41}"/>
-              </a:ext>
-            </a:extLst>
-          </p:cNvPr>
-          <p:cNvSpPr txBox="1">
-            <a:spLocks noGrp="1"/>
-          </p:cNvSpPr>
-          <p:nvPr>
-            <p:ph type="dt" sz="half" idx="7"/>
-          </p:nvPr>
-        </p:nvSpPr>
-        <p:spPr/>
-        <p:txBody>
-          <a:bodyPr/>
-          <a:lstStyle>
-            <a:lvl1pPr>
-              <a:defRPr/>
-            </a:lvl1pPr>
-          </a:lstStyle>
+          <a:lstStyle/>
           <a:p>
             <a:pPr lvl="0"/>
             <a:endParaRPr lang="de-CH"/>
@@ -3575,28 +3273,18 @@
       </p:sp>
       <p:sp>
         <p:nvSpPr>
-          <p:cNvPr id="6" name="Fußzeilenplatzhalter 5">
-            <a:extLst>
-              <a:ext uri="{FF2B5EF4-FFF2-40B4-BE49-F238E27FC236}">
-                <a16:creationId xmlns:a16="http://schemas.microsoft.com/office/drawing/2014/main" id="{DF8B98A0-4F14-191A-733E-CFF008EFBE6C}"/>
-              </a:ext>
-            </a:extLst>
-          </p:cNvPr>
-          <p:cNvSpPr txBox="1">
-            <a:spLocks noGrp="1"/>
-          </p:cNvSpPr>
-          <p:nvPr>
-            <p:ph type="ftr" sz="quarter" idx="9"/>
+          <p:cNvPr id="6" name="Footer Placeholder 5"/>
+          <p:cNvSpPr>
+            <a:spLocks noGrp="1"/>
+          </p:cNvSpPr>
+          <p:nvPr>
+            <p:ph type="ftr" sz="quarter" idx="11"/>
           </p:nvPr>
         </p:nvSpPr>
         <p:spPr/>
         <p:txBody>
           <a:bodyPr/>
-          <a:lstStyle>
-            <a:lvl1pPr>
-              <a:defRPr/>
-            </a:lvl1pPr>
-          </a:lstStyle>
+          <a:lstStyle/>
           <a:p>
             <a:pPr lvl="0"/>
             <a:endParaRPr lang="de-CH"/>
@@ -3605,41 +3293,32 @@
       </p:sp>
       <p:sp>
         <p:nvSpPr>
-          <p:cNvPr id="7" name="Foliennummernplatzhalter 6">
-            <a:extLst>
-              <a:ext uri="{FF2B5EF4-FFF2-40B4-BE49-F238E27FC236}">
-                <a16:creationId xmlns:a16="http://schemas.microsoft.com/office/drawing/2014/main" id="{073D0E67-6EF6-C28C-C8F1-DE86C09E0BA8}"/>
-              </a:ext>
-            </a:extLst>
-          </p:cNvPr>
-          <p:cNvSpPr txBox="1">
-            <a:spLocks noGrp="1"/>
-          </p:cNvSpPr>
-          <p:nvPr>
-            <p:ph type="sldNum" sz="quarter" idx="8"/>
+          <p:cNvPr id="7" name="Slide Number Placeholder 6"/>
+          <p:cNvSpPr>
+            <a:spLocks noGrp="1"/>
+          </p:cNvSpPr>
+          <p:nvPr>
+            <p:ph type="sldNum" sz="quarter" idx="12"/>
           </p:nvPr>
         </p:nvSpPr>
         <p:spPr/>
         <p:txBody>
           <a:bodyPr/>
-          <a:lstStyle>
-            <a:lvl1pPr>
-              <a:defRPr/>
-            </a:lvl1pPr>
-          </a:lstStyle>
+          <a:lstStyle/>
           <a:p>
             <a:pPr lvl="0"/>
-            <a:fld id="{7C03654A-D794-4942-A298-B542431462AD}" type="slidenum">
-              <a:t>‹Nr.›</a:t>
+            <a:fld id="{C6B6AF47-4323-4F4D-9EF2-7E7793B825DE}" type="slidenum">
+              <a:rPr lang="en-US" smtClean="0"/>
+              <a:t>‹#›</a:t>
             </a:fld>
-            <a:endParaRPr lang="de-CH"/>
+            <a:endParaRPr lang="en-US"/>
           </a:p>
         </p:txBody>
       </p:sp>
     </p:spTree>
     <p:extLst>
       <p:ext uri="{BB962C8B-B14F-4D97-AF65-F5344CB8AC3E}">
-        <p14:creationId xmlns:p14="http://schemas.microsoft.com/office/powerpoint/2010/main" val="3396460163"/>
+        <p14:creationId xmlns:p14="http://schemas.microsoft.com/office/powerpoint/2010/main" val="2002612941"/>
       </p:ext>
     </p:extLst>
   </p:cSld>
@@ -3653,10 +3332,9 @@
 <p:sldMaster xmlns:a="http://schemas.openxmlformats.org/drawingml/2006/main" xmlns:r="http://schemas.openxmlformats.org/officeDocument/2006/relationships" xmlns:p="http://schemas.openxmlformats.org/presentationml/2006/main">
   <p:cSld>
     <p:bg>
-      <p:bgPr>
-        <a:noFill/>
-        <a:effectLst/>
-      </p:bgPr>
+      <p:bgRef idx="1001">
+        <a:schemeClr val="bg1"/>
+      </p:bgRef>
     </p:bg>
     <p:spTree>
       <p:nvGrpSpPr>
@@ -3674,14 +3352,8 @@
       </p:grpSpPr>
       <p:sp>
         <p:nvSpPr>
-          <p:cNvPr id="2" name="Titelplatzhalter 1">
-            <a:extLst>
-              <a:ext uri="{FF2B5EF4-FFF2-40B4-BE49-F238E27FC236}">
-                <a16:creationId xmlns:a16="http://schemas.microsoft.com/office/drawing/2014/main" id="{74B021FC-587D-CC4B-A6E9-5414861E48B6}"/>
-              </a:ext>
-            </a:extLst>
-          </p:cNvPr>
-          <p:cNvSpPr txBox="1">
+          <p:cNvPr id="2" name="Title Placeholder 1"/>
+          <p:cNvSpPr>
             <a:spLocks noGrp="1"/>
           </p:cNvSpPr>
           <p:nvPr>
@@ -3690,38 +3362,31 @@
         </p:nvSpPr>
         <p:spPr>
           <a:xfrm>
-            <a:off x="503998" y="226076"/>
-            <a:ext cx="9071643" cy="946440"/>
+            <a:off x="1385977" y="613360"/>
+            <a:ext cx="17387709" cy="2226762"/>
           </a:xfrm>
           <a:prstGeom prst="rect">
             <a:avLst/>
           </a:prstGeom>
-          <a:noFill/>
-          <a:ln>
-            <a:noFill/>
-          </a:ln>
         </p:spPr>
         <p:txBody>
-          <a:bodyPr vert="horz" wrap="square" lIns="0" tIns="0" rIns="0" bIns="0" anchor="ctr" anchorCtr="1" compatLnSpc="1">
-            <a:noAutofit/>
+          <a:bodyPr vert="horz" lIns="91440" tIns="45720" rIns="91440" bIns="45720" rtlCol="0" anchor="ctr">
+            <a:normAutofit/>
           </a:bodyPr>
           <a:lstStyle/>
           <a:p>
-            <a:pPr lvl="0"/>
-            <a:endParaRPr lang="de-CH"/>
-          </a:p>
-        </p:txBody>
-      </p:sp>
-      <p:sp>
-        <p:nvSpPr>
-          <p:cNvPr id="3" name="Textplatzhalter 2">
-            <a:extLst>
-              <a:ext uri="{FF2B5EF4-FFF2-40B4-BE49-F238E27FC236}">
-                <a16:creationId xmlns:a16="http://schemas.microsoft.com/office/drawing/2014/main" id="{DBCFA7ED-A7A5-73DD-8AEB-2F5FB387DE3F}"/>
-              </a:ext>
-            </a:extLst>
-          </p:cNvPr>
-          <p:cNvSpPr txBox="1">
+            <a:r>
+              <a:rPr lang="en-US"/>
+              <a:t>Click to edit Master title style</a:t>
+            </a:r>
+            <a:endParaRPr lang="en-US" dirty="0"/>
+          </a:p>
+        </p:txBody>
+      </p:sp>
+      <p:sp>
+        <p:nvSpPr>
+          <p:cNvPr id="3" name="Text Placeholder 2"/>
+          <p:cNvSpPr>
             <a:spLocks noGrp="1"/>
           </p:cNvSpPr>
           <p:nvPr>
@@ -3730,70 +3395,60 @@
         </p:nvSpPr>
         <p:spPr>
           <a:xfrm>
-            <a:off x="503998" y="1326602"/>
-            <a:ext cx="9071643" cy="3288237"/>
+            <a:off x="1385977" y="3066796"/>
+            <a:ext cx="17387709" cy="7309644"/>
           </a:xfrm>
           <a:prstGeom prst="rect">
             <a:avLst/>
           </a:prstGeom>
-          <a:noFill/>
-          <a:ln>
-            <a:noFill/>
-          </a:ln>
         </p:spPr>
         <p:txBody>
-          <a:bodyPr vert="horz" wrap="square" lIns="0" tIns="0" rIns="0" bIns="0" anchor="t" anchorCtr="0" compatLnSpc="1">
+          <a:bodyPr vert="horz" lIns="91440" tIns="45720" rIns="91440" bIns="45720" rtlCol="0">
             <a:normAutofit/>
           </a:bodyPr>
           <a:lstStyle/>
           <a:p>
             <a:pPr lvl="0"/>
             <a:r>
-              <a:rPr lang="de-DE"/>
-              <a:t>Mastertextformat bearbeiten</a:t>
+              <a:rPr lang="en-US"/>
+              <a:t>Click to edit Master text styles</a:t>
             </a:r>
           </a:p>
           <a:p>
             <a:pPr lvl="1"/>
             <a:r>
-              <a:rPr lang="de-DE"/>
-              <a:t>Zweite Ebene</a:t>
+              <a:rPr lang="en-US"/>
+              <a:t>Second level</a:t>
             </a:r>
           </a:p>
           <a:p>
             <a:pPr lvl="2"/>
             <a:r>
-              <a:rPr lang="de-DE"/>
-              <a:t>Dritte Ebene</a:t>
+              <a:rPr lang="en-US"/>
+              <a:t>Third level</a:t>
             </a:r>
           </a:p>
           <a:p>
             <a:pPr lvl="3"/>
             <a:r>
-              <a:rPr lang="de-DE"/>
-              <a:t>Vierte Ebene</a:t>
+              <a:rPr lang="en-US"/>
+              <a:t>Fourth level</a:t>
             </a:r>
           </a:p>
           <a:p>
             <a:pPr lvl="4"/>
             <a:r>
-              <a:rPr lang="de-DE"/>
-              <a:t>Fünfte Ebene</a:t>
+              <a:rPr lang="en-US"/>
+              <a:t>Fifth level</a:t>
             </a:r>
-            <a:endParaRPr lang="de-CH"/>
-          </a:p>
-        </p:txBody>
-      </p:sp>
-      <p:sp>
-        <p:nvSpPr>
-          <p:cNvPr id="4" name="Datumsplatzhalter 3">
-            <a:extLst>
-              <a:ext uri="{FF2B5EF4-FFF2-40B4-BE49-F238E27FC236}">
-                <a16:creationId xmlns:a16="http://schemas.microsoft.com/office/drawing/2014/main" id="{EE2F14B4-F447-CFF3-E374-165E160BF749}"/>
-              </a:ext>
-            </a:extLst>
-          </p:cNvPr>
-          <p:cNvSpPr txBox="1">
+            <a:endParaRPr lang="en-US" dirty="0"/>
+          </a:p>
+        </p:txBody>
+      </p:sp>
+      <p:sp>
+        <p:nvSpPr>
+          <p:cNvPr id="4" name="Date Placeholder 3"/>
+          <p:cNvSpPr>
             <a:spLocks noGrp="1"/>
           </p:cNvSpPr>
           <p:nvPr>
@@ -3802,42 +3457,23 @@
         </p:nvSpPr>
         <p:spPr>
           <a:xfrm>
-            <a:off x="503998" y="5165281"/>
-            <a:ext cx="2348279" cy="390604"/>
+            <a:off x="1385977" y="10677787"/>
+            <a:ext cx="4535924" cy="613359"/>
           </a:xfrm>
           <a:prstGeom prst="rect">
             <a:avLst/>
           </a:prstGeom>
-          <a:noFill/>
-          <a:ln>
-            <a:noFill/>
-          </a:ln>
         </p:spPr>
         <p:txBody>
-          <a:bodyPr vert="horz" wrap="square" lIns="0" tIns="0" rIns="0" bIns="0" anchor="t" anchorCtr="0" compatLnSpc="1">
-            <a:noAutofit/>
-          </a:bodyPr>
+          <a:bodyPr vert="horz" lIns="91440" tIns="45720" rIns="91440" bIns="45720" rtlCol="0" anchor="ctr"/>
           <a:lstStyle>
-            <a:lvl1pPr marL="0" marR="0" lvl="0" indent="0" algn="l" defTabSz="914400" rtl="0" fontAlgn="auto" hangingPunct="0">
-              <a:lnSpc>
-                <a:spcPct val="100000"/>
-              </a:lnSpc>
-              <a:spcBef>
-                <a:spcPts val="0"/>
-              </a:spcBef>
-              <a:spcAft>
-                <a:spcPts val="0"/>
-              </a:spcAft>
-              <a:buNone/>
-              <a:tabLst/>
-              <a:defRPr lang="de-CH" sz="1400" b="0" i="0" u="none" strike="noStrike" kern="1200" cap="none" spc="0" baseline="0">
+            <a:lvl1pPr algn="l">
+              <a:defRPr sz="1984">
                 <a:solidFill>
-                  <a:srgbClr val="000000"/>
+                  <a:schemeClr val="tx1">
+                    <a:tint val="82000"/>
+                  </a:schemeClr>
                 </a:solidFill>
-                <a:uFillTx/>
-                <a:latin typeface="Liberation Serif" pitchFamily="18"/>
-                <a:ea typeface="DejaVu Sans" pitchFamily="2"/>
-                <a:cs typeface="DejaVu Sans" pitchFamily="2"/>
               </a:defRPr>
             </a:lvl1pPr>
           </a:lstStyle>
@@ -3849,14 +3485,8 @@
       </p:sp>
       <p:sp>
         <p:nvSpPr>
-          <p:cNvPr id="5" name="Fußzeilenplatzhalter 4">
-            <a:extLst>
-              <a:ext uri="{FF2B5EF4-FFF2-40B4-BE49-F238E27FC236}">
-                <a16:creationId xmlns:a16="http://schemas.microsoft.com/office/drawing/2014/main" id="{EA52FCD1-F863-E13C-E8F5-85221F0595ED}"/>
-              </a:ext>
-            </a:extLst>
-          </p:cNvPr>
-          <p:cNvSpPr txBox="1">
+          <p:cNvPr id="5" name="Footer Placeholder 4"/>
+          <p:cNvSpPr>
             <a:spLocks noGrp="1"/>
           </p:cNvSpPr>
           <p:nvPr>
@@ -3865,42 +3495,23 @@
         </p:nvSpPr>
         <p:spPr>
           <a:xfrm>
-            <a:off x="3447361" y="5165281"/>
-            <a:ext cx="3194995" cy="390604"/>
+            <a:off x="6677889" y="10677787"/>
+            <a:ext cx="6803886" cy="613359"/>
           </a:xfrm>
           <a:prstGeom prst="rect">
             <a:avLst/>
           </a:prstGeom>
-          <a:noFill/>
-          <a:ln>
-            <a:noFill/>
-          </a:ln>
         </p:spPr>
         <p:txBody>
-          <a:bodyPr vert="horz" wrap="square" lIns="0" tIns="0" rIns="0" bIns="0" anchor="t" anchorCtr="1" compatLnSpc="1">
-            <a:noAutofit/>
-          </a:bodyPr>
+          <a:bodyPr vert="horz" lIns="91440" tIns="45720" rIns="91440" bIns="45720" rtlCol="0" anchor="ctr"/>
           <a:lstStyle>
-            <a:lvl1pPr marL="0" marR="0" lvl="0" indent="0" algn="ctr" defTabSz="914400" rtl="0" fontAlgn="auto" hangingPunct="0">
-              <a:lnSpc>
-                <a:spcPct val="100000"/>
-              </a:lnSpc>
-              <a:spcBef>
-                <a:spcPts val="0"/>
-              </a:spcBef>
-              <a:spcAft>
-                <a:spcPts val="0"/>
-              </a:spcAft>
-              <a:buNone/>
-              <a:tabLst/>
-              <a:defRPr lang="de-CH" sz="1400" b="0" i="0" u="none" strike="noStrike" kern="1200" cap="none" spc="0" baseline="0">
+            <a:lvl1pPr algn="ctr">
+              <a:defRPr sz="1984">
                 <a:solidFill>
-                  <a:srgbClr val="000000"/>
+                  <a:schemeClr val="tx1">
+                    <a:tint val="82000"/>
+                  </a:schemeClr>
                 </a:solidFill>
-                <a:uFillTx/>
-                <a:latin typeface="Liberation Serif" pitchFamily="18"/>
-                <a:ea typeface="DejaVu Sans" pitchFamily="2"/>
-                <a:cs typeface="DejaVu Sans" pitchFamily="2"/>
               </a:defRPr>
             </a:lvl1pPr>
           </a:lstStyle>
@@ -3912,14 +3523,8 @@
       </p:sp>
       <p:sp>
         <p:nvSpPr>
-          <p:cNvPr id="6" name="Foliennummernplatzhalter 5">
-            <a:extLst>
-              <a:ext uri="{FF2B5EF4-FFF2-40B4-BE49-F238E27FC236}">
-                <a16:creationId xmlns:a16="http://schemas.microsoft.com/office/drawing/2014/main" id="{AA039797-8C77-5ADB-844B-8E7214395AEE}"/>
-              </a:ext>
-            </a:extLst>
-          </p:cNvPr>
-          <p:cNvSpPr txBox="1">
+          <p:cNvPr id="6" name="Slide Number Placeholder 5"/>
+          <p:cNvSpPr>
             <a:spLocks noGrp="1"/>
           </p:cNvSpPr>
           <p:nvPr>
@@ -3928,222 +3533,178 @@
         </p:nvSpPr>
         <p:spPr>
           <a:xfrm>
-            <a:off x="7227362" y="5165281"/>
-            <a:ext cx="2348279" cy="390604"/>
+            <a:off x="14237762" y="10677787"/>
+            <a:ext cx="4535924" cy="613359"/>
           </a:xfrm>
           <a:prstGeom prst="rect">
             <a:avLst/>
           </a:prstGeom>
-          <a:noFill/>
-          <a:ln>
-            <a:noFill/>
-          </a:ln>
         </p:spPr>
         <p:txBody>
-          <a:bodyPr vert="horz" wrap="square" lIns="0" tIns="0" rIns="0" bIns="0" anchor="t" anchorCtr="0" compatLnSpc="1">
-            <a:noAutofit/>
-          </a:bodyPr>
+          <a:bodyPr vert="horz" lIns="91440" tIns="45720" rIns="91440" bIns="45720" rtlCol="0" anchor="ctr"/>
           <a:lstStyle>
-            <a:lvl1pPr marL="0" marR="0" lvl="0" indent="0" algn="r" defTabSz="914400" rtl="0" fontAlgn="auto" hangingPunct="0">
-              <a:lnSpc>
-                <a:spcPct val="100000"/>
-              </a:lnSpc>
-              <a:spcBef>
-                <a:spcPts val="0"/>
-              </a:spcBef>
-              <a:spcAft>
-                <a:spcPts val="0"/>
-              </a:spcAft>
-              <a:buNone/>
-              <a:tabLst/>
-              <a:defRPr lang="de-CH" sz="1400" b="0" i="0" u="none" strike="noStrike" kern="1200" cap="none" spc="0" baseline="0">
+            <a:lvl1pPr algn="r">
+              <a:defRPr sz="1984">
                 <a:solidFill>
-                  <a:srgbClr val="000000"/>
+                  <a:schemeClr val="tx1">
+                    <a:tint val="82000"/>
+                  </a:schemeClr>
                 </a:solidFill>
-                <a:uFillTx/>
-                <a:latin typeface="Liberation Serif" pitchFamily="18"/>
-                <a:ea typeface="DejaVu Sans" pitchFamily="2"/>
-                <a:cs typeface="DejaVu Sans" pitchFamily="2"/>
               </a:defRPr>
             </a:lvl1pPr>
           </a:lstStyle>
           <a:p>
             <a:pPr lvl="0"/>
             <a:fld id="{C6B6AF47-4323-4F4D-9EF2-7E7793B825DE}" type="slidenum">
-              <a:t>‹Nr.›</a:t>
+              <a:rPr lang="en-US" smtClean="0"/>
+              <a:t>‹#›</a:t>
             </a:fld>
-            <a:endParaRPr lang="de-CH"/>
+            <a:endParaRPr lang="en-US"/>
           </a:p>
         </p:txBody>
       </p:sp>
     </p:spTree>
+    <p:extLst>
+      <p:ext uri="{BB962C8B-B14F-4D97-AF65-F5344CB8AC3E}">
+        <p14:creationId xmlns:p14="http://schemas.microsoft.com/office/powerpoint/2010/main" val="681367074"/>
+      </p:ext>
+    </p:extLst>
   </p:cSld>
   <p:clrMap bg1="lt1" tx1="dk1" bg2="lt2" tx2="dk2" accent1="accent1" accent2="accent2" accent3="accent3" accent4="accent4" accent5="accent5" accent6="accent6" hlink="hlink" folHlink="folHlink"/>
   <p:sldLayoutIdLst>
-    <p:sldLayoutId id="2147483649" r:id="rId1"/>
-    <p:sldLayoutId id="2147483650" r:id="rId2"/>
-    <p:sldLayoutId id="2147483651" r:id="rId3"/>
-    <p:sldLayoutId id="2147483652" r:id="rId4"/>
-    <p:sldLayoutId id="2147483653" r:id="rId5"/>
-    <p:sldLayoutId id="2147483654" r:id="rId6"/>
-    <p:sldLayoutId id="2147483655" r:id="rId7"/>
-    <p:sldLayoutId id="2147483656" r:id="rId8"/>
-    <p:sldLayoutId id="2147483657" r:id="rId9"/>
-    <p:sldLayoutId id="2147483658" r:id="rId10"/>
-    <p:sldLayoutId id="2147483659" r:id="rId11"/>
+    <p:sldLayoutId id="2147483661" r:id="rId1"/>
+    <p:sldLayoutId id="2147483662" r:id="rId2"/>
+    <p:sldLayoutId id="2147483663" r:id="rId3"/>
+    <p:sldLayoutId id="2147483664" r:id="rId4"/>
+    <p:sldLayoutId id="2147483665" r:id="rId5"/>
+    <p:sldLayoutId id="2147483666" r:id="rId6"/>
+    <p:sldLayoutId id="2147483667" r:id="rId7"/>
+    <p:sldLayoutId id="2147483668" r:id="rId8"/>
+    <p:sldLayoutId id="2147483669" r:id="rId9"/>
+    <p:sldLayoutId id="2147483670" r:id="rId10"/>
+    <p:sldLayoutId id="2147483671" r:id="rId11"/>
   </p:sldLayoutIdLst>
   <p:txStyles>
     <p:titleStyle>
-      <a:lvl1pPr marL="0" marR="0" lvl="0" indent="0" algn="ctr" defTabSz="914400" rtl="0" fontAlgn="auto" hangingPunct="0">
+      <a:lvl1pPr algn="l" defTabSz="1511960" rtl="0" eaLnBrk="1" latinLnBrk="0" hangingPunct="1">
         <a:lnSpc>
-          <a:spcPct val="100000"/>
+          <a:spcPct val="90000"/>
         </a:lnSpc>
         <a:spcBef>
-          <a:spcPts val="0"/>
+          <a:spcPct val="0"/>
         </a:spcBef>
-        <a:spcAft>
-          <a:spcPts val="0"/>
-        </a:spcAft>
         <a:buNone/>
-        <a:tabLst/>
-        <a:defRPr lang="de-CH" sz="4400" b="0" i="0" u="none" strike="noStrike" kern="1200" cap="none" spc="0" baseline="0">
+        <a:defRPr sz="7275" kern="1200">
           <a:solidFill>
-            <a:srgbClr val="000000"/>
+            <a:schemeClr val="tx1"/>
           </a:solidFill>
-          <a:highlight>
-            <a:scrgbClr r="0" g="0" b="0">
-              <a:alpha val="0"/>
-            </a:scrgbClr>
-          </a:highlight>
-          <a:uFillTx/>
-          <a:latin typeface="Liberation Sans" pitchFamily="18"/>
+          <a:latin typeface="+mj-lt"/>
+          <a:ea typeface="+mj-ea"/>
+          <a:cs typeface="+mj-cs"/>
         </a:defRPr>
       </a:lvl1pPr>
     </p:titleStyle>
     <p:bodyStyle>
-      <a:lvl1pPr marL="0" marR="0" lvl="0" indent="0" defTabSz="914400" rtl="0" fontAlgn="auto" hangingPunct="0">
-        <a:lnSpc>
-          <a:spcPct val="100000"/>
-        </a:lnSpc>
-        <a:spcBef>
-          <a:spcPts val="1415"/>
-        </a:spcBef>
-        <a:spcAft>
-          <a:spcPts val="0"/>
-        </a:spcAft>
-        <a:buNone/>
-        <a:tabLst/>
-        <a:defRPr lang="de-DE" sz="3200" b="0" i="0" u="none" strike="noStrike" kern="1200" cap="none" spc="0" baseline="0">
-          <a:solidFill>
-            <a:srgbClr val="000000"/>
-          </a:solidFill>
-          <a:highlight>
-            <a:scrgbClr r="0" g="0" b="0">
-              <a:alpha val="0"/>
-            </a:scrgbClr>
-          </a:highlight>
-          <a:uFillTx/>
-          <a:latin typeface="Liberation Sans" pitchFamily="18"/>
-        </a:defRPr>
-      </a:lvl1pPr>
-      <a:lvl2pPr marL="685800" marR="0" lvl="1" indent="-228600" algn="l" defTabSz="914400" rtl="0" fontAlgn="auto" hangingPunct="1">
+      <a:lvl1pPr marL="377990" indent="-377990" algn="l" defTabSz="1511960" rtl="0" eaLnBrk="1" latinLnBrk="0" hangingPunct="1">
         <a:lnSpc>
           <a:spcPct val="90000"/>
         </a:lnSpc>
         <a:spcBef>
-          <a:spcPts val="500"/>
+          <a:spcPts val="1654"/>
         </a:spcBef>
-        <a:spcAft>
-          <a:spcPts val="0"/>
-        </a:spcAft>
-        <a:buSzPct val="100000"/>
-        <a:buFont typeface="Arial" pitchFamily="34"/>
+        <a:buFont typeface="Arial" panose="020B0604020202020204" pitchFamily="34" charset="0"/>
         <a:buChar char="•"/>
-        <a:tabLst/>
-        <a:defRPr lang="de-DE" sz="2400" b="0" i="0" u="none" strike="noStrike" kern="1200" cap="none" spc="0" baseline="0">
+        <a:defRPr sz="4630" kern="1200">
           <a:solidFill>
-            <a:srgbClr val="000000"/>
+            <a:schemeClr val="tx1"/>
           </a:solidFill>
-          <a:uFillTx/>
-          <a:latin typeface="Aptos"/>
+          <a:latin typeface="+mn-lt"/>
+          <a:ea typeface="+mn-ea"/>
+          <a:cs typeface="+mn-cs"/>
         </a:defRPr>
-      </a:lvl2pPr>
-      <a:lvl3pPr marL="1143000" marR="0" lvl="2" indent="-228600" algn="l" defTabSz="914400" rtl="0" fontAlgn="auto" hangingPunct="1">
+      </a:lvl1pPr>
+      <a:lvl2pPr marL="1133970" indent="-377990" algn="l" defTabSz="1511960" rtl="0" eaLnBrk="1" latinLnBrk="0" hangingPunct="1">
         <a:lnSpc>
           <a:spcPct val="90000"/>
         </a:lnSpc>
         <a:spcBef>
-          <a:spcPts val="500"/>
+          <a:spcPts val="827"/>
         </a:spcBef>
-        <a:spcAft>
-          <a:spcPts val="0"/>
-        </a:spcAft>
-        <a:buSzPct val="100000"/>
-        <a:buFont typeface="Arial" pitchFamily="34"/>
+        <a:buFont typeface="Arial" panose="020B0604020202020204" pitchFamily="34" charset="0"/>
         <a:buChar char="•"/>
-        <a:tabLst/>
-        <a:defRPr lang="de-DE" sz="2000" b="0" i="0" u="none" strike="noStrike" kern="1200" cap="none" spc="0" baseline="0">
+        <a:defRPr sz="3968" kern="1200">
           <a:solidFill>
-            <a:srgbClr val="000000"/>
+            <a:schemeClr val="tx1"/>
           </a:solidFill>
-          <a:uFillTx/>
-          <a:latin typeface="Aptos"/>
+          <a:latin typeface="+mn-lt"/>
+          <a:ea typeface="+mn-ea"/>
+          <a:cs typeface="+mn-cs"/>
         </a:defRPr>
-      </a:lvl3pPr>
-      <a:lvl4pPr marL="1600200" marR="0" lvl="3" indent="-228600" algn="l" defTabSz="914400" rtl="0" fontAlgn="auto" hangingPunct="1">
+      </a:lvl2pPr>
+      <a:lvl3pPr marL="1889951" indent="-377990" algn="l" defTabSz="1511960" rtl="0" eaLnBrk="1" latinLnBrk="0" hangingPunct="1">
         <a:lnSpc>
           <a:spcPct val="90000"/>
         </a:lnSpc>
         <a:spcBef>
-          <a:spcPts val="500"/>
+          <a:spcPts val="827"/>
         </a:spcBef>
-        <a:spcAft>
-          <a:spcPts val="0"/>
-        </a:spcAft>
-        <a:buSzPct val="100000"/>
-        <a:buFont typeface="Arial" pitchFamily="34"/>
+        <a:buFont typeface="Arial" panose="020B0604020202020204" pitchFamily="34" charset="0"/>
         <a:buChar char="•"/>
-        <a:tabLst/>
-        <a:defRPr lang="de-DE" sz="1800" b="0" i="0" u="none" strike="noStrike" kern="1200" cap="none" spc="0" baseline="0">
+        <a:defRPr sz="3307" kern="1200">
           <a:solidFill>
-            <a:srgbClr val="000000"/>
+            <a:schemeClr val="tx1"/>
           </a:solidFill>
-          <a:uFillTx/>
-          <a:latin typeface="Aptos"/>
+          <a:latin typeface="+mn-lt"/>
+          <a:ea typeface="+mn-ea"/>
+          <a:cs typeface="+mn-cs"/>
         </a:defRPr>
-      </a:lvl4pPr>
-      <a:lvl5pPr marL="2057400" marR="0" lvl="4" indent="-228600" algn="l" defTabSz="914400" rtl="0" fontAlgn="auto" hangingPunct="1">
+      </a:lvl3pPr>
+      <a:lvl4pPr marL="2645931" indent="-377990" algn="l" defTabSz="1511960" rtl="0" eaLnBrk="1" latinLnBrk="0" hangingPunct="1">
         <a:lnSpc>
           <a:spcPct val="90000"/>
         </a:lnSpc>
         <a:spcBef>
-          <a:spcPts val="500"/>
+          <a:spcPts val="827"/>
         </a:spcBef>
-        <a:spcAft>
-          <a:spcPts val="0"/>
-        </a:spcAft>
-        <a:buSzPct val="100000"/>
-        <a:buFont typeface="Arial" pitchFamily="34"/>
+        <a:buFont typeface="Arial" panose="020B0604020202020204" pitchFamily="34" charset="0"/>
         <a:buChar char="•"/>
-        <a:tabLst/>
-        <a:defRPr lang="de-DE" sz="1800" b="0" i="0" u="none" strike="noStrike" kern="1200" cap="none" spc="0" baseline="0">
+        <a:defRPr sz="2976" kern="1200">
           <a:solidFill>
-            <a:srgbClr val="000000"/>
+            <a:schemeClr val="tx1"/>
           </a:solidFill>
-          <a:uFillTx/>
-          <a:latin typeface="Aptos"/>
+          <a:latin typeface="+mn-lt"/>
+          <a:ea typeface="+mn-ea"/>
+          <a:cs typeface="+mn-cs"/>
         </a:defRPr>
-      </a:lvl5pPr>
-      <a:lvl6pPr marL="2514600" indent="-228600" algn="l" defTabSz="914400" rtl="0" eaLnBrk="1" latinLnBrk="0" hangingPunct="1">
+      </a:lvl4pPr>
+      <a:lvl5pPr marL="3401911" indent="-377990" algn="l" defTabSz="1511960" rtl="0" eaLnBrk="1" latinLnBrk="0" hangingPunct="1">
         <a:lnSpc>
           <a:spcPct val="90000"/>
         </a:lnSpc>
         <a:spcBef>
-          <a:spcPts val="500"/>
+          <a:spcPts val="827"/>
         </a:spcBef>
         <a:buFont typeface="Arial" panose="020B0604020202020204" pitchFamily="34" charset="0"/>
         <a:buChar char="•"/>
-        <a:defRPr sz="1800" kern="1200">
+        <a:defRPr sz="2976" kern="1200">
+          <a:solidFill>
+            <a:schemeClr val="tx1"/>
+          </a:solidFill>
+          <a:latin typeface="+mn-lt"/>
+          <a:ea typeface="+mn-ea"/>
+          <a:cs typeface="+mn-cs"/>
+        </a:defRPr>
+      </a:lvl5pPr>
+      <a:lvl6pPr marL="4157891" indent="-377990" algn="l" defTabSz="1511960" rtl="0" eaLnBrk="1" latinLnBrk="0" hangingPunct="1">
+        <a:lnSpc>
+          <a:spcPct val="90000"/>
+        </a:lnSpc>
+        <a:spcBef>
+          <a:spcPts val="827"/>
+        </a:spcBef>
+        <a:buFont typeface="Arial" panose="020B0604020202020204" pitchFamily="34" charset="0"/>
+        <a:buChar char="•"/>
+        <a:defRPr sz="2976" kern="1200">
           <a:solidFill>
             <a:schemeClr val="tx1"/>
           </a:solidFill>
@@ -4152,16 +3713,16 @@
           <a:cs typeface="+mn-cs"/>
         </a:defRPr>
       </a:lvl6pPr>
-      <a:lvl7pPr marL="2971800" indent="-228600" algn="l" defTabSz="914400" rtl="0" eaLnBrk="1" latinLnBrk="0" hangingPunct="1">
+      <a:lvl7pPr marL="4913871" indent="-377990" algn="l" defTabSz="1511960" rtl="0" eaLnBrk="1" latinLnBrk="0" hangingPunct="1">
         <a:lnSpc>
           <a:spcPct val="90000"/>
         </a:lnSpc>
         <a:spcBef>
-          <a:spcPts val="500"/>
+          <a:spcPts val="827"/>
         </a:spcBef>
         <a:buFont typeface="Arial" panose="020B0604020202020204" pitchFamily="34" charset="0"/>
         <a:buChar char="•"/>
-        <a:defRPr sz="1800" kern="1200">
+        <a:defRPr sz="2976" kern="1200">
           <a:solidFill>
             <a:schemeClr val="tx1"/>
           </a:solidFill>
@@ -4170,16 +3731,16 @@
           <a:cs typeface="+mn-cs"/>
         </a:defRPr>
       </a:lvl7pPr>
-      <a:lvl8pPr marL="3429000" indent="-228600" algn="l" defTabSz="914400" rtl="0" eaLnBrk="1" latinLnBrk="0" hangingPunct="1">
+      <a:lvl8pPr marL="5669852" indent="-377990" algn="l" defTabSz="1511960" rtl="0" eaLnBrk="1" latinLnBrk="0" hangingPunct="1">
         <a:lnSpc>
           <a:spcPct val="90000"/>
         </a:lnSpc>
         <a:spcBef>
-          <a:spcPts val="500"/>
+          <a:spcPts val="827"/>
         </a:spcBef>
         <a:buFont typeface="Arial" panose="020B0604020202020204" pitchFamily="34" charset="0"/>
         <a:buChar char="•"/>
-        <a:defRPr sz="1800" kern="1200">
+        <a:defRPr sz="2976" kern="1200">
           <a:solidFill>
             <a:schemeClr val="tx1"/>
           </a:solidFill>
@@ -4188,16 +3749,16 @@
           <a:cs typeface="+mn-cs"/>
         </a:defRPr>
       </a:lvl8pPr>
-      <a:lvl9pPr marL="3886200" indent="-228600" algn="l" defTabSz="914400" rtl="0" eaLnBrk="1" latinLnBrk="0" hangingPunct="1">
+      <a:lvl9pPr marL="6425832" indent="-377990" algn="l" defTabSz="1511960" rtl="0" eaLnBrk="1" latinLnBrk="0" hangingPunct="1">
         <a:lnSpc>
           <a:spcPct val="90000"/>
         </a:lnSpc>
         <a:spcBef>
-          <a:spcPts val="500"/>
+          <a:spcPts val="827"/>
         </a:spcBef>
         <a:buFont typeface="Arial" panose="020B0604020202020204" pitchFamily="34" charset="0"/>
         <a:buChar char="•"/>
-        <a:defRPr sz="1800" kern="1200">
+        <a:defRPr sz="2976" kern="1200">
           <a:solidFill>
             <a:schemeClr val="tx1"/>
           </a:solidFill>
@@ -4211,8 +3772,8 @@
       <a:defPPr>
         <a:defRPr lang="en-US"/>
       </a:defPPr>
-      <a:lvl1pPr marL="0" algn="l" defTabSz="914400" rtl="0" eaLnBrk="1" latinLnBrk="0" hangingPunct="1">
-        <a:defRPr sz="1800" kern="1200">
+      <a:lvl1pPr marL="0" algn="l" defTabSz="1511960" rtl="0" eaLnBrk="1" latinLnBrk="0" hangingPunct="1">
+        <a:defRPr sz="2976" kern="1200">
           <a:solidFill>
             <a:schemeClr val="tx1"/>
           </a:solidFill>
@@ -4221,8 +3782,8 @@
           <a:cs typeface="+mn-cs"/>
         </a:defRPr>
       </a:lvl1pPr>
-      <a:lvl2pPr marL="457200" algn="l" defTabSz="914400" rtl="0" eaLnBrk="1" latinLnBrk="0" hangingPunct="1">
-        <a:defRPr sz="1800" kern="1200">
+      <a:lvl2pPr marL="755980" algn="l" defTabSz="1511960" rtl="0" eaLnBrk="1" latinLnBrk="0" hangingPunct="1">
+        <a:defRPr sz="2976" kern="1200">
           <a:solidFill>
             <a:schemeClr val="tx1"/>
           </a:solidFill>
@@ -4231,8 +3792,8 @@
           <a:cs typeface="+mn-cs"/>
         </a:defRPr>
       </a:lvl2pPr>
-      <a:lvl3pPr marL="914400" algn="l" defTabSz="914400" rtl="0" eaLnBrk="1" latinLnBrk="0" hangingPunct="1">
-        <a:defRPr sz="1800" kern="1200">
+      <a:lvl3pPr marL="1511960" algn="l" defTabSz="1511960" rtl="0" eaLnBrk="1" latinLnBrk="0" hangingPunct="1">
+        <a:defRPr sz="2976" kern="1200">
           <a:solidFill>
             <a:schemeClr val="tx1"/>
           </a:solidFill>
@@ -4241,8 +3802,8 @@
           <a:cs typeface="+mn-cs"/>
         </a:defRPr>
       </a:lvl3pPr>
-      <a:lvl4pPr marL="1371600" algn="l" defTabSz="914400" rtl="0" eaLnBrk="1" latinLnBrk="0" hangingPunct="1">
-        <a:defRPr sz="1800" kern="1200">
+      <a:lvl4pPr marL="2267941" algn="l" defTabSz="1511960" rtl="0" eaLnBrk="1" latinLnBrk="0" hangingPunct="1">
+        <a:defRPr sz="2976" kern="1200">
           <a:solidFill>
             <a:schemeClr val="tx1"/>
           </a:solidFill>
@@ -4251,8 +3812,8 @@
           <a:cs typeface="+mn-cs"/>
         </a:defRPr>
       </a:lvl4pPr>
-      <a:lvl5pPr marL="1828800" algn="l" defTabSz="914400" rtl="0" eaLnBrk="1" latinLnBrk="0" hangingPunct="1">
-        <a:defRPr sz="1800" kern="1200">
+      <a:lvl5pPr marL="3023921" algn="l" defTabSz="1511960" rtl="0" eaLnBrk="1" latinLnBrk="0" hangingPunct="1">
+        <a:defRPr sz="2976" kern="1200">
           <a:solidFill>
             <a:schemeClr val="tx1"/>
           </a:solidFill>
@@ -4261,8 +3822,8 @@
           <a:cs typeface="+mn-cs"/>
         </a:defRPr>
       </a:lvl5pPr>
-      <a:lvl6pPr marL="2286000" algn="l" defTabSz="914400" rtl="0" eaLnBrk="1" latinLnBrk="0" hangingPunct="1">
-        <a:defRPr sz="1800" kern="1200">
+      <a:lvl6pPr marL="3779901" algn="l" defTabSz="1511960" rtl="0" eaLnBrk="1" latinLnBrk="0" hangingPunct="1">
+        <a:defRPr sz="2976" kern="1200">
           <a:solidFill>
             <a:schemeClr val="tx1"/>
           </a:solidFill>
@@ -4271,8 +3832,8 @@
           <a:cs typeface="+mn-cs"/>
         </a:defRPr>
       </a:lvl6pPr>
-      <a:lvl7pPr marL="2743200" algn="l" defTabSz="914400" rtl="0" eaLnBrk="1" latinLnBrk="0" hangingPunct="1">
-        <a:defRPr sz="1800" kern="1200">
+      <a:lvl7pPr marL="4535881" algn="l" defTabSz="1511960" rtl="0" eaLnBrk="1" latinLnBrk="0" hangingPunct="1">
+        <a:defRPr sz="2976" kern="1200">
           <a:solidFill>
             <a:schemeClr val="tx1"/>
           </a:solidFill>
@@ -4281,8 +3842,8 @@
           <a:cs typeface="+mn-cs"/>
         </a:defRPr>
       </a:lvl7pPr>
-      <a:lvl8pPr marL="3200400" algn="l" defTabSz="914400" rtl="0" eaLnBrk="1" latinLnBrk="0" hangingPunct="1">
-        <a:defRPr sz="1800" kern="1200">
+      <a:lvl8pPr marL="5291861" algn="l" defTabSz="1511960" rtl="0" eaLnBrk="1" latinLnBrk="0" hangingPunct="1">
+        <a:defRPr sz="2976" kern="1200">
           <a:solidFill>
             <a:schemeClr val="tx1"/>
           </a:solidFill>
@@ -4291,8 +3852,8 @@
           <a:cs typeface="+mn-cs"/>
         </a:defRPr>
       </a:lvl8pPr>
-      <a:lvl9pPr marL="3657600" algn="l" defTabSz="914400" rtl="0" eaLnBrk="1" latinLnBrk="0" hangingPunct="1">
-        <a:defRPr sz="1800" kern="1200">
+      <a:lvl9pPr marL="6047842" algn="l" defTabSz="1511960" rtl="0" eaLnBrk="1" latinLnBrk="0" hangingPunct="1">
+        <a:defRPr sz="2976" kern="1200">
           <a:solidFill>
             <a:schemeClr val="tx1"/>
           </a:solidFill>
@@ -4325,7 +3886,7 @@
       </p:grpSpPr>
       <p:grpSp>
         <p:nvGrpSpPr>
-          <p:cNvPr id="32" name="Gruppieren 31">
+          <p:cNvPr id="33" name="Gruppieren 31">
             <a:extLst>
               <a:ext uri="{FF2B5EF4-FFF2-40B4-BE49-F238E27FC236}">
                 <a16:creationId xmlns:a16="http://schemas.microsoft.com/office/drawing/2014/main" id="{AB726C4F-73ED-8D1E-D2ED-FEBDFF393DAF}"/>
@@ -4337,15 +3898,15 @@
         </p:nvGrpSpPr>
         <p:grpSpPr>
           <a:xfrm>
-            <a:off x="108049" y="104316"/>
-            <a:ext cx="9864527" cy="5461918"/>
+            <a:off x="108049" y="252536"/>
+            <a:ext cx="19894451" cy="11015415"/>
             <a:chOff x="390723" y="669148"/>
             <a:chExt cx="7610806" cy="4214049"/>
           </a:xfrm>
         </p:grpSpPr>
         <p:pic>
           <p:nvPicPr>
-            <p:cNvPr id="2" name="Grafik 4" descr="Ein Bild, das Text, Karte, Screenshot enthält.&#10;&#10;KI-generierte Inhalte können fehlerhaft sein.">
+            <p:cNvPr id="34" name="Grafik 4" descr="Ein Bild, das Text, Karte, Screenshot enthält.&#10;&#10;KI-generierte Inhalte können fehlerhaft sein.">
               <a:extLst>
                 <a:ext uri="{FF2B5EF4-FFF2-40B4-BE49-F238E27FC236}">
                   <a16:creationId xmlns:a16="http://schemas.microsoft.com/office/drawing/2014/main" id="{0DAA3934-7BC4-FFD8-06D7-CF8D3D4327CA}"/>
@@ -4384,7 +3945,7 @@
         </p:pic>
         <p:pic>
           <p:nvPicPr>
-            <p:cNvPr id="3" name="Grafik 7" descr="Ein Bild, das Text, Karte, Screenshot enthält.&#10;&#10;KI-generierte Inhalte können fehlerhaft sein.">
+            <p:cNvPr id="35" name="Grafik 7" descr="Ein Bild, das Text, Karte, Screenshot enthält.&#10;&#10;KI-generierte Inhalte können fehlerhaft sein.">
               <a:extLst>
                 <a:ext uri="{FF2B5EF4-FFF2-40B4-BE49-F238E27FC236}">
                   <a16:creationId xmlns:a16="http://schemas.microsoft.com/office/drawing/2014/main" id="{39468820-B74B-2F0B-E677-F511A00388BB}"/>
@@ -4423,7 +3984,7 @@
         </p:pic>
         <p:pic>
           <p:nvPicPr>
-            <p:cNvPr id="4" name="Grafik 8" descr="Ein Bild, das Text, Karte, Screenshot enthält.&#10;&#10;KI-generierte Inhalte können fehlerhaft sein.">
+            <p:cNvPr id="36" name="Grafik 8" descr="Ein Bild, das Text, Karte, Screenshot enthält.&#10;&#10;KI-generierte Inhalte können fehlerhaft sein.">
               <a:extLst>
                 <a:ext uri="{FF2B5EF4-FFF2-40B4-BE49-F238E27FC236}">
                   <a16:creationId xmlns:a16="http://schemas.microsoft.com/office/drawing/2014/main" id="{CCC1C057-A957-4B28-F900-0CF1AAFC05B0}"/>
@@ -4462,7 +4023,7 @@
         </p:pic>
         <p:pic>
           <p:nvPicPr>
-            <p:cNvPr id="5" name="Grafik 9" descr="Ein Bild, das Text, Karte, Screenshot enthält.&#10;&#10;KI-generierte Inhalte können fehlerhaft sein.">
+            <p:cNvPr id="37" name="Grafik 9" descr="Ein Bild, das Text, Karte, Screenshot enthält.&#10;&#10;KI-generierte Inhalte können fehlerhaft sein.">
               <a:extLst>
                 <a:ext uri="{FF2B5EF4-FFF2-40B4-BE49-F238E27FC236}">
                   <a16:creationId xmlns:a16="http://schemas.microsoft.com/office/drawing/2014/main" id="{0DA8D5C1-6CD0-2DDF-B5E1-CEA5726495A0}"/>
@@ -4501,7 +4062,7 @@
         </p:pic>
         <p:sp>
           <p:nvSpPr>
-            <p:cNvPr id="6" name="Rechteck 10">
+            <p:cNvPr id="38" name="Rechteck 10">
               <a:extLst>
                 <a:ext uri="{FF2B5EF4-FFF2-40B4-BE49-F238E27FC236}">
                   <a16:creationId xmlns:a16="http://schemas.microsoft.com/office/drawing/2014/main" id="{7B1792A4-3F54-C3CA-A54E-605437C1149B}"/>
@@ -4556,7 +4117,7 @@
                 </a:defRPr>
               </a:pPr>
               <a:r>
-                <a:rPr lang="de-CH" sz="800" b="0" i="0" u="none" strike="noStrike" kern="1200" cap="none" spc="0" baseline="0" dirty="0" err="1">
+                <a:rPr lang="de-CH" b="0" i="0" u="none" strike="noStrike" kern="1200" cap="none" spc="0" baseline="0" dirty="0" err="1">
                   <a:solidFill>
                     <a:srgbClr val="000000"/>
                   </a:solidFill>
@@ -4567,7 +4128,7 @@
                 <a:t>Simplistic</a:t>
               </a:r>
               <a:r>
-                <a:rPr lang="de-CH" sz="800" b="0" i="0" u="none" strike="noStrike" kern="1200" cap="none" spc="0" baseline="0" dirty="0">
+                <a:rPr lang="de-CH" b="0" i="0" u="none" strike="noStrike" kern="1200" cap="none" spc="0" baseline="0" dirty="0">
                   <a:solidFill>
                     <a:srgbClr val="000000"/>
                   </a:solidFill>
@@ -4577,7 +4138,7 @@
                 </a:rPr>
                 <a:t> Model</a:t>
               </a:r>
-              <a:endParaRPr lang="en-US" sz="900" b="0" i="0" u="none" strike="noStrike" kern="1200" cap="none" spc="0" baseline="0" dirty="0">
+              <a:endParaRPr lang="en-US" sz="2000" b="0" i="0" u="none" strike="noStrike" kern="1200" cap="none" spc="0" baseline="0" dirty="0">
                 <a:solidFill>
                   <a:srgbClr val="000000"/>
                 </a:solidFill>
@@ -4590,7 +4151,7 @@
         </p:sp>
         <p:sp>
           <p:nvSpPr>
-            <p:cNvPr id="7" name="Rechteck 11">
+            <p:cNvPr id="39" name="Rechteck 11">
               <a:extLst>
                 <a:ext uri="{FF2B5EF4-FFF2-40B4-BE49-F238E27FC236}">
                   <a16:creationId xmlns:a16="http://schemas.microsoft.com/office/drawing/2014/main" id="{421CFB58-1644-3B94-A5BE-D227F6927D06}"/>
@@ -4645,7 +4206,7 @@
                 </a:defRPr>
               </a:pPr>
               <a:r>
-                <a:rPr lang="de-CH" sz="800" b="0" i="0" u="none" strike="noStrike" kern="1200" cap="none" spc="0" baseline="0" dirty="0" err="1">
+                <a:rPr lang="de-CH" b="0" i="0" u="none" strike="noStrike" kern="1200" cap="none" spc="0" baseline="0" dirty="0" err="1">
                   <a:solidFill>
                     <a:srgbClr val="000000"/>
                   </a:solidFill>
@@ -4656,7 +4217,7 @@
                 <a:t>Realistic</a:t>
               </a:r>
               <a:r>
-                <a:rPr lang="de-CH" sz="800" b="0" i="0" u="none" strike="noStrike" kern="1200" cap="none" spc="0" baseline="0" dirty="0">
+                <a:rPr lang="de-CH" b="0" i="0" u="none" strike="noStrike" kern="1200" cap="none" spc="0" baseline="0" dirty="0">
                   <a:solidFill>
                     <a:srgbClr val="000000"/>
                   </a:solidFill>
@@ -4666,7 +4227,7 @@
                 </a:rPr>
                 <a:t> Model</a:t>
               </a:r>
-              <a:endParaRPr lang="en-US" sz="900" b="0" i="0" u="none" strike="noStrike" kern="1200" cap="none" spc="0" baseline="0" dirty="0">
+              <a:endParaRPr lang="en-US" sz="2000" b="0" i="0" u="none" strike="noStrike" kern="1200" cap="none" spc="0" baseline="0" dirty="0">
                 <a:solidFill>
                   <a:srgbClr val="000000"/>
                 </a:solidFill>
@@ -4679,7 +4240,7 @@
         </p:sp>
         <p:sp>
           <p:nvSpPr>
-            <p:cNvPr id="8" name="Rechteck 12">
+            <p:cNvPr id="40" name="Rechteck 12">
               <a:extLst>
                 <a:ext uri="{FF2B5EF4-FFF2-40B4-BE49-F238E27FC236}">
                   <a16:creationId xmlns:a16="http://schemas.microsoft.com/office/drawing/2014/main" id="{FCF4C45E-E450-B33C-15DB-E10CA1528BF1}"/>
@@ -4734,7 +4295,7 @@
                 </a:defRPr>
               </a:pPr>
               <a:r>
-                <a:rPr lang="de-CH" sz="800" b="0" i="0" u="none" strike="noStrike" kern="1200" cap="none" spc="0" baseline="0">
+                <a:rPr lang="de-CH" b="0" i="0" u="none" strike="noStrike" kern="1200" cap="none" spc="0" baseline="0">
                   <a:solidFill>
                     <a:srgbClr val="000000"/>
                   </a:solidFill>
@@ -4744,7 +4305,7 @@
                 </a:rPr>
                 <a:t>SSS</a:t>
               </a:r>
-              <a:endParaRPr lang="en-US" sz="900" b="0" i="0" u="none" strike="noStrike" kern="1200" cap="none" spc="0" baseline="0">
+              <a:endParaRPr lang="en-US" sz="2000" b="0" i="0" u="none" strike="noStrike" kern="1200" cap="none" spc="0" baseline="0">
                 <a:solidFill>
                   <a:srgbClr val="000000"/>
                 </a:solidFill>
@@ -4757,7 +4318,7 @@
         </p:sp>
         <p:sp>
           <p:nvSpPr>
-            <p:cNvPr id="9" name="Rechteck 13">
+            <p:cNvPr id="41" name="Rechteck 13">
               <a:extLst>
                 <a:ext uri="{FF2B5EF4-FFF2-40B4-BE49-F238E27FC236}">
                   <a16:creationId xmlns:a16="http://schemas.microsoft.com/office/drawing/2014/main" id="{C5EC4A6C-72F8-8F74-C3DC-C60C86AE8CA9}"/>
@@ -4812,7 +4373,7 @@
                 </a:defRPr>
               </a:pPr>
               <a:r>
-                <a:rPr lang="de-CH" sz="800" b="0" i="0" u="none" strike="noStrike" kern="1200" cap="none" spc="0" baseline="0">
+                <a:rPr lang="de-CH" b="0" i="0" u="none" strike="noStrike" kern="1200" cap="none" spc="0" baseline="0">
                   <a:solidFill>
                     <a:srgbClr val="000000"/>
                   </a:solidFill>
@@ -4822,7 +4383,7 @@
                 </a:rPr>
                 <a:t>DMD</a:t>
               </a:r>
-              <a:endParaRPr lang="en-US" sz="900" b="0" i="0" u="none" strike="noStrike" kern="1200" cap="none" spc="0" baseline="0">
+              <a:endParaRPr lang="en-US" sz="2000" b="0" i="0" u="none" strike="noStrike" kern="1200" cap="none" spc="0" baseline="0">
                 <a:solidFill>
                   <a:srgbClr val="000000"/>
                 </a:solidFill>
@@ -4835,7 +4396,7 @@
         </p:sp>
         <p:pic>
           <p:nvPicPr>
-            <p:cNvPr id="10" name="Grafik 18" descr="Ein Bild, das Karte, Text, Screenshot enthält.&#10;&#10;KI-generierte Inhalte können fehlerhaft sein.">
+            <p:cNvPr id="42" name="Grafik 18" descr="Ein Bild, das Karte, Text, Screenshot enthält.&#10;&#10;KI-generierte Inhalte können fehlerhaft sein.">
               <a:extLst>
                 <a:ext uri="{FF2B5EF4-FFF2-40B4-BE49-F238E27FC236}">
                   <a16:creationId xmlns:a16="http://schemas.microsoft.com/office/drawing/2014/main" id="{9C122F58-48F0-78CB-77A0-821F4482440C}"/>
@@ -4874,7 +4435,7 @@
         </p:pic>
         <p:pic>
           <p:nvPicPr>
-            <p:cNvPr id="11" name="Grafik 18" descr="Ein Bild, das Karte, Text, Screenshot enthält.&#10;&#10;KI-generierte Inhalte können fehlerhaft sein.">
+            <p:cNvPr id="43" name="Grafik 18" descr="Ein Bild, das Karte, Text, Screenshot enthält.&#10;&#10;KI-generierte Inhalte können fehlerhaft sein.">
               <a:extLst>
                 <a:ext uri="{FF2B5EF4-FFF2-40B4-BE49-F238E27FC236}">
                   <a16:creationId xmlns:a16="http://schemas.microsoft.com/office/drawing/2014/main" id="{82E4642D-A139-06DE-5008-1311FE34988B}"/>
@@ -4913,7 +4474,7 @@
         </p:pic>
         <p:pic>
           <p:nvPicPr>
-            <p:cNvPr id="12" name="Grafik 18" descr="Ein Bild, das Karte, Text, Screenshot enthält.&#10;&#10;KI-generierte Inhalte können fehlerhaft sein.">
+            <p:cNvPr id="44" name="Grafik 18" descr="Ein Bild, das Karte, Text, Screenshot enthält.&#10;&#10;KI-generierte Inhalte können fehlerhaft sein.">
               <a:extLst>
                 <a:ext uri="{FF2B5EF4-FFF2-40B4-BE49-F238E27FC236}">
                   <a16:creationId xmlns:a16="http://schemas.microsoft.com/office/drawing/2014/main" id="{BE0C5B7B-6251-6C3F-28FE-5C9CB5504EBC}"/>
@@ -4952,7 +4513,7 @@
         </p:pic>
         <p:pic>
           <p:nvPicPr>
-            <p:cNvPr id="13" name="Grafik 18" descr="Ein Bild, das Karte, Text, Screenshot enthält.&#10;&#10;KI-generierte Inhalte können fehlerhaft sein.">
+            <p:cNvPr id="45" name="Grafik 18" descr="Ein Bild, das Karte, Text, Screenshot enthält.&#10;&#10;KI-generierte Inhalte können fehlerhaft sein.">
               <a:extLst>
                 <a:ext uri="{FF2B5EF4-FFF2-40B4-BE49-F238E27FC236}">
                   <a16:creationId xmlns:a16="http://schemas.microsoft.com/office/drawing/2014/main" id="{965D402F-11B2-0F80-F8C0-B3E703247618}"/>
@@ -4991,7 +4552,7 @@
         </p:pic>
         <p:pic>
           <p:nvPicPr>
-            <p:cNvPr id="14" name="Grafik 17" descr="Ein Bild, das Text, Screenshot, Schrift, Farbigkeit enthält.&#10;&#10;KI-generierte Inhalte können fehlerhaft sein.">
+            <p:cNvPr id="46" name="Grafik 17" descr="Ein Bild, das Text, Screenshot, Schrift, Farbigkeit enthält.&#10;&#10;KI-generierte Inhalte können fehlerhaft sein.">
               <a:extLst>
                 <a:ext uri="{FF2B5EF4-FFF2-40B4-BE49-F238E27FC236}">
                   <a16:creationId xmlns:a16="http://schemas.microsoft.com/office/drawing/2014/main" id="{92306498-3474-3ECC-A861-5D9BEF6F55EB}"/>
@@ -5025,7 +4586,7 @@
         </p:pic>
         <p:sp>
           <p:nvSpPr>
-            <p:cNvPr id="15" name="Rechteck 18">
+            <p:cNvPr id="47" name="Rechteck 18">
               <a:extLst>
                 <a:ext uri="{FF2B5EF4-FFF2-40B4-BE49-F238E27FC236}">
                   <a16:creationId xmlns:a16="http://schemas.microsoft.com/office/drawing/2014/main" id="{96608F2B-A83D-2EE3-269F-E54BAF7BB152}"/>
@@ -5074,7 +4635,7 @@
                   <a:uFillTx/>
                 </a:defRPr>
               </a:pPr>
-              <a:endParaRPr lang="en-US" sz="2400" b="0" i="0" u="none" strike="noStrike" kern="1200" cap="none" spc="0" baseline="0">
+              <a:endParaRPr lang="en-US" sz="6000" b="0" i="0" u="none" strike="noStrike" kern="1200" cap="none" spc="0" baseline="0">
                 <a:solidFill>
                   <a:srgbClr val="FFFFFF"/>
                 </a:solidFill>
@@ -5086,7 +4647,7 @@
         </p:sp>
         <p:sp>
           <p:nvSpPr>
-            <p:cNvPr id="16" name="Rechteck 11">
+            <p:cNvPr id="48" name="Rechteck 11">
               <a:extLst>
                 <a:ext uri="{FF2B5EF4-FFF2-40B4-BE49-F238E27FC236}">
                   <a16:creationId xmlns:a16="http://schemas.microsoft.com/office/drawing/2014/main" id="{12492600-5037-6EFC-1D36-268E31772FF2}"/>
@@ -5141,7 +4702,7 @@
                 </a:defRPr>
               </a:pPr>
               <a:r>
-                <a:rPr lang="de-CH" sz="800" b="0" i="0" u="none" strike="noStrike" kern="1200" cap="none" spc="0" baseline="0">
+                <a:rPr lang="de-CH" b="0" i="0" u="none" strike="noStrike" kern="1200" cap="none" spc="0" baseline="0">
                   <a:solidFill>
                     <a:srgbClr val="000000"/>
                   </a:solidFill>
@@ -5151,7 +4712,7 @@
                 </a:rPr>
                 <a:t>|Realistic – Simplistic|</a:t>
               </a:r>
-              <a:endParaRPr lang="en-US" sz="900" b="0" i="0" u="none" strike="noStrike" kern="1200" cap="none" spc="0" baseline="0">
+              <a:endParaRPr lang="en-US" sz="2000" b="0" i="0" u="none" strike="noStrike" kern="1200" cap="none" spc="0" baseline="0">
                 <a:solidFill>
                   <a:srgbClr val="000000"/>
                 </a:solidFill>
@@ -5164,7 +4725,7 @@
         </p:sp>
         <p:sp>
           <p:nvSpPr>
-            <p:cNvPr id="17" name="Rechteck 13">
+            <p:cNvPr id="49" name="Rechteck 13">
               <a:extLst>
                 <a:ext uri="{FF2B5EF4-FFF2-40B4-BE49-F238E27FC236}">
                   <a16:creationId xmlns:a16="http://schemas.microsoft.com/office/drawing/2014/main" id="{76A83435-B950-ECB7-D4CE-15BDFACBA7F5}"/>
@@ -5219,7 +4780,7 @@
                 </a:defRPr>
               </a:pPr>
               <a:r>
-                <a:rPr lang="de-CH" sz="900" b="0" i="0" u="none" strike="noStrike" kern="1200" cap="none" spc="0" baseline="0">
+                <a:rPr lang="de-CH" sz="2000" b="0" i="0" u="none" strike="noStrike" kern="1200" cap="none" spc="0" baseline="0">
                   <a:solidFill>
                     <a:srgbClr val="000000"/>
                   </a:solidFill>
@@ -5229,7 +4790,7 @@
                 </a:rPr>
                 <a:t>|DMD-SSS|</a:t>
               </a:r>
-              <a:endParaRPr lang="en-US" sz="900" b="0" i="0" u="none" strike="noStrike" kern="1200" cap="none" spc="0" baseline="0">
+              <a:endParaRPr lang="en-US" sz="2000" b="0" i="0" u="none" strike="noStrike" kern="1200" cap="none" spc="0" baseline="0">
                 <a:solidFill>
                   <a:srgbClr val="000000"/>
                 </a:solidFill>
@@ -5242,7 +4803,7 @@
         </p:sp>
         <p:sp>
           <p:nvSpPr>
-            <p:cNvPr id="18" name="Textfeld 22">
+            <p:cNvPr id="50" name="Textfeld 22">
               <a:extLst>
                 <a:ext uri="{FF2B5EF4-FFF2-40B4-BE49-F238E27FC236}">
                   <a16:creationId xmlns:a16="http://schemas.microsoft.com/office/drawing/2014/main" id="{28EFC223-F540-8942-2C3D-33916027BEF8}"/>
@@ -5255,7 +4816,7 @@
           <p:spPr>
             <a:xfrm>
               <a:off x="547515" y="825931"/>
-              <a:ext cx="355930" cy="161088"/>
+              <a:ext cx="355930" cy="136317"/>
             </a:xfrm>
             <a:prstGeom prst="rect">
               <a:avLst/>
@@ -5292,7 +4853,7 @@
                 </a:defRPr>
               </a:pPr>
               <a:r>
-                <a:rPr lang="de-CH" sz="800" b="1" i="0" u="none" strike="noStrike" kern="1200" cap="none" spc="0" baseline="0">
+                <a:rPr lang="de-CH" b="1" i="0" u="none" strike="noStrike" kern="1200" cap="none" spc="0" baseline="0">
                   <a:solidFill>
                     <a:srgbClr val="FFFFFF"/>
                   </a:solidFill>
@@ -5308,7 +4869,7 @@
         </p:sp>
         <p:sp>
           <p:nvSpPr>
-            <p:cNvPr id="19" name="Textfeld 23">
+            <p:cNvPr id="51" name="Textfeld 23">
               <a:extLst>
                 <a:ext uri="{FF2B5EF4-FFF2-40B4-BE49-F238E27FC236}">
                   <a16:creationId xmlns:a16="http://schemas.microsoft.com/office/drawing/2014/main" id="{19B156A3-C1C1-D733-3DA1-AA188BF7114B}"/>
@@ -5321,7 +4882,7 @@
           <p:spPr>
             <a:xfrm>
               <a:off x="2905231" y="825931"/>
-              <a:ext cx="355930" cy="161088"/>
+              <a:ext cx="355930" cy="136317"/>
             </a:xfrm>
             <a:prstGeom prst="rect">
               <a:avLst/>
@@ -5358,7 +4919,7 @@
                 </a:defRPr>
               </a:pPr>
               <a:r>
-                <a:rPr lang="de-CH" sz="800" b="1" i="0" u="none" strike="noStrike" kern="0" cap="none" spc="0" baseline="0">
+                <a:rPr lang="de-CH" b="1" i="0" u="none" strike="noStrike" kern="0" cap="none" spc="0" baseline="0">
                   <a:solidFill>
                     <a:srgbClr val="FFFFFF"/>
                   </a:solidFill>
@@ -5369,7 +4930,7 @@
                 </a:rPr>
                 <a:t>b</a:t>
               </a:r>
-              <a:endParaRPr lang="de-CH" sz="800" b="1" i="0" u="none" strike="noStrike" kern="1200" cap="none" spc="0" baseline="0">
+              <a:endParaRPr lang="de-CH" b="1" i="0" u="none" strike="noStrike" kern="1200" cap="none" spc="0" baseline="0">
                 <a:solidFill>
                   <a:srgbClr val="FFFFFF"/>
                 </a:solidFill>
@@ -5383,7 +4944,7 @@
         </p:sp>
         <p:sp>
           <p:nvSpPr>
-            <p:cNvPr id="20" name="Textfeld 24">
+            <p:cNvPr id="52" name="Textfeld 24">
               <a:extLst>
                 <a:ext uri="{FF2B5EF4-FFF2-40B4-BE49-F238E27FC236}">
                   <a16:creationId xmlns:a16="http://schemas.microsoft.com/office/drawing/2014/main" id="{35A44D69-9F88-46E1-E985-FB19969B4A30}"/>
@@ -5396,7 +4957,7 @@
           <p:spPr>
             <a:xfrm>
               <a:off x="547515" y="2091552"/>
-              <a:ext cx="355930" cy="161088"/>
+              <a:ext cx="355930" cy="136317"/>
             </a:xfrm>
             <a:prstGeom prst="rect">
               <a:avLst/>
@@ -5433,7 +4994,7 @@
                 </a:defRPr>
               </a:pPr>
               <a:r>
-                <a:rPr lang="de-CH" sz="800" b="1" i="0" u="none" strike="noStrike" kern="0" cap="none" spc="0" baseline="0">
+                <a:rPr lang="de-CH" b="1" i="0" u="none" strike="noStrike" kern="0" cap="none" spc="0" baseline="0">
                   <a:solidFill>
                     <a:srgbClr val="FFFFFF"/>
                   </a:solidFill>
@@ -5444,7 +5005,7 @@
                 </a:rPr>
                 <a:t>c</a:t>
               </a:r>
-              <a:endParaRPr lang="de-CH" sz="800" b="1" i="0" u="none" strike="noStrike" kern="1200" cap="none" spc="0" baseline="0">
+              <a:endParaRPr lang="de-CH" b="1" i="0" u="none" strike="noStrike" kern="1200" cap="none" spc="0" baseline="0">
                 <a:solidFill>
                   <a:srgbClr val="FFFFFF"/>
                 </a:solidFill>
@@ -5458,7 +5019,7 @@
         </p:sp>
         <p:sp>
           <p:nvSpPr>
-            <p:cNvPr id="21" name="Textfeld 25">
+            <p:cNvPr id="53" name="Textfeld 25">
               <a:extLst>
                 <a:ext uri="{FF2B5EF4-FFF2-40B4-BE49-F238E27FC236}">
                   <a16:creationId xmlns:a16="http://schemas.microsoft.com/office/drawing/2014/main" id="{45568C9B-990B-815D-D2B7-957F8D58F5CB}"/>
@@ -5471,7 +5032,7 @@
           <p:spPr>
             <a:xfrm>
               <a:off x="2905231" y="2091552"/>
-              <a:ext cx="355930" cy="161088"/>
+              <a:ext cx="355930" cy="136317"/>
             </a:xfrm>
             <a:prstGeom prst="rect">
               <a:avLst/>
@@ -5508,7 +5069,7 @@
                 </a:defRPr>
               </a:pPr>
               <a:r>
-                <a:rPr lang="de-CH" sz="800" b="1" i="0" u="none" strike="noStrike" kern="0" cap="none" spc="0" baseline="0">
+                <a:rPr lang="de-CH" b="1" i="0" u="none" strike="noStrike" kern="0" cap="none" spc="0" baseline="0">
                   <a:solidFill>
                     <a:srgbClr val="FFFFFF"/>
                   </a:solidFill>
@@ -5519,7 +5080,7 @@
                 </a:rPr>
                 <a:t>d</a:t>
               </a:r>
-              <a:endParaRPr lang="de-CH" sz="800" b="1" i="0" u="none" strike="noStrike" kern="1200" cap="none" spc="0" baseline="0">
+              <a:endParaRPr lang="de-CH" b="1" i="0" u="none" strike="noStrike" kern="1200" cap="none" spc="0" baseline="0">
                 <a:solidFill>
                   <a:srgbClr val="FFFFFF"/>
                 </a:solidFill>
@@ -5533,7 +5094,7 @@
         </p:sp>
         <p:sp>
           <p:nvSpPr>
-            <p:cNvPr id="22" name="Textfeld 26">
+            <p:cNvPr id="54" name="Textfeld 26">
               <a:extLst>
                 <a:ext uri="{FF2B5EF4-FFF2-40B4-BE49-F238E27FC236}">
                   <a16:creationId xmlns:a16="http://schemas.microsoft.com/office/drawing/2014/main" id="{2687B7B7-C618-BF97-59A4-F569E116019C}"/>
@@ -5546,7 +5107,7 @@
           <p:spPr>
             <a:xfrm>
               <a:off x="5404286" y="825931"/>
-              <a:ext cx="355930" cy="161088"/>
+              <a:ext cx="355930" cy="136317"/>
             </a:xfrm>
             <a:prstGeom prst="rect">
               <a:avLst/>
@@ -5583,7 +5144,7 @@
                 </a:defRPr>
               </a:pPr>
               <a:r>
-                <a:rPr lang="de-CH" sz="800" b="1" i="0" u="none" strike="noStrike" kern="1200" cap="none" spc="0" baseline="0">
+                <a:rPr lang="de-CH" b="1" i="0" u="none" strike="noStrike" kern="1200" cap="none" spc="0" baseline="0">
                   <a:solidFill>
                     <a:srgbClr val="FFFFFF"/>
                   </a:solidFill>
@@ -5599,7 +5160,7 @@
         </p:sp>
         <p:sp>
           <p:nvSpPr>
-            <p:cNvPr id="23" name="Textfeld 27">
+            <p:cNvPr id="55" name="Textfeld 27">
               <a:extLst>
                 <a:ext uri="{FF2B5EF4-FFF2-40B4-BE49-F238E27FC236}">
                   <a16:creationId xmlns:a16="http://schemas.microsoft.com/office/drawing/2014/main" id="{DBE64219-12F5-06BE-6B7E-981AFFD24D8D}"/>
@@ -5612,7 +5173,7 @@
           <p:spPr>
             <a:xfrm>
               <a:off x="5404286" y="2091552"/>
-              <a:ext cx="355930" cy="161088"/>
+              <a:ext cx="355930" cy="136317"/>
             </a:xfrm>
             <a:prstGeom prst="rect">
               <a:avLst/>
@@ -5649,7 +5210,7 @@
                 </a:defRPr>
               </a:pPr>
               <a:r>
-                <a:rPr lang="de-CH" sz="800" b="1" i="0" u="none" strike="noStrike" kern="0" cap="none" spc="0" baseline="0">
+                <a:rPr lang="de-CH" b="1" i="0" u="none" strike="noStrike" kern="0" cap="none" spc="0" baseline="0">
                   <a:solidFill>
                     <a:srgbClr val="FFFFFF"/>
                   </a:solidFill>
@@ -5660,7 +5221,7 @@
                 </a:rPr>
                 <a:t>|d-c|</a:t>
               </a:r>
-              <a:endParaRPr lang="de-CH" sz="800" b="1" i="0" u="none" strike="noStrike" kern="1200" cap="none" spc="0" baseline="0">
+              <a:endParaRPr lang="de-CH" b="1" i="0" u="none" strike="noStrike" kern="1200" cap="none" spc="0" baseline="0">
                 <a:solidFill>
                   <a:srgbClr val="FFFFFF"/>
                 </a:solidFill>
@@ -5674,7 +5235,7 @@
         </p:sp>
         <p:sp>
           <p:nvSpPr>
-            <p:cNvPr id="24" name="Textfeld 28">
+            <p:cNvPr id="56" name="Textfeld 28">
               <a:extLst>
                 <a:ext uri="{FF2B5EF4-FFF2-40B4-BE49-F238E27FC236}">
                   <a16:creationId xmlns:a16="http://schemas.microsoft.com/office/drawing/2014/main" id="{AE057E25-BF88-284C-A7F2-11FE661C169A}"/>
@@ -5687,7 +5248,7 @@
           <p:spPr>
             <a:xfrm>
               <a:off x="547515" y="3502883"/>
-              <a:ext cx="355930" cy="161088"/>
+              <a:ext cx="355930" cy="136317"/>
             </a:xfrm>
             <a:prstGeom prst="rect">
               <a:avLst/>
@@ -5724,7 +5285,7 @@
                 </a:defRPr>
               </a:pPr>
               <a:r>
-                <a:rPr lang="de-CH" sz="800" b="1" i="0" u="none" strike="noStrike" kern="1200" cap="none" spc="0" baseline="0">
+                <a:rPr lang="de-CH" b="1" i="0" u="none" strike="noStrike" kern="1200" cap="none" spc="0" baseline="0">
                   <a:solidFill>
                     <a:srgbClr val="FFFFFF"/>
                   </a:solidFill>
@@ -5740,7 +5301,7 @@
         </p:sp>
         <p:sp>
           <p:nvSpPr>
-            <p:cNvPr id="25" name="Textfeld 29">
+            <p:cNvPr id="57" name="Textfeld 29">
               <a:extLst>
                 <a:ext uri="{FF2B5EF4-FFF2-40B4-BE49-F238E27FC236}">
                   <a16:creationId xmlns:a16="http://schemas.microsoft.com/office/drawing/2014/main" id="{15927960-DC25-59F0-B2D7-5D821CD8C25B}"/>
@@ -5753,7 +5314,7 @@
           <p:spPr>
             <a:xfrm>
               <a:off x="2905231" y="3502883"/>
-              <a:ext cx="355930" cy="161088"/>
+              <a:ext cx="355930" cy="136317"/>
             </a:xfrm>
             <a:prstGeom prst="rect">
               <a:avLst/>
@@ -5790,7 +5351,7 @@
                 </a:defRPr>
               </a:pPr>
               <a:r>
-                <a:rPr lang="de-CH" sz="800" b="1" i="0" u="none" strike="noStrike" kern="1200" cap="none" spc="0" baseline="0">
+                <a:rPr lang="de-CH" b="1" i="0" u="none" strike="noStrike" kern="1200" cap="none" spc="0" baseline="0">
                   <a:solidFill>
                     <a:srgbClr val="FFFFFF"/>
                   </a:solidFill>
@@ -5806,7 +5367,7 @@
         </p:sp>
         <p:pic>
           <p:nvPicPr>
-            <p:cNvPr id="26" name="Grafik 18" descr="Ein Bild, das Karte, Text, Screenshot enthält.&#10;&#10;KI-generierte Inhalte können fehlerhaft sein.">
+            <p:cNvPr id="58" name="Grafik 18" descr="Ein Bild, das Karte, Text, Screenshot enthält.&#10;&#10;KI-generierte Inhalte können fehlerhaft sein.">
               <a:extLst>
                 <a:ext uri="{FF2B5EF4-FFF2-40B4-BE49-F238E27FC236}">
                   <a16:creationId xmlns:a16="http://schemas.microsoft.com/office/drawing/2014/main" id="{9F9B0877-61FF-93E1-E9C4-AE77F68739CD}"/>
@@ -5841,7 +5402,7 @@
         </p:pic>
         <p:pic>
           <p:nvPicPr>
-            <p:cNvPr id="27" name="Grafik 18" descr="Ein Bild, das Karte, Text, Screenshot enthält.&#10;&#10;KI-generierte Inhalte können fehlerhaft sein.">
+            <p:cNvPr id="59" name="Grafik 18" descr="Ein Bild, das Karte, Text, Screenshot enthält.&#10;&#10;KI-generierte Inhalte können fehlerhaft sein.">
               <a:extLst>
                 <a:ext uri="{FF2B5EF4-FFF2-40B4-BE49-F238E27FC236}">
                   <a16:creationId xmlns:a16="http://schemas.microsoft.com/office/drawing/2014/main" id="{BC3D095A-1F39-1941-A88A-9DA45549C29B}"/>
@@ -5876,7 +5437,7 @@
         </p:pic>
         <p:pic>
           <p:nvPicPr>
-            <p:cNvPr id="28" name="Grafik 18" descr="Ein Bild, das Karte, Text, Screenshot enthält.&#10;&#10;KI-generierte Inhalte können fehlerhaft sein.">
+            <p:cNvPr id="60" name="Grafik 18" descr="Ein Bild, das Karte, Text, Screenshot enthält.&#10;&#10;KI-generierte Inhalte können fehlerhaft sein.">
               <a:extLst>
                 <a:ext uri="{FF2B5EF4-FFF2-40B4-BE49-F238E27FC236}">
                   <a16:creationId xmlns:a16="http://schemas.microsoft.com/office/drawing/2014/main" id="{85B55A76-AEF2-8946-FEEF-B657795925EC}"/>
@@ -5911,7 +5472,7 @@
         </p:pic>
         <p:pic>
           <p:nvPicPr>
-            <p:cNvPr id="29" name="Grafik 18" descr="Ein Bild, das Karte, Text, Screenshot enthält.&#10;&#10;KI-generierte Inhalte können fehlerhaft sein.">
+            <p:cNvPr id="61" name="Grafik 18" descr="Ein Bild, das Karte, Text, Screenshot enthält.&#10;&#10;KI-generierte Inhalte können fehlerhaft sein.">
               <a:extLst>
                 <a:ext uri="{FF2B5EF4-FFF2-40B4-BE49-F238E27FC236}">
                   <a16:creationId xmlns:a16="http://schemas.microsoft.com/office/drawing/2014/main" id="{783DBD9E-F8B7-CAAC-BABD-55D07648C5C7}"/>
@@ -5946,7 +5507,7 @@
         </p:pic>
         <p:pic>
           <p:nvPicPr>
-            <p:cNvPr id="30" name="Grafik 18" descr="Ein Bild, das Karte, Text, Screenshot enthält.&#10;&#10;KI-generierte Inhalte können fehlerhaft sein.">
+            <p:cNvPr id="62" name="Grafik 18" descr="Ein Bild, das Karte, Text, Screenshot enthält.&#10;&#10;KI-generierte Inhalte können fehlerhaft sein.">
               <a:extLst>
                 <a:ext uri="{FF2B5EF4-FFF2-40B4-BE49-F238E27FC236}">
                   <a16:creationId xmlns:a16="http://schemas.microsoft.com/office/drawing/2014/main" id="{B7A23CC6-0CF3-2F59-DA7A-2C80DD04D61F}"/>
@@ -5981,7 +5542,7 @@
         </p:pic>
         <p:pic>
           <p:nvPicPr>
-            <p:cNvPr id="31" name="Grafik 18" descr="Ein Bild, das Karte, Text, Screenshot enthält.&#10;&#10;KI-generierte Inhalte können fehlerhaft sein.">
+            <p:cNvPr id="63" name="Grafik 18" descr="Ein Bild, das Karte, Text, Screenshot enthält.&#10;&#10;KI-generierte Inhalte können fehlerhaft sein.">
               <a:extLst>
                 <a:ext uri="{FF2B5EF4-FFF2-40B4-BE49-F238E27FC236}">
                   <a16:creationId xmlns:a16="http://schemas.microsoft.com/office/drawing/2014/main" id="{A593CF97-9BA7-9179-A5E8-08A663CD6199}"/>
@@ -6026,7 +5587,7 @@
 <file path=ppt/theme/theme1.xml><?xml version="1.0" encoding="utf-8"?>
 <a:theme xmlns:a="http://schemas.openxmlformats.org/drawingml/2006/main" name="Standard">
   <a:themeElements>
-    <a:clrScheme name="Office">
+    <a:clrScheme name="Office Theme">
       <a:dk1>
         <a:sysClr val="windowText" lastClr="000000"/>
       </a:dk1>
@@ -6064,7 +5625,7 @@
         <a:srgbClr val="96607D"/>
       </a:folHlink>
     </a:clrScheme>
-    <a:fontScheme name="Office">
+    <a:fontScheme name="Office Theme">
       <a:majorFont>
         <a:latin typeface="Aptos Display" panose="02110004020202020204"/>
         <a:ea typeface=""/>
@@ -6170,7 +5731,7 @@
         <a:font script="Tfng" typeface="Ebrima"/>
       </a:minorFont>
     </a:fontScheme>
-    <a:fmtScheme name="Office">
+    <a:fmtScheme name="Office Theme">
       <a:fillStyleLst>
         <a:solidFill>
           <a:schemeClr val="phClr"/>
